--- a/slides/doc-ref-09-editable-slides.pptx
+++ b/slides/doc-ref-09-editable-slides.pptx
@@ -2068,7 +2068,7 @@
                 <a:ea typeface="Arial" pitchFamily="34" charset="-122"/>
                 <a:cs typeface="Arial" pitchFamily="34" charset="-120"/>
               </a:rPr>
-              <a:t>Figure 1. Figure 1: Coordinating Root, Order, Distributor, and Tracking agents via A2A Agent Cards and Cloud Run Stateless MCP Servers.</a:t>
+              <a:t>Figure 1. Coordinating Root, Order, Distributor, and Tracking agents via A2A Agent Cards and Cloud Run Stateless MCP Servers.</a:t>
             </a:r>
             <a:endParaRPr lang="en-US" sz="820" dirty="0"/>
           </a:p>
@@ -2136,8 +2136,8 @@
         </p:nvSpPr>
         <p:spPr>
           <a:xfrm>
-            <a:off x="4027932" y="1869948"/>
-            <a:ext cx="1858975" cy="146304"/>
+            <a:off x="4027932" y="1858975"/>
+            <a:ext cx="1773936" cy="105156"/>
           </a:xfrm>
           <a:prstGeom prst="rect">
             <a:avLst/>
@@ -2146,7 +2146,7 @@
           <a:ln/>
         </p:spPr>
         <p:txBody>
-          <a:bodyPr wrap="square" lIns="0" tIns="0" rIns="0" bIns="0" rtlCol="0" anchor="t">
+          <a:bodyPr wrap="none" lIns="0" tIns="0" rIns="0" bIns="0" rtlCol="0" anchor="t">
             <a:normAutofit/>
           </a:bodyPr>
           <a:lstStyle/>
@@ -2158,17 +2158,17 @@
               <a:buNone/>
             </a:pPr>
             <a:r>
-              <a:rPr lang="en-US" sz="460" b="1" dirty="0">
-                <a:solidFill>
-                  <a:srgbClr val="202124"/>
-                </a:solidFill>
-                <a:latin typeface="Arial" pitchFamily="34" charset="0"/>
-                <a:ea typeface="Arial" pitchFamily="34" charset="-122"/>
-                <a:cs typeface="Arial" pitchFamily="34" charset="-120"/>
-              </a:rPr>
-              <a:t>The Multi-Tenant Agentic Triad: Security (Hops 1–5) • FinOps COGS (-84.7%) • Zero-PII Observability</a:t>
-            </a:r>
-            <a:endParaRPr lang="en-US" sz="460" dirty="0"/>
+              <a:rPr lang="en-US" sz="420" b="1" dirty="0">
+                <a:solidFill>
+                  <a:srgbClr val="202124"/>
+                </a:solidFill>
+                <a:latin typeface="Arial" pitchFamily="34" charset="0"/>
+                <a:ea typeface="Arial" pitchFamily="34" charset="-122"/>
+                <a:cs typeface="Arial" pitchFamily="34" charset="-120"/>
+              </a:rPr>
+              <a:t>The Multi-Tenant Agentic Triad: Security (Hops 1–5) • FinOps COGS (-84.7%)</a:t>
+            </a:r>
+            <a:endParaRPr lang="en-US" sz="420" dirty="0"/>
           </a:p>
         </p:txBody>
       </p:sp>
@@ -2207,8 +2207,8 @@
         </p:nvSpPr>
         <p:spPr>
           <a:xfrm>
-            <a:off x="4088282" y="2004365"/>
-            <a:ext cx="1805940" cy="146304"/>
+            <a:off x="4088282" y="1993392"/>
+            <a:ext cx="1723644" cy="105156"/>
           </a:xfrm>
           <a:prstGeom prst="rect">
             <a:avLst/>
@@ -2217,7 +2217,7 @@
           <a:ln/>
         </p:spPr>
         <p:txBody>
-          <a:bodyPr wrap="square" lIns="0" tIns="0" rIns="0" bIns="0" rtlCol="0" anchor="t">
+          <a:bodyPr wrap="none" lIns="0" tIns="0" rIns="0" bIns="0" rtlCol="0" anchor="t">
             <a:normAutofit/>
           </a:bodyPr>
           <a:lstStyle/>
@@ -2229,17 +2229,17 @@
               <a:buNone/>
             </a:pPr>
             <a:r>
-              <a:rPr lang="en-US" sz="460" b="1" dirty="0">
-                <a:solidFill>
-                  <a:srgbClr val="202124"/>
-                </a:solidFill>
-                <a:latin typeface="Arial" pitchFamily="34" charset="0"/>
-                <a:ea typeface="Arial" pitchFamily="34" charset="-122"/>
-                <a:cs typeface="Arial" pitchFamily="34" charset="-120"/>
-              </a:rPr>
-              <a:t>Unified Vertex AI Agent Engine &amp; Google ADK Reference Architecture (20/20 Simulations PASS)</a:t>
-            </a:r>
-            <a:endParaRPr lang="en-US" sz="460" dirty="0"/>
+              <a:rPr lang="en-US" sz="420" b="1" dirty="0">
+                <a:solidFill>
+                  <a:srgbClr val="202124"/>
+                </a:solidFill>
+                <a:latin typeface="Arial" pitchFamily="34" charset="0"/>
+                <a:ea typeface="Arial" pitchFamily="34" charset="-122"/>
+                <a:cs typeface="Arial" pitchFamily="34" charset="-120"/>
+              </a:rPr>
+              <a:t>Unified Vertex AI Agent Engine &amp; Google ADK Reference Architecture</a:t>
+            </a:r>
+            <a:endParaRPr lang="en-US" sz="420" dirty="0"/>
           </a:p>
         </p:txBody>
       </p:sp>
@@ -2278,8 +2278,8 @@
         </p:nvSpPr>
         <p:spPr>
           <a:xfrm>
-            <a:off x="4155034" y="3757270"/>
-            <a:ext cx="1255471" cy="146304"/>
+            <a:off x="4155034" y="3746297"/>
+            <a:ext cx="1255471" cy="105156"/>
           </a:xfrm>
           <a:prstGeom prst="rect">
             <a:avLst/>
@@ -2288,7 +2288,7 @@
           <a:ln/>
         </p:spPr>
         <p:txBody>
-          <a:bodyPr wrap="square" lIns="0" tIns="0" rIns="0" bIns="0" rtlCol="0" anchor="t">
+          <a:bodyPr wrap="none" lIns="0" tIns="0" rIns="0" bIns="0" rtlCol="0" anchor="t">
             <a:normAutofit/>
           </a:bodyPr>
           <a:lstStyle/>
@@ -2349,8 +2349,8 @@
         </p:nvSpPr>
         <p:spPr>
           <a:xfrm>
-            <a:off x="6192317" y="3757270"/>
-            <a:ext cx="1255471" cy="146304"/>
+            <a:off x="6192317" y="3746297"/>
+            <a:ext cx="1255471" cy="105156"/>
           </a:xfrm>
           <a:prstGeom prst="rect">
             <a:avLst/>
@@ -2359,7 +2359,7 @@
           <a:ln/>
         </p:spPr>
         <p:txBody>
-          <a:bodyPr wrap="square" lIns="0" tIns="0" rIns="0" bIns="0" rtlCol="0" anchor="t">
+          <a:bodyPr wrap="none" lIns="0" tIns="0" rIns="0" bIns="0" rtlCol="0" anchor="t">
             <a:normAutofit/>
           </a:bodyPr>
           <a:lstStyle/>
@@ -2379,7 +2379,7 @@
                 <a:ea typeface="Arial" pitchFamily="34" charset="-122"/>
                 <a:cs typeface="Arial" pitchFamily="34" charset="-120"/>
               </a:rPr>
-              <a:t>Triad Pillar 2 (Regulated Scale): Pattern B Silos ($$$) &amp; Pattern C Hybrid ($$)</a:t>
+              <a:t>Triad Pillar 2 (Regulated Scale): Pattern B Silos ($$$) &amp; Pattern C Hybrid</a:t>
             </a:r>
             <a:endParaRPr lang="en-US" sz="385" dirty="0"/>
           </a:p>
@@ -2694,7 +2694,7 @@
         <p:spPr>
           <a:xfrm>
             <a:off x="6881774" y="2161642"/>
-            <a:ext cx="1145743" cy="146304"/>
+            <a:ext cx="1145743" cy="137160"/>
           </a:xfrm>
           <a:prstGeom prst="rect">
             <a:avLst/>
@@ -3918,8 +3918,8 @@
         </p:blipFill>
         <p:spPr>
           <a:xfrm>
-            <a:off x="5576926" y="2516429"/>
-            <a:ext cx="181966" cy="181966"/>
+            <a:off x="5563210" y="2536546"/>
+            <a:ext cx="141732" cy="141732"/>
           </a:xfrm>
           <a:prstGeom prst="rect">
             <a:avLst/>
@@ -3934,8 +3934,8 @@
         </p:nvSpPr>
         <p:spPr>
           <a:xfrm>
-            <a:off x="5795467" y="2474366"/>
-            <a:ext cx="689458" cy="266090"/>
+            <a:off x="5727802" y="2470709"/>
+            <a:ext cx="779069" cy="273406"/>
           </a:xfrm>
           <a:prstGeom prst="rect">
             <a:avLst/>
@@ -3951,12 +3951,12 @@
           <a:p>
             <a:pPr algn="l" indent="0" marL="0">
               <a:lnSpc>
-                <a:spcPct val="86000"/>
-              </a:lnSpc>
-              <a:buNone/>
-            </a:pPr>
-            <a:r>
-              <a:rPr lang="en-US" sz="500" b="1" dirty="0">
+                <a:spcPct val="88000"/>
+              </a:lnSpc>
+              <a:buNone/>
+            </a:pPr>
+            <a:r>
+              <a:rPr lang="en-US" sz="435" b="1" dirty="0">
                 <a:solidFill>
                   <a:srgbClr val="202124"/>
                 </a:solidFill>
@@ -3966,17 +3966,17 @@
               </a:rPr>
               <a:t>External Application Load Balancer</a:t>
             </a:r>
-            <a:endParaRPr lang="en-US" sz="500" dirty="0"/>
+            <a:endParaRPr lang="en-US" sz="435" dirty="0"/>
           </a:p>
           <a:p>
             <a:pPr algn="l" indent="0" marL="0">
               <a:lnSpc>
-                <a:spcPct val="86000"/>
-              </a:lnSpc>
-              <a:buNone/>
-            </a:pPr>
-            <a:r>
-              <a:rPr lang="en-US" sz="430" dirty="0">
+                <a:spcPct val="88000"/>
+              </a:lnSpc>
+              <a:buNone/>
+            </a:pPr>
+            <a:r>
+              <a:rPr lang="en-US" sz="375" dirty="0">
                 <a:solidFill>
                   <a:srgbClr val="3C4043"/>
                 </a:solidFill>
@@ -3986,7 +3986,7 @@
               </a:rPr>
               <a:t>Global Anycast Ingress</a:t>
             </a:r>
-            <a:endParaRPr lang="en-US" sz="500" dirty="0"/>
+            <a:endParaRPr lang="en-US" sz="435" dirty="0"/>
           </a:p>
         </p:txBody>
       </p:sp>
@@ -4033,8 +4033,8 @@
         </p:blipFill>
         <p:spPr>
           <a:xfrm>
-            <a:off x="6969557" y="2416759"/>
-            <a:ext cx="172822" cy="172822"/>
+            <a:off x="6955841" y="2435962"/>
+            <a:ext cx="134417" cy="134417"/>
           </a:xfrm>
           <a:prstGeom prst="rect">
             <a:avLst/>
@@ -4049,8 +4049,8 @@
         </p:nvSpPr>
         <p:spPr>
           <a:xfrm>
-            <a:off x="7178954" y="2377440"/>
-            <a:ext cx="750722" cy="251460"/>
+            <a:off x="7113118" y="2373782"/>
+            <a:ext cx="838505" cy="258775"/>
           </a:xfrm>
           <a:prstGeom prst="rect">
             <a:avLst/>
@@ -4066,12 +4066,12 @@
           <a:p>
             <a:pPr algn="l" indent="0" marL="0">
               <a:lnSpc>
-                <a:spcPct val="86000"/>
-              </a:lnSpc>
-              <a:buNone/>
-            </a:pPr>
-            <a:r>
-              <a:rPr lang="en-US" sz="500" b="1" dirty="0">
+                <a:spcPct val="88000"/>
+              </a:lnSpc>
+              <a:buNone/>
+            </a:pPr>
+            <a:r>
+              <a:rPr lang="en-US" sz="435" b="1" dirty="0">
                 <a:solidFill>
                   <a:srgbClr val="202124"/>
                 </a:solidFill>
@@ -4081,17 +4081,17 @@
               </a:rPr>
               <a:t>Security Command Center</a:t>
             </a:r>
-            <a:endParaRPr lang="en-US" sz="500" dirty="0"/>
+            <a:endParaRPr lang="en-US" sz="435" dirty="0"/>
           </a:p>
           <a:p>
             <a:pPr algn="l" indent="0" marL="0">
               <a:lnSpc>
-                <a:spcPct val="86000"/>
-              </a:lnSpc>
-              <a:buNone/>
-            </a:pPr>
-            <a:r>
-              <a:rPr lang="en-US" sz="430" dirty="0">
+                <a:spcPct val="88000"/>
+              </a:lnSpc>
+              <a:buNone/>
+            </a:pPr>
+            <a:r>
+              <a:rPr lang="en-US" sz="375" dirty="0">
                 <a:solidFill>
                   <a:srgbClr val="3C4043"/>
                 </a:solidFill>
@@ -4101,7 +4101,7 @@
               </a:rPr>
               <a:t>Unified SIEM &amp; Audit Lineage</a:t>
             </a:r>
-            <a:endParaRPr lang="en-US" sz="500" dirty="0"/>
+            <a:endParaRPr lang="en-US" sz="435" dirty="0"/>
           </a:p>
         </p:txBody>
       </p:sp>
@@ -4148,8 +4148,8 @@
         </p:blipFill>
         <p:spPr>
           <a:xfrm>
-            <a:off x="6985102" y="3043123"/>
-            <a:ext cx="163678" cy="163678"/>
+            <a:off x="6971386" y="3061411"/>
+            <a:ext cx="128016" cy="128016"/>
           </a:xfrm>
           <a:prstGeom prst="rect">
             <a:avLst/>
@@ -4164,8 +4164,8 @@
         </p:nvSpPr>
         <p:spPr>
           <a:xfrm>
-            <a:off x="7185355" y="3006547"/>
-            <a:ext cx="730606" cy="236830"/>
+            <a:off x="7121347" y="3002890"/>
+            <a:ext cx="817474" cy="244145"/>
           </a:xfrm>
           <a:prstGeom prst="rect">
             <a:avLst/>
@@ -4181,12 +4181,12 @@
           <a:p>
             <a:pPr algn="l" indent="0" marL="0">
               <a:lnSpc>
-                <a:spcPct val="86000"/>
-              </a:lnSpc>
-              <a:buNone/>
-            </a:pPr>
-            <a:r>
-              <a:rPr lang="en-US" sz="500" b="1" dirty="0">
+                <a:spcPct val="88000"/>
+              </a:lnSpc>
+              <a:buNone/>
+            </a:pPr>
+            <a:r>
+              <a:rPr lang="en-US" sz="435" b="1" dirty="0">
                 <a:solidFill>
                   <a:srgbClr val="202124"/>
                 </a:solidFill>
@@ -4196,17 +4196,17 @@
               </a:rPr>
               <a:t>BigQuery OTel Sink</a:t>
             </a:r>
-            <a:endParaRPr lang="en-US" sz="500" dirty="0"/>
+            <a:endParaRPr lang="en-US" sz="435" dirty="0"/>
           </a:p>
           <a:p>
             <a:pPr algn="l" indent="0" marL="0">
               <a:lnSpc>
-                <a:spcPct val="86000"/>
-              </a:lnSpc>
-              <a:buNone/>
-            </a:pPr>
-            <a:r>
-              <a:rPr lang="en-US" sz="430" dirty="0">
+                <a:spcPct val="88000"/>
+              </a:lnSpc>
+              <a:buNone/>
+            </a:pPr>
+            <a:r>
+              <a:rPr lang="en-US" sz="375" dirty="0">
                 <a:solidFill>
                   <a:srgbClr val="3C4043"/>
                 </a:solidFill>
@@ -4216,7 +4216,7 @@
               </a:rPr>
               <a:t>Zero-PII Cryptographic Spans</a:t>
             </a:r>
-            <a:endParaRPr lang="en-US" sz="500" dirty="0"/>
+            <a:endParaRPr lang="en-US" sz="435" dirty="0"/>
           </a:p>
         </p:txBody>
       </p:sp>
@@ -4263,8 +4263,8 @@
         </p:blipFill>
         <p:spPr>
           <a:xfrm>
-            <a:off x="6992417" y="2735885"/>
-            <a:ext cx="163678" cy="163678"/>
+            <a:off x="6978701" y="2754173"/>
+            <a:ext cx="128016" cy="128016"/>
           </a:xfrm>
           <a:prstGeom prst="rect">
             <a:avLst/>
@@ -4279,8 +4279,8 @@
         </p:nvSpPr>
         <p:spPr>
           <a:xfrm>
-            <a:off x="7192670" y="2699309"/>
-            <a:ext cx="715061" cy="236830"/>
+            <a:off x="7128662" y="2695651"/>
+            <a:ext cx="801014" cy="244145"/>
           </a:xfrm>
           <a:prstGeom prst="rect">
             <a:avLst/>
@@ -4296,12 +4296,12 @@
           <a:p>
             <a:pPr algn="l" indent="0" marL="0">
               <a:lnSpc>
-                <a:spcPct val="86000"/>
-              </a:lnSpc>
-              <a:buNone/>
-            </a:pPr>
-            <a:r>
-              <a:rPr lang="en-US" sz="500" b="1" dirty="0">
+                <a:spcPct val="88000"/>
+              </a:lnSpc>
+              <a:buNone/>
+            </a:pPr>
+            <a:r>
+              <a:rPr lang="en-US" sz="435" b="1" dirty="0">
                 <a:solidFill>
                   <a:srgbClr val="202124"/>
                 </a:solidFill>
@@ -4311,17 +4311,17 @@
               </a:rPr>
               <a:t>3 Chargeback Models</a:t>
             </a:r>
-            <a:endParaRPr lang="en-US" sz="500" dirty="0"/>
+            <a:endParaRPr lang="en-US" sz="435" dirty="0"/>
           </a:p>
           <a:p>
             <a:pPr algn="l" indent="0" marL="0">
               <a:lnSpc>
-                <a:spcPct val="86000"/>
-              </a:lnSpc>
-              <a:buNone/>
-            </a:pPr>
-            <a:r>
-              <a:rPr lang="en-US" sz="430" dirty="0">
+                <a:spcPct val="88000"/>
+              </a:lnSpc>
+              <a:buNone/>
+            </a:pPr>
+            <a:r>
+              <a:rPr lang="en-US" sz="375" dirty="0">
                 <a:solidFill>
                   <a:srgbClr val="3C4043"/>
                 </a:solidFill>
@@ -4331,7 +4331,7 @@
               </a:rPr>
               <a:t>Even, Proportional &amp; Tiered</a:t>
             </a:r>
-            <a:endParaRPr lang="en-US" sz="500" dirty="0"/>
+            <a:endParaRPr lang="en-US" sz="435" dirty="0"/>
           </a:p>
         </p:txBody>
       </p:sp>
@@ -4378,8 +4378,8 @@
         </p:blipFill>
         <p:spPr>
           <a:xfrm>
-            <a:off x="5164531" y="4358030"/>
-            <a:ext cx="177394" cy="177394"/>
+            <a:off x="5150815" y="4377233"/>
+            <a:ext cx="138074" cy="138074"/>
           </a:xfrm>
           <a:prstGeom prst="rect">
             <a:avLst/>
@@ -4394,8 +4394,8 @@
         </p:nvSpPr>
         <p:spPr>
           <a:xfrm>
-            <a:off x="5378501" y="4316882"/>
-            <a:ext cx="513893" cy="258775"/>
+            <a:off x="5311750" y="4313225"/>
+            <a:ext cx="602590" cy="266090"/>
           </a:xfrm>
           <a:prstGeom prst="rect">
             <a:avLst/>
@@ -4411,12 +4411,12 @@
           <a:p>
             <a:pPr algn="l" indent="0" marL="0">
               <a:lnSpc>
-                <a:spcPct val="86000"/>
-              </a:lnSpc>
-              <a:buNone/>
-            </a:pPr>
-            <a:r>
-              <a:rPr lang="en-US" sz="500" b="1" dirty="0">
+                <a:spcPct val="88000"/>
+              </a:lnSpc>
+              <a:buNone/>
+            </a:pPr>
+            <a:r>
+              <a:rPr lang="en-US" sz="435" b="1" dirty="0">
                 <a:solidFill>
                   <a:srgbClr val="202124"/>
                 </a:solidFill>
@@ -4426,17 +4426,17 @@
               </a:rPr>
               <a:t>Thinking Budget Cap</a:t>
             </a:r>
-            <a:endParaRPr lang="en-US" sz="500" dirty="0"/>
+            <a:endParaRPr lang="en-US" sz="435" dirty="0"/>
           </a:p>
           <a:p>
             <a:pPr algn="l" indent="0" marL="0">
               <a:lnSpc>
-                <a:spcPct val="86000"/>
-              </a:lnSpc>
-              <a:buNone/>
-            </a:pPr>
-            <a:r>
-              <a:rPr lang="en-US" sz="430" dirty="0">
+                <a:spcPct val="88000"/>
+              </a:lnSpc>
+              <a:buNone/>
+            </a:pPr>
+            <a:r>
+              <a:rPr lang="en-US" sz="375" dirty="0">
                 <a:solidFill>
                   <a:srgbClr val="3C4043"/>
                 </a:solidFill>
@@ -4446,7 +4446,7 @@
               </a:rPr>
               <a:t>Clamps 4k Std vs 8k Ent</a:t>
             </a:r>
-            <a:endParaRPr lang="en-US" sz="500" dirty="0"/>
+            <a:endParaRPr lang="en-US" sz="435" dirty="0"/>
           </a:p>
         </p:txBody>
       </p:sp>
@@ -4493,8 +4493,8 @@
         </p:blipFill>
         <p:spPr>
           <a:xfrm>
-            <a:off x="5164531" y="4897526"/>
-            <a:ext cx="177394" cy="177394"/>
+            <a:off x="5150815" y="4916729"/>
+            <a:ext cx="138074" cy="138074"/>
           </a:xfrm>
           <a:prstGeom prst="rect">
             <a:avLst/>
@@ -4509,8 +4509,8 @@
         </p:nvSpPr>
         <p:spPr>
           <a:xfrm>
-            <a:off x="5378501" y="4856378"/>
-            <a:ext cx="513893" cy="258775"/>
+            <a:off x="5311750" y="4852721"/>
+            <a:ext cx="602590" cy="266090"/>
           </a:xfrm>
           <a:prstGeom prst="rect">
             <a:avLst/>
@@ -4526,12 +4526,12 @@
           <a:p>
             <a:pPr algn="l" indent="0" marL="0">
               <a:lnSpc>
-                <a:spcPct val="86000"/>
-              </a:lnSpc>
-              <a:buNone/>
-            </a:pPr>
-            <a:r>
-              <a:rPr lang="en-US" sz="500" b="1" dirty="0">
+                <a:spcPct val="88000"/>
+              </a:lnSpc>
+              <a:buNone/>
+            </a:pPr>
+            <a:r>
+              <a:rPr lang="en-US" sz="435" b="1" dirty="0">
                 <a:solidFill>
                   <a:srgbClr val="202124"/>
                 </a:solidFill>
@@ -4541,17 +4541,17 @@
               </a:rPr>
               <a:t>2LO &amp; 3LO Auth Mgr</a:t>
             </a:r>
-            <a:endParaRPr lang="en-US" sz="500" dirty="0"/>
+            <a:endParaRPr lang="en-US" sz="435" dirty="0"/>
           </a:p>
           <a:p>
             <a:pPr algn="l" indent="0" marL="0">
               <a:lnSpc>
-                <a:spcPct val="86000"/>
-              </a:lnSpc>
-              <a:buNone/>
-            </a:pPr>
-            <a:r>
-              <a:rPr lang="en-US" sz="430" dirty="0">
+                <a:spcPct val="88000"/>
+              </a:lnSpc>
+              <a:buNone/>
+            </a:pPr>
+            <a:r>
+              <a:rPr lang="en-US" sz="375" dirty="0">
                 <a:solidFill>
                   <a:srgbClr val="3C4043"/>
                 </a:solidFill>
@@ -4561,7 +4561,7 @@
               </a:rPr>
               <a:t>Scoped Per-Tenant Vault</a:t>
             </a:r>
-            <a:endParaRPr lang="en-US" sz="500" dirty="0"/>
+            <a:endParaRPr lang="en-US" sz="435" dirty="0"/>
           </a:p>
         </p:txBody>
       </p:sp>
@@ -4608,8 +4608,8 @@
         </p:blipFill>
         <p:spPr>
           <a:xfrm>
-            <a:off x="5164531" y="5459882"/>
-            <a:ext cx="177394" cy="177394"/>
+            <a:off x="5150815" y="5479085"/>
+            <a:ext cx="138074" cy="138074"/>
           </a:xfrm>
           <a:prstGeom prst="rect">
             <a:avLst/>
@@ -4624,8 +4624,8 @@
         </p:nvSpPr>
         <p:spPr>
           <a:xfrm>
-            <a:off x="5378501" y="5418734"/>
-            <a:ext cx="513893" cy="258775"/>
+            <a:off x="5311750" y="5415077"/>
+            <a:ext cx="602590" cy="266090"/>
           </a:xfrm>
           <a:prstGeom prst="rect">
             <a:avLst/>
@@ -4641,12 +4641,12 @@
           <a:p>
             <a:pPr algn="l" indent="0" marL="0">
               <a:lnSpc>
-                <a:spcPct val="86000"/>
-              </a:lnSpc>
-              <a:buNone/>
-            </a:pPr>
-            <a:r>
-              <a:rPr lang="en-US" sz="500" b="1" dirty="0">
+                <a:spcPct val="88000"/>
+              </a:lnSpc>
+              <a:buNone/>
+            </a:pPr>
+            <a:r>
+              <a:rPr lang="en-US" sz="435" b="1" dirty="0">
                 <a:solidFill>
                   <a:srgbClr val="202124"/>
                 </a:solidFill>
@@ -4656,17 +4656,17 @@
               </a:rPr>
               <a:t>AlloyDB RLS &amp; L1–L5</a:t>
             </a:r>
-            <a:endParaRPr lang="en-US" sz="500" dirty="0"/>
+            <a:endParaRPr lang="en-US" sz="435" dirty="0"/>
           </a:p>
           <a:p>
             <a:pPr algn="l" indent="0" marL="0">
               <a:lnSpc>
-                <a:spcPct val="86000"/>
-              </a:lnSpc>
-              <a:buNone/>
-            </a:pPr>
-            <a:r>
-              <a:rPr lang="en-US" sz="430" dirty="0">
+                <a:spcPct val="88000"/>
+              </a:lnSpc>
+              <a:buNone/>
+            </a:pPr>
+            <a:r>
+              <a:rPr lang="en-US" sz="375" dirty="0">
                 <a:solidFill>
                   <a:srgbClr val="3C4043"/>
                 </a:solidFill>
@@ -4676,7 +4676,7 @@
               </a:rPr>
               <a:t>Shared Storage Density</a:t>
             </a:r>
-            <a:endParaRPr lang="en-US" sz="500" dirty="0"/>
+            <a:endParaRPr lang="en-US" sz="435" dirty="0"/>
           </a:p>
         </p:txBody>
       </p:sp>
@@ -4723,8 +4723,8 @@
         </p:blipFill>
         <p:spPr>
           <a:xfrm>
-            <a:off x="7201814" y="4358030"/>
-            <a:ext cx="177394" cy="177394"/>
+            <a:off x="7188098" y="4377233"/>
+            <a:ext cx="138074" cy="138074"/>
           </a:xfrm>
           <a:prstGeom prst="rect">
             <a:avLst/>
@@ -4739,8 +4739,8 @@
         </p:nvSpPr>
         <p:spPr>
           <a:xfrm>
-            <a:off x="7415784" y="4316882"/>
-            <a:ext cx="513893" cy="258775"/>
+            <a:off x="7349033" y="4313225"/>
+            <a:ext cx="602590" cy="266090"/>
           </a:xfrm>
           <a:prstGeom prst="rect">
             <a:avLst/>
@@ -4756,12 +4756,12 @@
           <a:p>
             <a:pPr algn="l" indent="0" marL="0">
               <a:lnSpc>
-                <a:spcPct val="86000"/>
-              </a:lnSpc>
-              <a:buNone/>
-            </a:pPr>
-            <a:r>
-              <a:rPr lang="en-US" sz="500" b="1" dirty="0">
+                <a:spcPct val="88000"/>
+              </a:lnSpc>
+              <a:buNone/>
+            </a:pPr>
+            <a:r>
+              <a:rPr lang="en-US" sz="435" b="1" dirty="0">
                 <a:solidFill>
                   <a:srgbClr val="202124"/>
                 </a:solidFill>
@@ -4771,17 +4771,17 @@
               </a:rPr>
               <a:t>PSC Spoke Runtime</a:t>
             </a:r>
-            <a:endParaRPr lang="en-US" sz="500" dirty="0"/>
+            <a:endParaRPr lang="en-US" sz="435" dirty="0"/>
           </a:p>
           <a:p>
             <a:pPr algn="l" indent="0" marL="0">
               <a:lnSpc>
-                <a:spcPct val="86000"/>
-              </a:lnSpc>
-              <a:buNone/>
-            </a:pPr>
-            <a:r>
-              <a:rPr lang="en-US" sz="430" dirty="0">
+                <a:spcPct val="88000"/>
+              </a:lnSpc>
+              <a:buNone/>
+            </a:pPr>
+            <a:r>
+              <a:rPr lang="en-US" sz="375" dirty="0">
                 <a:solidFill>
                   <a:srgbClr val="3C4043"/>
                 </a:solidFill>
@@ -4791,7 +4791,7 @@
               </a:rPr>
               <a:t>3-Phase Live Tier Upgrade</a:t>
             </a:r>
-            <a:endParaRPr lang="en-US" sz="500" dirty="0"/>
+            <a:endParaRPr lang="en-US" sz="435" dirty="0"/>
           </a:p>
         </p:txBody>
       </p:sp>
@@ -4838,8 +4838,8 @@
         </p:blipFill>
         <p:spPr>
           <a:xfrm>
-            <a:off x="7201814" y="4897526"/>
-            <a:ext cx="177394" cy="177394"/>
+            <a:off x="7188098" y="4916729"/>
+            <a:ext cx="138074" cy="138074"/>
           </a:xfrm>
           <a:prstGeom prst="rect">
             <a:avLst/>
@@ -4854,8 +4854,8 @@
         </p:nvSpPr>
         <p:spPr>
           <a:xfrm>
-            <a:off x="7415784" y="4856378"/>
-            <a:ext cx="513893" cy="258775"/>
+            <a:off x="7349033" y="4852721"/>
+            <a:ext cx="602590" cy="266090"/>
           </a:xfrm>
           <a:prstGeom prst="rect">
             <a:avLst/>
@@ -4871,12 +4871,12 @@
           <a:p>
             <a:pPr algn="l" indent="0" marL="0">
               <a:lnSpc>
-                <a:spcPct val="86000"/>
-              </a:lnSpc>
-              <a:buNone/>
-            </a:pPr>
-            <a:r>
-              <a:rPr lang="en-US" sz="500" b="1" dirty="0">
+                <a:spcPct val="88000"/>
+              </a:lnSpc>
+              <a:buNone/>
+            </a:pPr>
+            <a:r>
+              <a:rPr lang="en-US" sz="435" b="1" dirty="0">
                 <a:solidFill>
                   <a:srgbClr val="202124"/>
                 </a:solidFill>
@@ -4886,17 +4886,17 @@
               </a:rPr>
               <a:t>Dedicated Silo MCP</a:t>
             </a:r>
-            <a:endParaRPr lang="en-US" sz="500" dirty="0"/>
+            <a:endParaRPr lang="en-US" sz="435" dirty="0"/>
           </a:p>
           <a:p>
             <a:pPr algn="l" indent="0" marL="0">
               <a:lnSpc>
-                <a:spcPct val="86000"/>
-              </a:lnSpc>
-              <a:buNone/>
-            </a:pPr>
-            <a:r>
-              <a:rPr lang="en-US" sz="430" dirty="0">
+                <a:spcPct val="88000"/>
+              </a:lnSpc>
+              <a:buNone/>
+            </a:pPr>
+            <a:r>
+              <a:rPr lang="en-US" sz="375" dirty="0">
                 <a:solidFill>
                   <a:srgbClr val="3C4043"/>
                 </a:solidFill>
@@ -4906,7 +4906,7 @@
               </a:rPr>
               <a:t>Zero Cross-Project Egress</a:t>
             </a:r>
-            <a:endParaRPr lang="en-US" sz="500" dirty="0"/>
+            <a:endParaRPr lang="en-US" sz="435" dirty="0"/>
           </a:p>
         </p:txBody>
       </p:sp>
@@ -4953,8 +4953,8 @@
         </p:blipFill>
         <p:spPr>
           <a:xfrm>
-            <a:off x="7201814" y="5459882"/>
-            <a:ext cx="177394" cy="177394"/>
+            <a:off x="7188098" y="5479085"/>
+            <a:ext cx="138074" cy="138074"/>
           </a:xfrm>
           <a:prstGeom prst="rect">
             <a:avLst/>
@@ -4969,8 +4969,8 @@
         </p:nvSpPr>
         <p:spPr>
           <a:xfrm>
-            <a:off x="7415784" y="5418734"/>
-            <a:ext cx="513893" cy="258775"/>
+            <a:off x="7349033" y="5415077"/>
+            <a:ext cx="602590" cy="266090"/>
           </a:xfrm>
           <a:prstGeom prst="rect">
             <a:avLst/>
@@ -4986,12 +4986,12 @@
           <a:p>
             <a:pPr algn="l" indent="0" marL="0">
               <a:lnSpc>
-                <a:spcPct val="86000"/>
-              </a:lnSpc>
-              <a:buNone/>
-            </a:pPr>
-            <a:r>
-              <a:rPr lang="en-US" sz="500" b="1" dirty="0">
+                <a:spcPct val="88000"/>
+              </a:lnSpc>
+              <a:buNone/>
+            </a:pPr>
+            <a:r>
+              <a:rPr lang="en-US" sz="435" b="1" dirty="0">
                 <a:solidFill>
                   <a:srgbClr val="202124"/>
                 </a:solidFill>
@@ -5001,17 +5001,17 @@
               </a:rPr>
               <a:t>Cloud KMS CMEK Lock</a:t>
             </a:r>
-            <a:endParaRPr lang="en-US" sz="500" dirty="0"/>
+            <a:endParaRPr lang="en-US" sz="435" dirty="0"/>
           </a:p>
           <a:p>
             <a:pPr algn="l" indent="0" marL="0">
               <a:lnSpc>
-                <a:spcPct val="86000"/>
-              </a:lnSpc>
-              <a:buNone/>
-            </a:pPr>
-            <a:r>
-              <a:rPr lang="en-US" sz="430" dirty="0">
+                <a:spcPct val="88000"/>
+              </a:lnSpc>
+              <a:buNone/>
+            </a:pPr>
+            <a:r>
+              <a:rPr lang="en-US" sz="375" dirty="0">
                 <a:solidFill>
                   <a:srgbClr val="3C4043"/>
                 </a:solidFill>
@@ -5021,7 +5021,7 @@
               </a:rPr>
               <a:t>Instant HTTP 423 Kill-Switch</a:t>
             </a:r>
-            <a:endParaRPr lang="en-US" sz="500" dirty="0"/>
+            <a:endParaRPr lang="en-US" sz="435" dirty="0"/>
           </a:p>
         </p:txBody>
       </p:sp>
@@ -5068,8 +5068,8 @@
         </p:blipFill>
         <p:spPr>
           <a:xfrm>
-            <a:off x="5666537" y="3065069"/>
-            <a:ext cx="158191" cy="158191"/>
+            <a:off x="5652821" y="3081528"/>
+            <a:ext cx="123444" cy="123444"/>
           </a:xfrm>
           <a:prstGeom prst="rect">
             <a:avLst/>
@@ -5084,8 +5084,8 @@
         </p:nvSpPr>
         <p:spPr>
           <a:xfrm>
-            <a:off x="5861304" y="3029407"/>
-            <a:ext cx="570586" cy="228600"/>
+            <a:off x="5799125" y="3025750"/>
+            <a:ext cx="655625" cy="235915"/>
           </a:xfrm>
           <a:prstGeom prst="rect">
             <a:avLst/>
@@ -5101,12 +5101,12 @@
           <a:p>
             <a:pPr algn="l" indent="0" marL="0">
               <a:lnSpc>
-                <a:spcPct val="86000"/>
-              </a:lnSpc>
-              <a:buNone/>
-            </a:pPr>
-            <a:r>
-              <a:rPr lang="en-US" sz="500" b="1" dirty="0">
+                <a:spcPct val="88000"/>
+              </a:lnSpc>
+              <a:buNone/>
+            </a:pPr>
+            <a:r>
+              <a:rPr lang="en-US" sz="435" b="1" dirty="0">
                 <a:solidFill>
                   <a:srgbClr val="202124"/>
                 </a:solidFill>
@@ -5116,17 +5116,17 @@
               </a:rPr>
               <a:t>Architecture Selector</a:t>
             </a:r>
-            <a:endParaRPr lang="en-US" sz="500" dirty="0"/>
+            <a:endParaRPr lang="en-US" sz="435" dirty="0"/>
           </a:p>
           <a:p>
             <a:pPr algn="l" indent="0" marL="0">
               <a:lnSpc>
-                <a:spcPct val="86000"/>
-              </a:lnSpc>
-              <a:buNone/>
-            </a:pPr>
-            <a:r>
-              <a:rPr lang="en-US" sz="430" dirty="0">
+                <a:spcPct val="88000"/>
+              </a:lnSpc>
+              <a:buNone/>
+            </a:pPr>
+            <a:r>
+              <a:rPr lang="en-US" sz="375" dirty="0">
                 <a:solidFill>
                   <a:srgbClr val="3C4043"/>
                 </a:solidFill>
@@ -5136,7 +5136,7 @@
               </a:rPr>
               <a:t>Routes Pattern A, B or C</a:t>
             </a:r>
-            <a:endParaRPr lang="en-US" sz="500" dirty="0"/>
+            <a:endParaRPr lang="en-US" sz="435" dirty="0"/>
           </a:p>
         </p:txBody>
       </p:sp>
@@ -5183,8 +5183,8 @@
         </p:blipFill>
         <p:spPr>
           <a:xfrm>
-            <a:off x="4243730" y="4169664"/>
-            <a:ext cx="172822" cy="172822"/>
+            <a:off x="4230014" y="4190695"/>
+            <a:ext cx="130759" cy="130759"/>
           </a:xfrm>
           <a:prstGeom prst="rect">
             <a:avLst/>
@@ -5199,8 +5199,8 @@
         </p:nvSpPr>
         <p:spPr>
           <a:xfrm>
-            <a:off x="4453128" y="4130345"/>
-            <a:ext cx="444398" cy="251460"/>
+            <a:off x="4383634" y="4126687"/>
+            <a:ext cx="536753" cy="258775"/>
           </a:xfrm>
           <a:prstGeom prst="rect">
             <a:avLst/>
@@ -5216,12 +5216,12 @@
           <a:p>
             <a:pPr algn="l" indent="0" marL="0">
               <a:lnSpc>
-                <a:spcPct val="86000"/>
-              </a:lnSpc>
-              <a:buNone/>
-            </a:pPr>
-            <a:r>
-              <a:rPr lang="en-US" sz="500" b="1" dirty="0">
+                <a:spcPct val="88000"/>
+              </a:lnSpc>
+              <a:buNone/>
+            </a:pPr>
+            <a:r>
+              <a:rPr lang="en-US" sz="435" b="1" dirty="0">
                 <a:solidFill>
                   <a:srgbClr val="202124"/>
                 </a:solidFill>
@@ -5231,17 +5231,17 @@
               </a:rPr>
               <a:t>Valkey Rate Bulkhead</a:t>
             </a:r>
-            <a:endParaRPr lang="en-US" sz="500" dirty="0"/>
+            <a:endParaRPr lang="en-US" sz="435" dirty="0"/>
           </a:p>
           <a:p>
             <a:pPr algn="l" indent="0" marL="0">
               <a:lnSpc>
-                <a:spcPct val="86000"/>
-              </a:lnSpc>
-              <a:buNone/>
-            </a:pPr>
-            <a:r>
-              <a:rPr lang="en-US" sz="430" dirty="0">
+                <a:spcPct val="88000"/>
+              </a:lnSpc>
+              <a:buNone/>
+            </a:pPr>
+            <a:r>
+              <a:rPr lang="en-US" sz="375" dirty="0">
                 <a:solidFill>
                   <a:srgbClr val="3C4043"/>
                 </a:solidFill>
@@ -5251,7 +5251,7 @@
               </a:rPr>
               <a:t>120 RPM Std / 600 RPM Ent</a:t>
             </a:r>
-            <a:endParaRPr lang="en-US" sz="500" dirty="0"/>
+            <a:endParaRPr lang="en-US" sz="435" dirty="0"/>
           </a:p>
         </p:txBody>
       </p:sp>
@@ -5298,8 +5298,8 @@
         </p:blipFill>
         <p:spPr>
           <a:xfrm>
-            <a:off x="4243730" y="5052974"/>
-            <a:ext cx="172822" cy="172822"/>
+            <a:off x="4230014" y="5074006"/>
+            <a:ext cx="130759" cy="130759"/>
           </a:xfrm>
           <a:prstGeom prst="rect">
             <a:avLst/>
@@ -5314,8 +5314,8 @@
         </p:nvSpPr>
         <p:spPr>
           <a:xfrm>
-            <a:off x="4453128" y="5013655"/>
-            <a:ext cx="444398" cy="251460"/>
+            <a:off x="4383634" y="5009998"/>
+            <a:ext cx="536753" cy="258775"/>
           </a:xfrm>
           <a:prstGeom prst="rect">
             <a:avLst/>
@@ -5331,12 +5331,12 @@
           <a:p>
             <a:pPr algn="l" indent="0" marL="0">
               <a:lnSpc>
-                <a:spcPct val="86000"/>
-              </a:lnSpc>
-              <a:buNone/>
-            </a:pPr>
-            <a:r>
-              <a:rPr lang="en-US" sz="500" b="1" dirty="0">
+                <a:spcPct val="88000"/>
+              </a:lnSpc>
+              <a:buNone/>
+            </a:pPr>
+            <a:r>
+              <a:rPr lang="en-US" sz="435" b="1" dirty="0">
                 <a:solidFill>
                   <a:srgbClr val="202124"/>
                 </a:solidFill>
@@ -5346,17 +5346,17 @@
               </a:rPr>
               <a:t>ContextCacheConfig</a:t>
             </a:r>
-            <a:endParaRPr lang="en-US" sz="500" dirty="0"/>
+            <a:endParaRPr lang="en-US" sz="435" dirty="0"/>
           </a:p>
           <a:p>
             <a:pPr algn="l" indent="0" marL="0">
               <a:lnSpc>
-                <a:spcPct val="86000"/>
-              </a:lnSpc>
-              <a:buNone/>
-            </a:pPr>
-            <a:r>
-              <a:rPr lang="en-US" sz="430" dirty="0">
+                <a:spcPct val="88000"/>
+              </a:lnSpc>
+              <a:buNone/>
+            </a:pPr>
+            <a:r>
+              <a:rPr lang="en-US" sz="375" dirty="0">
                 <a:solidFill>
                   <a:srgbClr val="3C4043"/>
                 </a:solidFill>
@@ -5366,7 +5366,7 @@
               </a:rPr>
               <a:t>90% Discount on 32k Prefix</a:t>
             </a:r>
-            <a:endParaRPr lang="en-US" sz="500" dirty="0"/>
+            <a:endParaRPr lang="en-US" sz="435" dirty="0"/>
           </a:p>
         </p:txBody>
       </p:sp>
@@ -5413,8 +5413,8 @@
         </p:blipFill>
         <p:spPr>
           <a:xfrm>
-            <a:off x="6281014" y="4169664"/>
-            <a:ext cx="172822" cy="172822"/>
+            <a:off x="6267298" y="4190695"/>
+            <a:ext cx="130759" cy="130759"/>
           </a:xfrm>
           <a:prstGeom prst="rect">
             <a:avLst/>
@@ -5429,8 +5429,8 @@
         </p:nvSpPr>
         <p:spPr>
           <a:xfrm>
-            <a:off x="6490411" y="4130345"/>
-            <a:ext cx="444398" cy="251460"/>
+            <a:off x="6420917" y="4126687"/>
+            <a:ext cx="536753" cy="258775"/>
           </a:xfrm>
           <a:prstGeom prst="rect">
             <a:avLst/>
@@ -5446,12 +5446,12 @@
           <a:p>
             <a:pPr algn="l" indent="0" marL="0">
               <a:lnSpc>
-                <a:spcPct val="86000"/>
-              </a:lnSpc>
-              <a:buNone/>
-            </a:pPr>
-            <a:r>
-              <a:rPr lang="en-US" sz="500" b="1" dirty="0">
+                <a:spcPct val="88000"/>
+              </a:lnSpc>
+              <a:buNone/>
+            </a:pPr>
+            <a:r>
+              <a:rPr lang="en-US" sz="435" b="1" dirty="0">
                 <a:solidFill>
                   <a:srgbClr val="202124"/>
                 </a:solidFill>
@@ -5461,17 +5461,17 @@
               </a:rPr>
               <a:t>VPC-SC &amp; IAM PAB</a:t>
             </a:r>
-            <a:endParaRPr lang="en-US" sz="500" dirty="0"/>
+            <a:endParaRPr lang="en-US" sz="435" dirty="0"/>
           </a:p>
           <a:p>
             <a:pPr algn="l" indent="0" marL="0">
               <a:lnSpc>
-                <a:spcPct val="86000"/>
-              </a:lnSpc>
-              <a:buNone/>
-            </a:pPr>
-            <a:r>
-              <a:rPr lang="en-US" sz="430" dirty="0">
+                <a:spcPct val="88000"/>
+              </a:lnSpc>
+              <a:buNone/>
+            </a:pPr>
+            <a:r>
+              <a:rPr lang="en-US" sz="375" dirty="0">
                 <a:solidFill>
                   <a:srgbClr val="3C4043"/>
                 </a:solidFill>
@@ -5481,7 +5481,7 @@
               </a:rPr>
               <a:t>Hard Perimeter Isolation</a:t>
             </a:r>
-            <a:endParaRPr lang="en-US" sz="500" dirty="0"/>
+            <a:endParaRPr lang="en-US" sz="435" dirty="0"/>
           </a:p>
         </p:txBody>
       </p:sp>
@@ -5528,8 +5528,8 @@
         </p:blipFill>
         <p:spPr>
           <a:xfrm>
-            <a:off x="6281014" y="4550969"/>
-            <a:ext cx="172822" cy="172822"/>
+            <a:off x="6267298" y="4572000"/>
+            <a:ext cx="130759" cy="130759"/>
           </a:xfrm>
           <a:prstGeom prst="rect">
             <a:avLst/>
@@ -5544,8 +5544,8 @@
         </p:nvSpPr>
         <p:spPr>
           <a:xfrm>
-            <a:off x="6490411" y="4511650"/>
-            <a:ext cx="444398" cy="251460"/>
+            <a:off x="6420917" y="4507992"/>
+            <a:ext cx="536753" cy="258775"/>
           </a:xfrm>
           <a:prstGeom prst="rect">
             <a:avLst/>
@@ -5561,12 +5561,12 @@
           <a:p>
             <a:pPr algn="l" indent="0" marL="0">
               <a:lnSpc>
-                <a:spcPct val="86000"/>
-              </a:lnSpc>
-              <a:buNone/>
-            </a:pPr>
-            <a:r>
-              <a:rPr lang="en-US" sz="500" b="1" dirty="0">
+                <a:spcPct val="88000"/>
+              </a:lnSpc>
+              <a:buNone/>
+            </a:pPr>
+            <a:r>
+              <a:rPr lang="en-US" sz="435" b="1" dirty="0">
                 <a:solidFill>
                   <a:srgbClr val="202124"/>
                 </a:solidFill>
@@ -5576,17 +5576,17 @@
               </a:rPr>
               <a:t>Gemma 3 &amp; Claude 3.7</a:t>
             </a:r>
-            <a:endParaRPr lang="en-US" sz="500" dirty="0"/>
+            <a:endParaRPr lang="en-US" sz="435" dirty="0"/>
           </a:p>
           <a:p>
             <a:pPr algn="l" indent="0" marL="0">
               <a:lnSpc>
-                <a:spcPct val="86000"/>
-              </a:lnSpc>
-              <a:buNone/>
-            </a:pPr>
-            <a:r>
-              <a:rPr lang="en-US" sz="430" dirty="0">
+                <a:spcPct val="88000"/>
+              </a:lnSpc>
+              <a:buNone/>
+            </a:pPr>
+            <a:r>
+              <a:rPr lang="en-US" sz="375" dirty="0">
                 <a:solidFill>
                   <a:srgbClr val="3C4043"/>
                 </a:solidFill>
@@ -5596,7 +5596,7 @@
               </a:rPr>
               <a:t>Air-Gapped GKE &amp; Dedicated PT</a:t>
             </a:r>
-            <a:endParaRPr lang="en-US" sz="500" dirty="0"/>
+            <a:endParaRPr lang="en-US" sz="435" dirty="0"/>
           </a:p>
         </p:txBody>
       </p:sp>
@@ -5643,8 +5643,8 @@
         </p:blipFill>
         <p:spPr>
           <a:xfrm>
-            <a:off x="4213555" y="2382926"/>
-            <a:ext cx="158191" cy="158191"/>
+            <a:off x="4199839" y="2399386"/>
+            <a:ext cx="123444" cy="123444"/>
           </a:xfrm>
           <a:prstGeom prst="rect">
             <a:avLst/>
@@ -5659,8 +5659,8 @@
         </p:nvSpPr>
         <p:spPr>
           <a:xfrm>
-            <a:off x="4408322" y="2347265"/>
-            <a:ext cx="496519" cy="228600"/>
+            <a:off x="4346143" y="2343607"/>
+            <a:ext cx="581558" cy="235915"/>
           </a:xfrm>
           <a:prstGeom prst="rect">
             <a:avLst/>
@@ -5676,32 +5676,32 @@
           <a:p>
             <a:pPr algn="l" indent="0" marL="0">
               <a:lnSpc>
-                <a:spcPct val="86000"/>
-              </a:lnSpc>
-              <a:buNone/>
-            </a:pPr>
-            <a:r>
-              <a:rPr lang="en-US" sz="500" b="1" dirty="0">
-                <a:solidFill>
-                  <a:srgbClr val="202124"/>
-                </a:solidFill>
-                <a:latin typeface="Arial" pitchFamily="34" charset="0"/>
-                <a:ea typeface="Arial" pitchFamily="34" charset="-122"/>
-                <a:cs typeface="Arial" pitchFamily="34" charset="-120"/>
-              </a:rPr>
-              <a:t>Hop 1: Edge PEP</a:t>
-            </a:r>
-            <a:endParaRPr lang="en-US" sz="500" dirty="0"/>
+                <a:spcPct val="88000"/>
+              </a:lnSpc>
+              <a:buNone/>
+            </a:pPr>
+            <a:r>
+              <a:rPr lang="en-US" sz="435" b="1" dirty="0">
+                <a:solidFill>
+                  <a:srgbClr val="202124"/>
+                </a:solidFill>
+                <a:latin typeface="Arial" pitchFamily="34" charset="0"/>
+                <a:ea typeface="Arial" pitchFamily="34" charset="-122"/>
+                <a:cs typeface="Arial" pitchFamily="34" charset="-120"/>
+              </a:rPr>
+              <a:t>Hop 1: Cloud Armor</a:t>
+            </a:r>
+            <a:endParaRPr lang="en-US" sz="435" dirty="0"/>
           </a:p>
           <a:p>
             <a:pPr algn="l" indent="0" marL="0">
               <a:lnSpc>
-                <a:spcPct val="86000"/>
-              </a:lnSpc>
-              <a:buNone/>
-            </a:pPr>
-            <a:r>
-              <a:rPr lang="en-US" sz="430" dirty="0">
+                <a:spcPct val="88000"/>
+              </a:lnSpc>
+              <a:buNone/>
+            </a:pPr>
+            <a:r>
+              <a:rPr lang="en-US" sz="375" dirty="0">
                 <a:solidFill>
                   <a:srgbClr val="3C4043"/>
                 </a:solidFill>
@@ -5709,9 +5709,9 @@
                 <a:ea typeface="Arial" pitchFamily="34" charset="-122"/>
                 <a:cs typeface="Arial" pitchFamily="34" charset="-120"/>
               </a:rPr>
-              <a:t>Header Strip + OBO + DPoP</a:t>
-            </a:r>
-            <a:endParaRPr lang="en-US" sz="500" dirty="0"/>
+              <a:t>WAF Header Strip + OBO + DPoP</a:t>
+            </a:r>
+            <a:endParaRPr lang="en-US" sz="435" dirty="0"/>
           </a:p>
         </p:txBody>
       </p:sp>
@@ -5758,8 +5758,8 @@
         </p:blipFill>
         <p:spPr>
           <a:xfrm>
-            <a:off x="4213555" y="2697480"/>
-            <a:ext cx="158191" cy="158191"/>
+            <a:off x="4199839" y="2713939"/>
+            <a:ext cx="123444" cy="123444"/>
           </a:xfrm>
           <a:prstGeom prst="rect">
             <a:avLst/>
@@ -5774,8 +5774,8 @@
         </p:nvSpPr>
         <p:spPr>
           <a:xfrm>
-            <a:off x="4408322" y="2661818"/>
-            <a:ext cx="496519" cy="228600"/>
+            <a:off x="4346143" y="2658161"/>
+            <a:ext cx="581558" cy="235915"/>
           </a:xfrm>
           <a:prstGeom prst="rect">
             <a:avLst/>
@@ -5791,12 +5791,12 @@
           <a:p>
             <a:pPr algn="l" indent="0" marL="0">
               <a:lnSpc>
-                <a:spcPct val="86000"/>
-              </a:lnSpc>
-              <a:buNone/>
-            </a:pPr>
-            <a:r>
-              <a:rPr lang="en-US" sz="500" b="1" dirty="0">
+                <a:spcPct val="88000"/>
+              </a:lnSpc>
+              <a:buNone/>
+            </a:pPr>
+            <a:r>
+              <a:rPr lang="en-US" sz="435" b="1" dirty="0">
                 <a:solidFill>
                   <a:srgbClr val="202124"/>
                 </a:solidFill>
@@ -5806,17 +5806,17 @@
               </a:rPr>
               <a:t>Hop 4: Model Armor</a:t>
             </a:r>
-            <a:endParaRPr lang="en-US" sz="500" dirty="0"/>
+            <a:endParaRPr lang="en-US" sz="435" dirty="0"/>
           </a:p>
           <a:p>
             <a:pPr algn="l" indent="0" marL="0">
               <a:lnSpc>
-                <a:spcPct val="86000"/>
-              </a:lnSpc>
-              <a:buNone/>
-            </a:pPr>
-            <a:r>
-              <a:rPr lang="en-US" sz="430" dirty="0">
+                <a:spcPct val="88000"/>
+              </a:lnSpc>
+              <a:buNone/>
+            </a:pPr>
+            <a:r>
+              <a:rPr lang="en-US" sz="375" dirty="0">
                 <a:solidFill>
                   <a:srgbClr val="3C4043"/>
                 </a:solidFill>
@@ -5826,7 +5826,7 @@
               </a:rPr>
               <a:t>Injection 400 + Policy 422 + SDP</a:t>
             </a:r>
-            <a:endParaRPr lang="en-US" sz="500" dirty="0"/>
+            <a:endParaRPr lang="en-US" sz="435" dirty="0"/>
           </a:p>
         </p:txBody>
       </p:sp>
@@ -5873,8 +5873,8 @@
         </p:blipFill>
         <p:spPr>
           <a:xfrm>
-            <a:off x="4243730" y="3065069"/>
-            <a:ext cx="158191" cy="158191"/>
+            <a:off x="4230014" y="3081528"/>
+            <a:ext cx="123444" cy="123444"/>
           </a:xfrm>
           <a:prstGeom prst="rect">
             <a:avLst/>
@@ -5889,8 +5889,8 @@
         </p:nvSpPr>
         <p:spPr>
           <a:xfrm>
-            <a:off x="4438498" y="3029407"/>
-            <a:ext cx="466344" cy="228600"/>
+            <a:off x="4376318" y="3025750"/>
+            <a:ext cx="551383" cy="235915"/>
           </a:xfrm>
           <a:prstGeom prst="rect">
             <a:avLst/>
@@ -5906,12 +5906,12 @@
           <a:p>
             <a:pPr algn="l" indent="0" marL="0">
               <a:lnSpc>
-                <a:spcPct val="86000"/>
-              </a:lnSpc>
-              <a:buNone/>
-            </a:pPr>
-            <a:r>
-              <a:rPr lang="en-US" sz="500" b="1" dirty="0">
+                <a:spcPct val="88000"/>
+              </a:lnSpc>
+              <a:buNone/>
+            </a:pPr>
+            <a:r>
+              <a:rPr lang="en-US" sz="435" b="1" dirty="0">
                 <a:solidFill>
                   <a:srgbClr val="202124"/>
                 </a:solidFill>
@@ -5921,17 +5921,17 @@
               </a:rPr>
               <a:t>Hop 2: Catalog PDP</a:t>
             </a:r>
-            <a:endParaRPr lang="en-US" sz="500" dirty="0"/>
+            <a:endParaRPr lang="en-US" sz="435" dirty="0"/>
           </a:p>
           <a:p>
             <a:pPr algn="l" indent="0" marL="0">
               <a:lnSpc>
-                <a:spcPct val="86000"/>
-              </a:lnSpc>
-              <a:buNone/>
-            </a:pPr>
-            <a:r>
-              <a:rPr lang="en-US" sz="430" dirty="0">
+                <a:spcPct val="88000"/>
+              </a:lnSpc>
+              <a:buNone/>
+            </a:pPr>
+            <a:r>
+              <a:rPr lang="en-US" sz="375" dirty="0">
                 <a:solidFill>
                   <a:srgbClr val="3C4043"/>
                 </a:solidFill>
@@ -5941,981 +5941,13 @@
               </a:rPr>
               <a:t>Discovery Catalog + Tool Prune</a:t>
             </a:r>
-            <a:endParaRPr lang="en-US" sz="500" dirty="0"/>
-          </a:p>
-        </p:txBody>
-      </p:sp>
-      <p:sp>
-        <p:nvSpPr>
-          <p:cNvPr id="129" name="Text 107"/>
-          <p:cNvSpPr/>
-          <p:nvPr/>
-        </p:nvSpPr>
-        <p:spPr>
-          <a:xfrm>
-            <a:off x="7541057" y="3373222"/>
-            <a:ext cx="546811" cy="161849"/>
-          </a:xfrm>
-          <a:prstGeom prst="rect">
-            <a:avLst/>
-          </a:prstGeom>
-          <a:noFill/>
-          <a:ln/>
-        </p:spPr>
-        <p:txBody>
-          <a:bodyPr wrap="square" lIns="0" tIns="0" rIns="0" bIns="0" rtlCol="0" anchor="ctr">
-            <a:normAutofit/>
-          </a:bodyPr>
-          <a:lstStyle/>
-          <a:p>
-            <a:pPr algn="l" indent="0" marL="0">
-              <a:lnSpc>
-                <a:spcPct val="88000"/>
-              </a:lnSpc>
-              <a:buNone/>
-            </a:pPr>
-            <a:r>
-              <a:rPr lang="en-US" sz="500" b="1" dirty="0">
-                <a:solidFill>
-                  <a:srgbClr val="202124"/>
-                </a:solidFill>
-                <a:latin typeface="Arial" pitchFamily="34" charset="0"/>
-                <a:ea typeface="Arial" pitchFamily="34" charset="-122"/>
-                <a:cs typeface="Arial" pitchFamily="34" charset="-120"/>
-              </a:rPr>
-              <a:t>Real-time COGS &amp;</a:t>
-            </a:r>
-            <a:endParaRPr lang="en-US" sz="500" dirty="0"/>
-          </a:p>
-          <a:p>
-            <a:pPr algn="l" indent="0" marL="0">
-              <a:lnSpc>
-                <a:spcPct val="88000"/>
-              </a:lnSpc>
-              <a:buNone/>
-            </a:pPr>
-            <a:r>
-              <a:rPr lang="en-US" sz="440" dirty="0">
-                <a:solidFill>
-                  <a:srgbClr val="202124"/>
-                </a:solidFill>
-                <a:latin typeface="Arial" pitchFamily="34" charset="0"/>
-                <a:ea typeface="Arial" pitchFamily="34" charset="-122"/>
-                <a:cs typeface="Arial" pitchFamily="34" charset="-120"/>
-              </a:rPr>
-              <a:t>security telemetry</a:t>
-            </a:r>
-            <a:endParaRPr lang="en-US" sz="500" dirty="0"/>
-          </a:p>
-        </p:txBody>
-      </p:sp>
-      <p:sp>
-        <p:nvSpPr>
-          <p:cNvPr id="130" name="Text 108"/>
-          <p:cNvSpPr/>
-          <p:nvPr/>
-        </p:nvSpPr>
-        <p:spPr>
-          <a:xfrm>
-            <a:off x="5237683" y="4654296"/>
-            <a:ext cx="591617" cy="124358"/>
-          </a:xfrm>
-          <a:prstGeom prst="rect">
-            <a:avLst/>
-          </a:prstGeom>
-          <a:noFill/>
-          <a:ln/>
-        </p:spPr>
-        <p:txBody>
-          <a:bodyPr wrap="square" lIns="0" tIns="0" rIns="0" bIns="0" rtlCol="0" anchor="ctr">
-            <a:normAutofit/>
-          </a:bodyPr>
-          <a:lstStyle/>
-          <a:p>
-            <a:pPr algn="ctr" indent="0" marL="0">
-              <a:lnSpc>
-                <a:spcPct val="88000"/>
-              </a:lnSpc>
-              <a:buNone/>
-            </a:pPr>
-            <a:r>
-              <a:rPr lang="en-US" sz="500" b="1" dirty="0">
-                <a:solidFill>
-                  <a:srgbClr val="202124"/>
-                </a:solidFill>
-                <a:latin typeface="Arial" pitchFamily="34" charset="0"/>
-                <a:ea typeface="Arial" pitchFamily="34" charset="-122"/>
-                <a:cs typeface="Arial" pitchFamily="34" charset="-120"/>
-              </a:rPr>
-              <a:t>Zero Cache</a:t>
-            </a:r>
-            <a:endParaRPr lang="en-US" sz="500" dirty="0"/>
-          </a:p>
-          <a:p>
-            <a:pPr algn="ctr" indent="0" marL="0">
-              <a:lnSpc>
-                <a:spcPct val="88000"/>
-              </a:lnSpc>
-              <a:buNone/>
-            </a:pPr>
-            <a:r>
-              <a:rPr lang="en-US" sz="440" dirty="0">
-                <a:solidFill>
-                  <a:srgbClr val="202124"/>
-                </a:solidFill>
-                <a:latin typeface="Arial" pitchFamily="34" charset="0"/>
-                <a:ea typeface="Arial" pitchFamily="34" charset="-122"/>
-                <a:cs typeface="Arial" pitchFamily="34" charset="-120"/>
-              </a:rPr>
-              <a:t>Bleed</a:t>
-            </a:r>
-            <a:endParaRPr lang="en-US" sz="500" dirty="0"/>
-          </a:p>
-        </p:txBody>
-      </p:sp>
-      <p:sp>
-        <p:nvSpPr>
-          <p:cNvPr id="131" name="Text 109"/>
-          <p:cNvSpPr/>
-          <p:nvPr/>
-        </p:nvSpPr>
-        <p:spPr>
-          <a:xfrm>
-            <a:off x="5237683" y="5201107"/>
-            <a:ext cx="591617" cy="124358"/>
-          </a:xfrm>
-          <a:prstGeom prst="rect">
-            <a:avLst/>
-          </a:prstGeom>
-          <a:noFill/>
-          <a:ln/>
-        </p:spPr>
-        <p:txBody>
-          <a:bodyPr wrap="square" lIns="0" tIns="0" rIns="0" bIns="0" rtlCol="0" anchor="ctr">
-            <a:normAutofit/>
-          </a:bodyPr>
-          <a:lstStyle/>
-          <a:p>
-            <a:pPr algn="ctr" indent="0" marL="0">
-              <a:lnSpc>
-                <a:spcPct val="88000"/>
-              </a:lnSpc>
-              <a:buNone/>
-            </a:pPr>
-            <a:r>
-              <a:rPr lang="en-US" sz="500" b="1" dirty="0">
-                <a:solidFill>
-                  <a:srgbClr val="202124"/>
-                </a:solidFill>
-                <a:latin typeface="Arial" pitchFamily="34" charset="0"/>
-                <a:ea typeface="Arial" pitchFamily="34" charset="-122"/>
-                <a:cs typeface="Arial" pitchFamily="34" charset="-120"/>
-              </a:rPr>
-              <a:t>Storage-Engine</a:t>
-            </a:r>
-            <a:endParaRPr lang="en-US" sz="500" dirty="0"/>
-          </a:p>
-          <a:p>
-            <a:pPr algn="ctr" indent="0" marL="0">
-              <a:lnSpc>
-                <a:spcPct val="88000"/>
-              </a:lnSpc>
-              <a:buNone/>
-            </a:pPr>
-            <a:r>
-              <a:rPr lang="en-US" sz="440" dirty="0">
-                <a:solidFill>
-                  <a:srgbClr val="202124"/>
-                </a:solidFill>
-                <a:latin typeface="Arial" pitchFamily="34" charset="0"/>
-                <a:ea typeface="Arial" pitchFamily="34" charset="-122"/>
-                <a:cs typeface="Arial" pitchFamily="34" charset="-120"/>
-              </a:rPr>
-              <a:t>RLS Policy</a:t>
-            </a:r>
-            <a:endParaRPr lang="en-US" sz="500" dirty="0"/>
-          </a:p>
-        </p:txBody>
-      </p:sp>
-      <p:sp>
-        <p:nvSpPr>
-          <p:cNvPr id="132" name="Text 110"/>
-          <p:cNvSpPr/>
-          <p:nvPr/>
-        </p:nvSpPr>
-        <p:spPr>
-          <a:xfrm>
-            <a:off x="7274966" y="4654296"/>
-            <a:ext cx="591617" cy="124358"/>
-          </a:xfrm>
-          <a:prstGeom prst="rect">
-            <a:avLst/>
-          </a:prstGeom>
-          <a:noFill/>
-          <a:ln/>
-        </p:spPr>
-        <p:txBody>
-          <a:bodyPr wrap="square" lIns="0" tIns="0" rIns="0" bIns="0" rtlCol="0" anchor="ctr">
-            <a:normAutofit/>
-          </a:bodyPr>
-          <a:lstStyle/>
-          <a:p>
-            <a:pPr algn="ctr" indent="0" marL="0">
-              <a:lnSpc>
-                <a:spcPct val="88000"/>
-              </a:lnSpc>
-              <a:buNone/>
-            </a:pPr>
-            <a:r>
-              <a:rPr lang="en-US" sz="500" b="1" dirty="0">
-                <a:solidFill>
-                  <a:srgbClr val="202124"/>
-                </a:solidFill>
-                <a:latin typeface="Arial" pitchFamily="34" charset="0"/>
-                <a:ea typeface="Arial" pitchFamily="34" charset="-122"/>
-                <a:cs typeface="Arial" pitchFamily="34" charset="-120"/>
-              </a:rPr>
-              <a:t>Private PSC</a:t>
-            </a:r>
-            <a:endParaRPr lang="en-US" sz="500" dirty="0"/>
-          </a:p>
-          <a:p>
-            <a:pPr algn="ctr" indent="0" marL="0">
-              <a:lnSpc>
-                <a:spcPct val="88000"/>
-              </a:lnSpc>
-              <a:buNone/>
-            </a:pPr>
-            <a:r>
-              <a:rPr lang="en-US" sz="440" dirty="0">
-                <a:solidFill>
-                  <a:srgbClr val="202124"/>
-                </a:solidFill>
-                <a:latin typeface="Arial" pitchFamily="34" charset="0"/>
-                <a:ea typeface="Arial" pitchFamily="34" charset="-122"/>
-                <a:cs typeface="Arial" pitchFamily="34" charset="-120"/>
-              </a:rPr>
-              <a:t>NAT Bridge</a:t>
-            </a:r>
-            <a:endParaRPr lang="en-US" sz="500" dirty="0"/>
-          </a:p>
-        </p:txBody>
-      </p:sp>
-      <p:sp>
-        <p:nvSpPr>
-          <p:cNvPr id="133" name="Text 111"/>
-          <p:cNvSpPr/>
-          <p:nvPr/>
-        </p:nvSpPr>
-        <p:spPr>
-          <a:xfrm>
-            <a:off x="7274966" y="5201107"/>
-            <a:ext cx="591617" cy="124358"/>
-          </a:xfrm>
-          <a:prstGeom prst="rect">
-            <a:avLst/>
-          </a:prstGeom>
-          <a:noFill/>
-          <a:ln/>
-        </p:spPr>
-        <p:txBody>
-          <a:bodyPr wrap="square" lIns="0" tIns="0" rIns="0" bIns="0" rtlCol="0" anchor="ctr">
-            <a:normAutofit/>
-          </a:bodyPr>
-          <a:lstStyle/>
-          <a:p>
-            <a:pPr algn="ctr" indent="0" marL="0">
-              <a:lnSpc>
-                <a:spcPct val="88000"/>
-              </a:lnSpc>
-              <a:buNone/>
-            </a:pPr>
-            <a:r>
-              <a:rPr lang="en-US" sz="500" b="1" dirty="0">
-                <a:solidFill>
-                  <a:srgbClr val="202124"/>
-                </a:solidFill>
-                <a:latin typeface="Arial" pitchFamily="34" charset="0"/>
-                <a:ea typeface="Arial" pitchFamily="34" charset="-122"/>
-                <a:cs typeface="Arial" pitchFamily="34" charset="-120"/>
-              </a:rPr>
-              <a:t>Customer-Revocable</a:t>
-            </a:r>
-            <a:endParaRPr lang="en-US" sz="500" dirty="0"/>
-          </a:p>
-          <a:p>
-            <a:pPr algn="ctr" indent="0" marL="0">
-              <a:lnSpc>
-                <a:spcPct val="88000"/>
-              </a:lnSpc>
-              <a:buNone/>
-            </a:pPr>
-            <a:r>
-              <a:rPr lang="en-US" sz="440" dirty="0">
-                <a:solidFill>
-                  <a:srgbClr val="202124"/>
-                </a:solidFill>
-                <a:latin typeface="Arial" pitchFamily="34" charset="0"/>
-                <a:ea typeface="Arial" pitchFamily="34" charset="-122"/>
-                <a:cs typeface="Arial" pitchFamily="34" charset="-120"/>
-              </a:rPr>
-              <a:t>CMEK Keys</a:t>
-            </a:r>
-            <a:endParaRPr lang="en-US" sz="500" dirty="0"/>
-          </a:p>
-        </p:txBody>
-      </p:sp>
-      <p:sp>
-        <p:nvSpPr>
-          <p:cNvPr id="134" name="Text 112"/>
-          <p:cNvSpPr/>
-          <p:nvPr/>
-        </p:nvSpPr>
-        <p:spPr>
-          <a:xfrm>
-            <a:off x="4432097" y="5328209"/>
-            <a:ext cx="509321" cy="131674"/>
-          </a:xfrm>
-          <a:prstGeom prst="rect">
-            <a:avLst/>
-          </a:prstGeom>
-          <a:noFill/>
-          <a:ln/>
-        </p:spPr>
-        <p:txBody>
-          <a:bodyPr wrap="square" lIns="0" tIns="0" rIns="0" bIns="0" rtlCol="0" anchor="ctr">
-            <a:normAutofit/>
-          </a:bodyPr>
-          <a:lstStyle/>
-          <a:p>
-            <a:pPr algn="l" indent="0" marL="0">
-              <a:lnSpc>
-                <a:spcPct val="88000"/>
-              </a:lnSpc>
-              <a:buNone/>
-            </a:pPr>
-            <a:r>
-              <a:rPr lang="en-US" sz="500" b="1" dirty="0">
-                <a:solidFill>
-                  <a:srgbClr val="202124"/>
-                </a:solidFill>
-                <a:latin typeface="Arial" pitchFamily="34" charset="0"/>
-                <a:ea typeface="Arial" pitchFamily="34" charset="-122"/>
-                <a:cs typeface="Arial" pitchFamily="34" charset="-120"/>
-              </a:rPr>
-              <a:t>90% Cached</a:t>
-            </a:r>
-            <a:endParaRPr lang="en-US" sz="500" dirty="0"/>
-          </a:p>
-          <a:p>
-            <a:pPr algn="l" indent="0" marL="0">
-              <a:lnSpc>
-                <a:spcPct val="88000"/>
-              </a:lnSpc>
-              <a:buNone/>
-            </a:pPr>
-            <a:r>
-              <a:rPr lang="en-US" sz="440" dirty="0">
-                <a:solidFill>
-                  <a:srgbClr val="202124"/>
-                </a:solidFill>
-                <a:latin typeface="Arial" pitchFamily="34" charset="0"/>
-                <a:ea typeface="Arial" pitchFamily="34" charset="-122"/>
-                <a:cs typeface="Arial" pitchFamily="34" charset="-120"/>
-              </a:rPr>
-              <a:t>inference</a:t>
-            </a:r>
-            <a:endParaRPr lang="en-US" sz="500" dirty="0"/>
-          </a:p>
-        </p:txBody>
-      </p:sp>
-      <p:sp>
-        <p:nvSpPr>
-          <p:cNvPr id="135" name="Text 113"/>
-          <p:cNvSpPr/>
-          <p:nvPr/>
-        </p:nvSpPr>
-        <p:spPr>
-          <a:xfrm>
-            <a:off x="6282842" y="3396082"/>
-            <a:ext cx="554126" cy="116129"/>
-          </a:xfrm>
-          <a:prstGeom prst="rect">
-            <a:avLst/>
-          </a:prstGeom>
-          <a:noFill/>
-          <a:ln/>
-        </p:spPr>
-        <p:txBody>
-          <a:bodyPr wrap="square" lIns="0" tIns="0" rIns="0" bIns="0" rtlCol="0" anchor="ctr">
-            <a:normAutofit/>
-          </a:bodyPr>
-          <a:lstStyle/>
-          <a:p>
-            <a:pPr algn="l" indent="0" marL="0">
-              <a:lnSpc>
-                <a:spcPct val="88000"/>
-              </a:lnSpc>
-              <a:buNone/>
-            </a:pPr>
-            <a:r>
-              <a:rPr lang="en-US" sz="500" b="1" dirty="0">
-                <a:solidFill>
-                  <a:srgbClr val="202124"/>
-                </a:solidFill>
-                <a:latin typeface="Arial" pitchFamily="34" charset="0"/>
-                <a:ea typeface="Arial" pitchFamily="34" charset="-122"/>
-                <a:cs typeface="Arial" pitchFamily="34" charset="-120"/>
-              </a:rPr>
-              <a:t>Verified zero-bleed</a:t>
-            </a:r>
-            <a:endParaRPr lang="en-US" sz="500" dirty="0"/>
-          </a:p>
-          <a:p>
-            <a:pPr algn="l" indent="0" marL="0">
-              <a:lnSpc>
-                <a:spcPct val="88000"/>
-              </a:lnSpc>
-              <a:buNone/>
-            </a:pPr>
-            <a:r>
-              <a:rPr lang="en-US" sz="440" dirty="0">
-                <a:solidFill>
-                  <a:srgbClr val="202124"/>
-                </a:solidFill>
-                <a:latin typeface="Arial" pitchFamily="34" charset="0"/>
-                <a:ea typeface="Arial" pitchFamily="34" charset="-122"/>
-                <a:cs typeface="Arial" pitchFamily="34" charset="-120"/>
-              </a:rPr>
-              <a:t>agent completion</a:t>
-            </a:r>
-            <a:endParaRPr lang="en-US" sz="500" dirty="0"/>
-          </a:p>
-        </p:txBody>
-      </p:sp>
-      <p:sp>
-        <p:nvSpPr>
-          <p:cNvPr id="136" name="Text 114"/>
-          <p:cNvSpPr/>
-          <p:nvPr/>
-        </p:nvSpPr>
-        <p:spPr>
-          <a:xfrm>
-            <a:off x="5488229" y="3396082"/>
-            <a:ext cx="494690" cy="116129"/>
-          </a:xfrm>
-          <a:prstGeom prst="rect">
-            <a:avLst/>
-          </a:prstGeom>
-          <a:noFill/>
-          <a:ln/>
-        </p:spPr>
-        <p:txBody>
-          <a:bodyPr wrap="square" lIns="0" tIns="0" rIns="0" bIns="0" rtlCol="0" anchor="ctr">
-            <a:normAutofit/>
-          </a:bodyPr>
-          <a:lstStyle/>
-          <a:p>
-            <a:pPr algn="l" indent="0" marL="0">
-              <a:lnSpc>
-                <a:spcPct val="88000"/>
-              </a:lnSpc>
-              <a:buNone/>
-            </a:pPr>
-            <a:r>
-              <a:rPr lang="en-US" sz="500" b="1" dirty="0">
-                <a:solidFill>
-                  <a:srgbClr val="202124"/>
-                </a:solidFill>
-                <a:latin typeface="Arial" pitchFamily="34" charset="0"/>
-                <a:ea typeface="Arial" pitchFamily="34" charset="-122"/>
-                <a:cs typeface="Arial" pitchFamily="34" charset="-120"/>
-              </a:rPr>
-              <a:t>Dispatch to optimal</a:t>
-            </a:r>
-            <a:endParaRPr lang="en-US" sz="500" dirty="0"/>
-          </a:p>
-          <a:p>
-            <a:pPr algn="l" indent="0" marL="0">
-              <a:lnSpc>
-                <a:spcPct val="88000"/>
-              </a:lnSpc>
-              <a:buNone/>
-            </a:pPr>
-            <a:r>
-              <a:rPr lang="en-US" sz="440" dirty="0">
-                <a:solidFill>
-                  <a:srgbClr val="202124"/>
-                </a:solidFill>
-                <a:latin typeface="Arial" pitchFamily="34" charset="0"/>
-                <a:ea typeface="Arial" pitchFamily="34" charset="-122"/>
-                <a:cs typeface="Arial" pitchFamily="34" charset="-120"/>
-              </a:rPr>
-              <a:t>cost/security tier</a:t>
-            </a:r>
-            <a:endParaRPr lang="en-US" sz="500" dirty="0"/>
-          </a:p>
-        </p:txBody>
-      </p:sp>
-      <p:sp>
-        <p:nvSpPr>
-          <p:cNvPr id="137" name="Text 115"/>
-          <p:cNvSpPr/>
-          <p:nvPr/>
-        </p:nvSpPr>
-        <p:spPr>
-          <a:xfrm>
-            <a:off x="5039258" y="2983687"/>
-            <a:ext cx="502006" cy="109728"/>
-          </a:xfrm>
-          <a:prstGeom prst="rect">
-            <a:avLst/>
-          </a:prstGeom>
-          <a:noFill/>
-          <a:ln/>
-        </p:spPr>
-        <p:txBody>
-          <a:bodyPr wrap="square" lIns="0" tIns="0" rIns="0" bIns="0" rtlCol="0" anchor="ctr">
-            <a:normAutofit/>
-          </a:bodyPr>
-          <a:lstStyle/>
-          <a:p>
-            <a:pPr algn="ctr" indent="0" marL="0">
-              <a:lnSpc>
-                <a:spcPct val="88000"/>
-              </a:lnSpc>
-              <a:buNone/>
-            </a:pPr>
-            <a:r>
-              <a:rPr lang="en-US" sz="500" b="1" dirty="0">
-                <a:solidFill>
-                  <a:srgbClr val="202124"/>
-                </a:solidFill>
-                <a:latin typeface="Arial" pitchFamily="34" charset="0"/>
-                <a:ea typeface="Arial" pitchFamily="34" charset="-122"/>
-                <a:cs typeface="Arial" pitchFamily="34" charset="-120"/>
-              </a:rPr>
-              <a:t>Prune Catalog</a:t>
-            </a:r>
-            <a:endParaRPr lang="en-US" sz="500" dirty="0"/>
-          </a:p>
-          <a:p>
-            <a:pPr algn="ctr" indent="0" marL="0">
-              <a:lnSpc>
-                <a:spcPct val="88000"/>
-              </a:lnSpc>
-              <a:buNone/>
-            </a:pPr>
-            <a:r>
-              <a:rPr lang="en-US" sz="440" dirty="0">
-                <a:solidFill>
-                  <a:srgbClr val="202124"/>
-                </a:solidFill>
-                <a:latin typeface="Arial" pitchFamily="34" charset="0"/>
-                <a:ea typeface="Arial" pitchFamily="34" charset="-122"/>
-                <a:cs typeface="Arial" pitchFamily="34" charset="-120"/>
-              </a:rPr>
-              <a:t>&amp; MCP tools</a:t>
-            </a:r>
-            <a:endParaRPr lang="en-US" sz="500" dirty="0"/>
-          </a:p>
-        </p:txBody>
-      </p:sp>
-      <p:sp>
-        <p:nvSpPr>
-          <p:cNvPr id="138" name="Text 116"/>
-          <p:cNvSpPr/>
-          <p:nvPr/>
-        </p:nvSpPr>
-        <p:spPr>
-          <a:xfrm>
-            <a:off x="4432097" y="4459529"/>
-            <a:ext cx="509321" cy="109728"/>
-          </a:xfrm>
-          <a:prstGeom prst="rect">
-            <a:avLst/>
-          </a:prstGeom>
-          <a:noFill/>
-          <a:ln/>
-        </p:spPr>
-        <p:txBody>
-          <a:bodyPr wrap="square" lIns="0" tIns="0" rIns="0" bIns="0" rtlCol="0" anchor="ctr">
-            <a:normAutofit/>
-          </a:bodyPr>
-          <a:lstStyle/>
-          <a:p>
-            <a:pPr algn="l" indent="0" marL="0">
-              <a:lnSpc>
-                <a:spcPct val="88000"/>
-              </a:lnSpc>
-              <a:buNone/>
-            </a:pPr>
-            <a:r>
-              <a:rPr lang="en-US" sz="500" b="1" dirty="0">
-                <a:solidFill>
-                  <a:srgbClr val="202124"/>
-                </a:solidFill>
-                <a:latin typeface="Arial" pitchFamily="34" charset="0"/>
-                <a:ea typeface="Arial" pitchFamily="34" charset="-122"/>
-                <a:cs typeface="Arial" pitchFamily="34" charset="-120"/>
-              </a:rPr>
-              <a:t>Check quota</a:t>
-            </a:r>
-            <a:endParaRPr lang="en-US" sz="500" dirty="0"/>
-          </a:p>
-        </p:txBody>
-      </p:sp>
-      <p:sp>
-        <p:nvSpPr>
-          <p:cNvPr id="139" name="Text 117"/>
-          <p:cNvSpPr/>
-          <p:nvPr/>
-        </p:nvSpPr>
-        <p:spPr>
-          <a:xfrm>
-            <a:off x="4432097" y="4639666"/>
-            <a:ext cx="509321" cy="109728"/>
-          </a:xfrm>
-          <a:prstGeom prst="rect">
-            <a:avLst/>
-          </a:prstGeom>
-          <a:noFill/>
-          <a:ln/>
-        </p:spPr>
-        <p:txBody>
-          <a:bodyPr wrap="square" lIns="0" tIns="0" rIns="0" bIns="0" rtlCol="0" anchor="ctr">
-            <a:normAutofit/>
-          </a:bodyPr>
-          <a:lstStyle/>
-          <a:p>
-            <a:pPr algn="l" indent="0" marL="0">
-              <a:lnSpc>
-                <a:spcPct val="88000"/>
-              </a:lnSpc>
-              <a:buNone/>
-            </a:pPr>
-            <a:r>
-              <a:rPr lang="en-US" sz="500" b="1" dirty="0">
-                <a:solidFill>
-                  <a:srgbClr val="202124"/>
-                </a:solidFill>
-                <a:latin typeface="Arial" pitchFamily="34" charset="0"/>
-                <a:ea typeface="Arial" pitchFamily="34" charset="-122"/>
-                <a:cs typeface="Arial" pitchFamily="34" charset="-120"/>
-              </a:rPr>
-              <a:t>Log COGS</a:t>
-            </a:r>
-            <a:endParaRPr lang="en-US" sz="500" dirty="0"/>
-          </a:p>
-        </p:txBody>
-      </p:sp>
-      <p:sp>
-        <p:nvSpPr>
-          <p:cNvPr id="140" name="Text 118"/>
-          <p:cNvSpPr/>
-          <p:nvPr/>
-        </p:nvSpPr>
-        <p:spPr>
-          <a:xfrm>
-            <a:off x="5016398" y="2302459"/>
-            <a:ext cx="344729" cy="109728"/>
-          </a:xfrm>
-          <a:prstGeom prst="rect">
-            <a:avLst/>
-          </a:prstGeom>
-          <a:noFill/>
-          <a:ln/>
-        </p:spPr>
-        <p:txBody>
-          <a:bodyPr wrap="square" lIns="0" tIns="0" rIns="0" bIns="0" rtlCol="0" anchor="ctr">
-            <a:normAutofit/>
-          </a:bodyPr>
-          <a:lstStyle/>
-          <a:p>
-            <a:pPr algn="ctr" indent="0" marL="0">
-              <a:lnSpc>
-                <a:spcPct val="88000"/>
-              </a:lnSpc>
-              <a:buNone/>
-            </a:pPr>
-            <a:r>
-              <a:rPr lang="en-US" sz="500" b="1" dirty="0">
-                <a:solidFill>
-                  <a:srgbClr val="202124"/>
-                </a:solidFill>
-                <a:latin typeface="Arial" pitchFamily="34" charset="0"/>
-                <a:ea typeface="Arial" pitchFamily="34" charset="-122"/>
-                <a:cs typeface="Arial" pitchFamily="34" charset="-120"/>
-              </a:rPr>
-              <a:t>Verify OBO</a:t>
-            </a:r>
-            <a:endParaRPr lang="en-US" sz="500" dirty="0"/>
-          </a:p>
-          <a:p>
-            <a:pPr algn="ctr" indent="0" marL="0">
-              <a:lnSpc>
-                <a:spcPct val="88000"/>
-              </a:lnSpc>
-              <a:buNone/>
-            </a:pPr>
-            <a:r>
-              <a:rPr lang="en-US" sz="440" dirty="0">
-                <a:solidFill>
-                  <a:srgbClr val="202124"/>
-                </a:solidFill>
-                <a:latin typeface="Arial" pitchFamily="34" charset="0"/>
-                <a:ea typeface="Arial" pitchFamily="34" charset="-122"/>
-                <a:cs typeface="Arial" pitchFamily="34" charset="-120"/>
-              </a:rPr>
-              <a:t>&amp; DPoP</a:t>
-            </a:r>
-            <a:endParaRPr lang="en-US" sz="500" dirty="0"/>
-          </a:p>
-        </p:txBody>
-      </p:sp>
-      <p:sp>
-        <p:nvSpPr>
-          <p:cNvPr id="141" name="Text 119"/>
-          <p:cNvSpPr/>
-          <p:nvPr/>
-        </p:nvSpPr>
-        <p:spPr>
-          <a:xfrm>
-            <a:off x="5016398" y="2819095"/>
-            <a:ext cx="344729" cy="109728"/>
-          </a:xfrm>
-          <a:prstGeom prst="rect">
-            <a:avLst/>
-          </a:prstGeom>
-          <a:noFill/>
-          <a:ln/>
-        </p:spPr>
-        <p:txBody>
-          <a:bodyPr wrap="square" lIns="0" tIns="0" rIns="0" bIns="0" rtlCol="0" anchor="ctr">
-            <a:normAutofit/>
-          </a:bodyPr>
-          <a:lstStyle/>
-          <a:p>
-            <a:pPr algn="ctr" indent="0" marL="0">
-              <a:lnSpc>
-                <a:spcPct val="88000"/>
-              </a:lnSpc>
-              <a:buNone/>
-            </a:pPr>
-            <a:r>
-              <a:rPr lang="en-US" sz="500" b="1" dirty="0">
-                <a:solidFill>
-                  <a:srgbClr val="202124"/>
-                </a:solidFill>
-                <a:latin typeface="Arial" pitchFamily="34" charset="0"/>
-                <a:ea typeface="Arial" pitchFamily="34" charset="-122"/>
-                <a:cs typeface="Arial" pitchFamily="34" charset="-120"/>
-              </a:rPr>
-              <a:t>Screen &amp;</a:t>
-            </a:r>
-            <a:endParaRPr lang="en-US" sz="500" dirty="0"/>
-          </a:p>
-          <a:p>
-            <a:pPr algn="ctr" indent="0" marL="0">
-              <a:lnSpc>
-                <a:spcPct val="88000"/>
-              </a:lnSpc>
-              <a:buNone/>
-            </a:pPr>
-            <a:r>
-              <a:rPr lang="en-US" sz="440" dirty="0">
-                <a:solidFill>
-                  <a:srgbClr val="202124"/>
-                </a:solidFill>
-                <a:latin typeface="Arial" pitchFamily="34" charset="0"/>
-                <a:ea typeface="Arial" pitchFamily="34" charset="-122"/>
-                <a:cs typeface="Arial" pitchFamily="34" charset="-120"/>
-              </a:rPr>
-              <a:t>redact PII</a:t>
-            </a:r>
-            <a:endParaRPr lang="en-US" sz="500" dirty="0"/>
-          </a:p>
-        </p:txBody>
-      </p:sp>
-      <p:sp>
-        <p:nvSpPr>
-          <p:cNvPr id="142" name="Text 120"/>
-          <p:cNvSpPr/>
-          <p:nvPr/>
-        </p:nvSpPr>
-        <p:spPr>
-          <a:xfrm>
-            <a:off x="6267298" y="1478585"/>
-            <a:ext cx="299923" cy="109728"/>
-          </a:xfrm>
-          <a:prstGeom prst="rect">
-            <a:avLst/>
-          </a:prstGeom>
-          <a:noFill/>
-          <a:ln/>
-        </p:spPr>
-        <p:txBody>
-          <a:bodyPr wrap="square" lIns="0" tIns="0" rIns="0" bIns="0" rtlCol="0" anchor="ctr">
-            <a:normAutofit/>
-          </a:bodyPr>
-          <a:lstStyle/>
-          <a:p>
-            <a:pPr algn="l" indent="0" marL="0">
-              <a:lnSpc>
-                <a:spcPct val="88000"/>
-              </a:lnSpc>
-              <a:buNone/>
-            </a:pPr>
-            <a:r>
-              <a:rPr lang="en-US" sz="500" b="1" dirty="0">
-                <a:solidFill>
-                  <a:srgbClr val="202124"/>
-                </a:solidFill>
-                <a:latin typeface="Arial" pitchFamily="34" charset="0"/>
-                <a:ea typeface="Arial" pitchFamily="34" charset="-122"/>
-                <a:cs typeface="Arial" pitchFamily="34" charset="-120"/>
-              </a:rPr>
-              <a:t>Response</a:t>
-            </a:r>
-            <a:endParaRPr lang="en-US" sz="500" dirty="0"/>
-          </a:p>
-        </p:txBody>
-      </p:sp>
-      <p:sp>
-        <p:nvSpPr>
-          <p:cNvPr id="143" name="Text 121"/>
-          <p:cNvSpPr/>
-          <p:nvPr/>
-        </p:nvSpPr>
-        <p:spPr>
-          <a:xfrm>
-            <a:off x="6267298" y="2838298"/>
-            <a:ext cx="299923" cy="109728"/>
-          </a:xfrm>
-          <a:prstGeom prst="rect">
-            <a:avLst/>
-          </a:prstGeom>
-          <a:noFill/>
-          <a:ln/>
-        </p:spPr>
-        <p:txBody>
-          <a:bodyPr wrap="square" lIns="0" tIns="0" rIns="0" bIns="0" rtlCol="0" anchor="ctr">
-            <a:normAutofit/>
-          </a:bodyPr>
-          <a:lstStyle/>
-          <a:p>
-            <a:pPr algn="l" indent="0" marL="0">
-              <a:lnSpc>
-                <a:spcPct val="88000"/>
-              </a:lnSpc>
-              <a:buNone/>
-            </a:pPr>
-            <a:r>
-              <a:rPr lang="en-US" sz="500" b="1" dirty="0">
-                <a:solidFill>
-                  <a:srgbClr val="202124"/>
-                </a:solidFill>
-                <a:latin typeface="Arial" pitchFamily="34" charset="0"/>
-                <a:ea typeface="Arial" pitchFamily="34" charset="-122"/>
-                <a:cs typeface="Arial" pitchFamily="34" charset="-120"/>
-              </a:rPr>
-              <a:t>Response</a:t>
-            </a:r>
-            <a:endParaRPr lang="en-US" sz="500" dirty="0"/>
-          </a:p>
-        </p:txBody>
-      </p:sp>
-      <p:sp>
-        <p:nvSpPr>
-          <p:cNvPr id="144" name="Text 122"/>
-          <p:cNvSpPr/>
-          <p:nvPr/>
-        </p:nvSpPr>
-        <p:spPr>
-          <a:xfrm>
-            <a:off x="5578754" y="1478585"/>
-            <a:ext cx="262433" cy="109728"/>
-          </a:xfrm>
-          <a:prstGeom prst="rect">
-            <a:avLst/>
-          </a:prstGeom>
-          <a:noFill/>
-          <a:ln/>
-        </p:spPr>
-        <p:txBody>
-          <a:bodyPr wrap="square" lIns="0" tIns="0" rIns="0" bIns="0" rtlCol="0" anchor="ctr">
-            <a:normAutofit/>
-          </a:bodyPr>
-          <a:lstStyle/>
-          <a:p>
-            <a:pPr algn="r" indent="0" marL="0">
-              <a:lnSpc>
-                <a:spcPct val="88000"/>
-              </a:lnSpc>
-              <a:buNone/>
-            </a:pPr>
-            <a:r>
-              <a:rPr lang="en-US" sz="500" b="1" dirty="0">
-                <a:solidFill>
-                  <a:srgbClr val="202124"/>
-                </a:solidFill>
-                <a:latin typeface="Arial" pitchFamily="34" charset="0"/>
-                <a:ea typeface="Arial" pitchFamily="34" charset="-122"/>
-                <a:cs typeface="Arial" pitchFamily="34" charset="-120"/>
-              </a:rPr>
-              <a:t>Request</a:t>
-            </a:r>
-            <a:endParaRPr lang="en-US" sz="500" dirty="0"/>
-          </a:p>
-        </p:txBody>
-      </p:sp>
-      <p:sp>
-        <p:nvSpPr>
-          <p:cNvPr id="145" name="Text 123"/>
-          <p:cNvSpPr/>
-          <p:nvPr/>
-        </p:nvSpPr>
-        <p:spPr>
-          <a:xfrm>
-            <a:off x="5578754" y="2838298"/>
-            <a:ext cx="262433" cy="109728"/>
-          </a:xfrm>
-          <a:prstGeom prst="rect">
-            <a:avLst/>
-          </a:prstGeom>
-          <a:noFill/>
-          <a:ln/>
-        </p:spPr>
-        <p:txBody>
-          <a:bodyPr wrap="square" lIns="0" tIns="0" rIns="0" bIns="0" rtlCol="0" anchor="ctr">
-            <a:normAutofit/>
-          </a:bodyPr>
-          <a:lstStyle/>
-          <a:p>
-            <a:pPr algn="r" indent="0" marL="0">
-              <a:lnSpc>
-                <a:spcPct val="88000"/>
-              </a:lnSpc>
-              <a:buNone/>
-            </a:pPr>
-            <a:r>
-              <a:rPr lang="en-US" sz="500" b="1" dirty="0">
-                <a:solidFill>
-                  <a:srgbClr val="202124"/>
-                </a:solidFill>
-                <a:latin typeface="Arial" pitchFamily="34" charset="0"/>
-                <a:ea typeface="Arial" pitchFamily="34" charset="-122"/>
-                <a:cs typeface="Arial" pitchFamily="34" charset="-120"/>
-              </a:rPr>
-              <a:t>Request</a:t>
-            </a:r>
-            <a:endParaRPr lang="en-US" sz="500" dirty="0"/>
-          </a:p>
-        </p:txBody>
-      </p:sp>
-      <p:sp>
-        <p:nvSpPr>
-          <p:cNvPr id="146" name="Shape 124"/>
+            <a:endParaRPr lang="en-US" sz="435" dirty="0"/>
+          </a:p>
+        </p:txBody>
+      </p:sp>
+      <p:sp>
+        <p:nvSpPr>
+          <p:cNvPr id="129" name="Shape 107"/>
           <p:cNvSpPr/>
           <p:nvPr/>
         </p:nvSpPr>
@@ -6940,7 +5972,7 @@
       </p:sp>
       <p:sp>
         <p:nvSpPr>
-          <p:cNvPr id="147" name="Text 125"/>
+          <p:cNvPr id="130" name="Text 108"/>
           <p:cNvSpPr/>
           <p:nvPr/>
         </p:nvSpPr>
@@ -6979,7 +6011,7 @@
       </p:sp>
       <p:sp>
         <p:nvSpPr>
-          <p:cNvPr id="148" name="Shape 126"/>
+          <p:cNvPr id="131" name="Shape 109"/>
           <p:cNvSpPr/>
           <p:nvPr/>
         </p:nvSpPr>
@@ -7004,7 +6036,7 @@
       </p:sp>
       <p:sp>
         <p:nvSpPr>
-          <p:cNvPr id="149" name="Text 127"/>
+          <p:cNvPr id="132" name="Text 110"/>
           <p:cNvSpPr/>
           <p:nvPr/>
         </p:nvSpPr>
@@ -7043,7 +6075,7 @@
       </p:sp>
       <p:sp>
         <p:nvSpPr>
-          <p:cNvPr id="150" name="Shape 128"/>
+          <p:cNvPr id="133" name="Shape 111"/>
           <p:cNvSpPr/>
           <p:nvPr/>
         </p:nvSpPr>
@@ -7068,7 +6100,7 @@
       </p:sp>
       <p:sp>
         <p:nvSpPr>
-          <p:cNvPr id="151" name="Text 129"/>
+          <p:cNvPr id="134" name="Text 112"/>
           <p:cNvSpPr/>
           <p:nvPr/>
         </p:nvSpPr>
@@ -7107,7 +6139,7 @@
       </p:sp>
       <p:sp>
         <p:nvSpPr>
-          <p:cNvPr id="152" name="Shape 130"/>
+          <p:cNvPr id="135" name="Shape 113"/>
           <p:cNvSpPr/>
           <p:nvPr/>
         </p:nvSpPr>
@@ -7132,7 +6164,7 @@
       </p:sp>
       <p:sp>
         <p:nvSpPr>
-          <p:cNvPr id="153" name="Text 131"/>
+          <p:cNvPr id="136" name="Text 114"/>
           <p:cNvSpPr/>
           <p:nvPr/>
         </p:nvSpPr>
@@ -7171,7 +6203,7 @@
       </p:sp>
       <p:sp>
         <p:nvSpPr>
-          <p:cNvPr id="154" name="Shape 132"/>
+          <p:cNvPr id="137" name="Shape 115"/>
           <p:cNvSpPr/>
           <p:nvPr/>
         </p:nvSpPr>
@@ -7196,7 +6228,7 @@
       </p:sp>
       <p:sp>
         <p:nvSpPr>
-          <p:cNvPr id="155" name="Text 133"/>
+          <p:cNvPr id="138" name="Text 116"/>
           <p:cNvSpPr/>
           <p:nvPr/>
         </p:nvSpPr>
@@ -7235,7 +6267,7 @@
       </p:sp>
       <p:sp>
         <p:nvSpPr>
-          <p:cNvPr id="156" name="Shape 134"/>
+          <p:cNvPr id="139" name="Shape 117"/>
           <p:cNvSpPr/>
           <p:nvPr/>
         </p:nvSpPr>
@@ -7260,7 +6292,7 @@
       </p:sp>
       <p:sp>
         <p:nvSpPr>
-          <p:cNvPr id="157" name="Text 135"/>
+          <p:cNvPr id="140" name="Text 118"/>
           <p:cNvSpPr/>
           <p:nvPr/>
         </p:nvSpPr>
@@ -7299,7 +6331,7 @@
       </p:sp>
       <p:sp>
         <p:nvSpPr>
-          <p:cNvPr id="158" name="Shape 136"/>
+          <p:cNvPr id="141" name="Shape 119"/>
           <p:cNvSpPr/>
           <p:nvPr/>
         </p:nvSpPr>
@@ -7324,7 +6356,7 @@
       </p:sp>
       <p:sp>
         <p:nvSpPr>
-          <p:cNvPr id="159" name="Text 137"/>
+          <p:cNvPr id="142" name="Text 120"/>
           <p:cNvSpPr/>
           <p:nvPr/>
         </p:nvSpPr>
@@ -7363,7 +6395,7 @@
       </p:sp>
       <p:sp>
         <p:nvSpPr>
-          <p:cNvPr id="160" name="Shape 138"/>
+          <p:cNvPr id="143" name="Shape 121"/>
           <p:cNvSpPr/>
           <p:nvPr/>
         </p:nvSpPr>
@@ -7388,7 +6420,7 @@
       </p:sp>
       <p:sp>
         <p:nvSpPr>
-          <p:cNvPr id="161" name="Text 139"/>
+          <p:cNvPr id="144" name="Text 122"/>
           <p:cNvSpPr/>
           <p:nvPr/>
         </p:nvSpPr>
@@ -7427,7 +6459,7 @@
       </p:sp>
       <p:sp>
         <p:nvSpPr>
-          <p:cNvPr id="162" name="Shape 140"/>
+          <p:cNvPr id="145" name="Shape 123"/>
           <p:cNvSpPr/>
           <p:nvPr/>
         </p:nvSpPr>
@@ -7452,7 +6484,7 @@
       </p:sp>
       <p:sp>
         <p:nvSpPr>
-          <p:cNvPr id="163" name="Text 141"/>
+          <p:cNvPr id="146" name="Text 124"/>
           <p:cNvSpPr/>
           <p:nvPr/>
         </p:nvSpPr>
@@ -7486,6 +6518,805 @@
               <a:t>5</a:t>
             </a:r>
             <a:endParaRPr lang="en-US" sz="620" dirty="0"/>
+          </a:p>
+        </p:txBody>
+      </p:sp>
+      <p:sp>
+        <p:nvSpPr>
+          <p:cNvPr id="147" name="Text 125"/>
+          <p:cNvSpPr/>
+          <p:nvPr/>
+        </p:nvSpPr>
+        <p:spPr>
+          <a:xfrm>
+            <a:off x="7416698" y="3397910"/>
+            <a:ext cx="786384" cy="114300"/>
+          </a:xfrm>
+          <a:prstGeom prst="roundRect">
+            <a:avLst>
+              <a:gd name="adj" fmla="val 24000"/>
+            </a:avLst>
+          </a:prstGeom>
+          <a:solidFill>
+            <a:srgbClr val="FFFFFF"/>
+          </a:solidFill>
+          <a:ln w="5080">
+            <a:solidFill>
+              <a:srgbClr val="DADCE0"/>
+            </a:solidFill>
+          </a:ln>
+        </p:spPr>
+        <p:txBody>
+          <a:bodyPr wrap="square" lIns="0" tIns="0" rIns="0" bIns="0" rtlCol="0" anchor="ctr"/>
+          <a:lstStyle/>
+          <a:p>
+            <a:pPr algn="ctr" indent="0" marL="0">
+              <a:buNone/>
+            </a:pPr>
+            <a:r>
+              <a:rPr lang="en-US" sz="420" b="1" dirty="0">
+                <a:solidFill>
+                  <a:srgbClr val="202124"/>
+                </a:solidFill>
+                <a:latin typeface="Arial" pitchFamily="34" charset="0"/>
+                <a:ea typeface="Arial" pitchFamily="34" charset="-122"/>
+                <a:cs typeface="Arial" pitchFamily="34" charset="-120"/>
+              </a:rPr>
+              <a:t>Real-time COGS &amp; security telemetry</a:t>
+            </a:r>
+            <a:endParaRPr lang="en-US" sz="420" dirty="0"/>
+          </a:p>
+        </p:txBody>
+      </p:sp>
+      <p:sp>
+        <p:nvSpPr>
+          <p:cNvPr id="148" name="Text 126"/>
+          <p:cNvSpPr/>
+          <p:nvPr/>
+        </p:nvSpPr>
+        <p:spPr>
+          <a:xfrm>
+            <a:off x="5295290" y="4659782"/>
+            <a:ext cx="468173" cy="114300"/>
+          </a:xfrm>
+          <a:prstGeom prst="roundRect">
+            <a:avLst>
+              <a:gd name="adj" fmla="val 24000"/>
+            </a:avLst>
+          </a:prstGeom>
+          <a:solidFill>
+            <a:srgbClr val="FFFFFF"/>
+          </a:solidFill>
+          <a:ln w="5080">
+            <a:solidFill>
+              <a:srgbClr val="DADCE0"/>
+            </a:solidFill>
+          </a:ln>
+        </p:spPr>
+        <p:txBody>
+          <a:bodyPr wrap="square" lIns="0" tIns="0" rIns="0" bIns="0" rtlCol="0" anchor="ctr"/>
+          <a:lstStyle/>
+          <a:p>
+            <a:pPr algn="ctr" indent="0" marL="0">
+              <a:buNone/>
+            </a:pPr>
+            <a:r>
+              <a:rPr lang="en-US" sz="420" b="1" dirty="0">
+                <a:solidFill>
+                  <a:srgbClr val="202124"/>
+                </a:solidFill>
+                <a:latin typeface="Arial" pitchFamily="34" charset="0"/>
+                <a:ea typeface="Arial" pitchFamily="34" charset="-122"/>
+                <a:cs typeface="Arial" pitchFamily="34" charset="-120"/>
+              </a:rPr>
+              <a:t>Zero Cache Bleed</a:t>
+            </a:r>
+            <a:endParaRPr lang="en-US" sz="420" dirty="0"/>
+          </a:p>
+        </p:txBody>
+      </p:sp>
+      <p:sp>
+        <p:nvSpPr>
+          <p:cNvPr id="149" name="Text 127"/>
+          <p:cNvSpPr/>
+          <p:nvPr/>
+        </p:nvSpPr>
+        <p:spPr>
+          <a:xfrm>
+            <a:off x="5183734" y="5206594"/>
+            <a:ext cx="690372" cy="114300"/>
+          </a:xfrm>
+          <a:prstGeom prst="roundRect">
+            <a:avLst>
+              <a:gd name="adj" fmla="val 24000"/>
+            </a:avLst>
+          </a:prstGeom>
+          <a:solidFill>
+            <a:srgbClr val="FFFFFF"/>
+          </a:solidFill>
+          <a:ln w="5080">
+            <a:solidFill>
+              <a:srgbClr val="DADCE0"/>
+            </a:solidFill>
+          </a:ln>
+        </p:spPr>
+        <p:txBody>
+          <a:bodyPr wrap="square" lIns="0" tIns="0" rIns="0" bIns="0" rtlCol="0" anchor="ctr"/>
+          <a:lstStyle/>
+          <a:p>
+            <a:pPr algn="ctr" indent="0" marL="0">
+              <a:buNone/>
+            </a:pPr>
+            <a:r>
+              <a:rPr lang="en-US" sz="420" b="1" dirty="0">
+                <a:solidFill>
+                  <a:srgbClr val="202124"/>
+                </a:solidFill>
+                <a:latin typeface="Arial" pitchFamily="34" charset="0"/>
+                <a:ea typeface="Arial" pitchFamily="34" charset="-122"/>
+                <a:cs typeface="Arial" pitchFamily="34" charset="-120"/>
+              </a:rPr>
+              <a:t>Storage-Engine RLS Policy</a:t>
+            </a:r>
+            <a:endParaRPr lang="en-US" sz="420" dirty="0"/>
+          </a:p>
+        </p:txBody>
+      </p:sp>
+      <p:sp>
+        <p:nvSpPr>
+          <p:cNvPr id="150" name="Text 128"/>
+          <p:cNvSpPr/>
+          <p:nvPr/>
+        </p:nvSpPr>
+        <p:spPr>
+          <a:xfrm>
+            <a:off x="7258507" y="4659782"/>
+            <a:ext cx="616306" cy="114300"/>
+          </a:xfrm>
+          <a:prstGeom prst="roundRect">
+            <a:avLst>
+              <a:gd name="adj" fmla="val 24000"/>
+            </a:avLst>
+          </a:prstGeom>
+          <a:solidFill>
+            <a:srgbClr val="FFFFFF"/>
+          </a:solidFill>
+          <a:ln w="5080">
+            <a:solidFill>
+              <a:srgbClr val="DADCE0"/>
+            </a:solidFill>
+          </a:ln>
+        </p:spPr>
+        <p:txBody>
+          <a:bodyPr wrap="square" lIns="0" tIns="0" rIns="0" bIns="0" rtlCol="0" anchor="ctr"/>
+          <a:lstStyle/>
+          <a:p>
+            <a:pPr algn="ctr" indent="0" marL="0">
+              <a:buNone/>
+            </a:pPr>
+            <a:r>
+              <a:rPr lang="en-US" sz="420" b="1" dirty="0">
+                <a:solidFill>
+                  <a:srgbClr val="202124"/>
+                </a:solidFill>
+                <a:latin typeface="Arial" pitchFamily="34" charset="0"/>
+                <a:ea typeface="Arial" pitchFamily="34" charset="-122"/>
+                <a:cs typeface="Arial" pitchFamily="34" charset="-120"/>
+              </a:rPr>
+              <a:t>Private PSC NAT Bridge</a:t>
+            </a:r>
+            <a:endParaRPr lang="en-US" sz="420" dirty="0"/>
+          </a:p>
+        </p:txBody>
+      </p:sp>
+      <p:sp>
+        <p:nvSpPr>
+          <p:cNvPr id="151" name="Text 129"/>
+          <p:cNvSpPr/>
+          <p:nvPr/>
+        </p:nvSpPr>
+        <p:spPr>
+          <a:xfrm>
+            <a:off x="7184441" y="5206594"/>
+            <a:ext cx="764438" cy="114300"/>
+          </a:xfrm>
+          <a:prstGeom prst="roundRect">
+            <a:avLst>
+              <a:gd name="adj" fmla="val 24000"/>
+            </a:avLst>
+          </a:prstGeom>
+          <a:solidFill>
+            <a:srgbClr val="FFFFFF"/>
+          </a:solidFill>
+          <a:ln w="5080">
+            <a:solidFill>
+              <a:srgbClr val="DADCE0"/>
+            </a:solidFill>
+          </a:ln>
+        </p:spPr>
+        <p:txBody>
+          <a:bodyPr wrap="square" lIns="0" tIns="0" rIns="0" bIns="0" rtlCol="0" anchor="ctr"/>
+          <a:lstStyle/>
+          <a:p>
+            <a:pPr algn="ctr" indent="0" marL="0">
+              <a:buNone/>
+            </a:pPr>
+            <a:r>
+              <a:rPr lang="en-US" sz="420" b="1" dirty="0">
+                <a:solidFill>
+                  <a:srgbClr val="202124"/>
+                </a:solidFill>
+                <a:latin typeface="Arial" pitchFamily="34" charset="0"/>
+                <a:ea typeface="Arial" pitchFamily="34" charset="-122"/>
+                <a:cs typeface="Arial" pitchFamily="34" charset="-120"/>
+              </a:rPr>
+              <a:t>Customer-Revocable CMEK Keys</a:t>
+            </a:r>
+            <a:endParaRPr lang="en-US" sz="420" dirty="0"/>
+          </a:p>
+        </p:txBody>
+      </p:sp>
+      <p:sp>
+        <p:nvSpPr>
+          <p:cNvPr id="152" name="Text 130"/>
+          <p:cNvSpPr/>
+          <p:nvPr/>
+        </p:nvSpPr>
+        <p:spPr>
+          <a:xfrm>
+            <a:off x="4399178" y="5337353"/>
+            <a:ext cx="566928" cy="114300"/>
+          </a:xfrm>
+          <a:prstGeom prst="roundRect">
+            <a:avLst>
+              <a:gd name="adj" fmla="val 24000"/>
+            </a:avLst>
+          </a:prstGeom>
+          <a:solidFill>
+            <a:srgbClr val="FFFFFF"/>
+          </a:solidFill>
+          <a:ln w="5080">
+            <a:solidFill>
+              <a:srgbClr val="DADCE0"/>
+            </a:solidFill>
+          </a:ln>
+        </p:spPr>
+        <p:txBody>
+          <a:bodyPr wrap="square" lIns="0" tIns="0" rIns="0" bIns="0" rtlCol="0" anchor="ctr"/>
+          <a:lstStyle/>
+          <a:p>
+            <a:pPr algn="ctr" indent="0" marL="0">
+              <a:buNone/>
+            </a:pPr>
+            <a:r>
+              <a:rPr lang="en-US" sz="420" b="1" dirty="0">
+                <a:solidFill>
+                  <a:srgbClr val="202124"/>
+                </a:solidFill>
+                <a:latin typeface="Arial" pitchFamily="34" charset="0"/>
+                <a:ea typeface="Arial" pitchFamily="34" charset="-122"/>
+                <a:cs typeface="Arial" pitchFamily="34" charset="-120"/>
+              </a:rPr>
+              <a:t>90% Cached inference</a:t>
+            </a:r>
+            <a:endParaRPr lang="en-US" sz="420" dirty="0"/>
+          </a:p>
+        </p:txBody>
+      </p:sp>
+      <p:sp>
+        <p:nvSpPr>
+          <p:cNvPr id="153" name="Text 131"/>
+          <p:cNvSpPr/>
+          <p:nvPr/>
+        </p:nvSpPr>
+        <p:spPr>
+          <a:xfrm>
+            <a:off x="6326734" y="3397910"/>
+            <a:ext cx="786384" cy="114300"/>
+          </a:xfrm>
+          <a:prstGeom prst="roundRect">
+            <a:avLst>
+              <a:gd name="adj" fmla="val 24000"/>
+            </a:avLst>
+          </a:prstGeom>
+          <a:solidFill>
+            <a:srgbClr val="FFFFFF"/>
+          </a:solidFill>
+          <a:ln w="5080">
+            <a:solidFill>
+              <a:srgbClr val="DADCE0"/>
+            </a:solidFill>
+          </a:ln>
+        </p:spPr>
+        <p:txBody>
+          <a:bodyPr wrap="square" lIns="0" tIns="0" rIns="0" bIns="0" rtlCol="0" anchor="ctr"/>
+          <a:lstStyle/>
+          <a:p>
+            <a:pPr algn="ctr" indent="0" marL="0">
+              <a:buNone/>
+            </a:pPr>
+            <a:r>
+              <a:rPr lang="en-US" sz="420" b="1" dirty="0">
+                <a:solidFill>
+                  <a:srgbClr val="202124"/>
+                </a:solidFill>
+                <a:latin typeface="Arial" pitchFamily="34" charset="0"/>
+                <a:ea typeface="Arial" pitchFamily="34" charset="-122"/>
+                <a:cs typeface="Arial" pitchFamily="34" charset="-120"/>
+              </a:rPr>
+              <a:t>Verified zero-bleed agent completion</a:t>
+            </a:r>
+            <a:endParaRPr lang="en-US" sz="420" dirty="0"/>
+          </a:p>
+        </p:txBody>
+      </p:sp>
+      <p:sp>
+        <p:nvSpPr>
+          <p:cNvPr id="154" name="Text 132"/>
+          <p:cNvSpPr/>
+          <p:nvPr/>
+        </p:nvSpPr>
+        <p:spPr>
+          <a:xfrm>
+            <a:off x="5338267" y="3397910"/>
+            <a:ext cx="786384" cy="114300"/>
+          </a:xfrm>
+          <a:prstGeom prst="roundRect">
+            <a:avLst>
+              <a:gd name="adj" fmla="val 24000"/>
+            </a:avLst>
+          </a:prstGeom>
+          <a:solidFill>
+            <a:srgbClr val="FFFFFF"/>
+          </a:solidFill>
+          <a:ln w="5080">
+            <a:solidFill>
+              <a:srgbClr val="DADCE0"/>
+            </a:solidFill>
+          </a:ln>
+        </p:spPr>
+        <p:txBody>
+          <a:bodyPr wrap="square" lIns="0" tIns="0" rIns="0" bIns="0" rtlCol="0" anchor="ctr"/>
+          <a:lstStyle/>
+          <a:p>
+            <a:pPr algn="ctr" indent="0" marL="0">
+              <a:buNone/>
+            </a:pPr>
+            <a:r>
+              <a:rPr lang="en-US" sz="420" b="1" dirty="0">
+                <a:solidFill>
+                  <a:srgbClr val="202124"/>
+                </a:solidFill>
+                <a:latin typeface="Arial" pitchFamily="34" charset="0"/>
+                <a:ea typeface="Arial" pitchFamily="34" charset="-122"/>
+                <a:cs typeface="Arial" pitchFamily="34" charset="-120"/>
+              </a:rPr>
+              <a:t>Dispatch to optimal cost/security tier</a:t>
+            </a:r>
+            <a:endParaRPr lang="en-US" sz="420" dirty="0"/>
+          </a:p>
+        </p:txBody>
+      </p:sp>
+      <p:sp>
+        <p:nvSpPr>
+          <p:cNvPr id="155" name="Text 133"/>
+          <p:cNvSpPr/>
+          <p:nvPr/>
+        </p:nvSpPr>
+        <p:spPr>
+          <a:xfrm>
+            <a:off x="4939589" y="2980944"/>
+            <a:ext cx="690372" cy="114300"/>
+          </a:xfrm>
+          <a:prstGeom prst="roundRect">
+            <a:avLst>
+              <a:gd name="adj" fmla="val 24000"/>
+            </a:avLst>
+          </a:prstGeom>
+          <a:solidFill>
+            <a:srgbClr val="FFFFFF"/>
+          </a:solidFill>
+          <a:ln w="5080">
+            <a:solidFill>
+              <a:srgbClr val="DADCE0"/>
+            </a:solidFill>
+          </a:ln>
+        </p:spPr>
+        <p:txBody>
+          <a:bodyPr wrap="square" lIns="0" tIns="0" rIns="0" bIns="0" rtlCol="0" anchor="ctr"/>
+          <a:lstStyle/>
+          <a:p>
+            <a:pPr algn="ctr" indent="0" marL="0">
+              <a:buNone/>
+            </a:pPr>
+            <a:r>
+              <a:rPr lang="en-US" sz="420" b="1" dirty="0">
+                <a:solidFill>
+                  <a:srgbClr val="202124"/>
+                </a:solidFill>
+                <a:latin typeface="Arial" pitchFamily="34" charset="0"/>
+                <a:ea typeface="Arial" pitchFamily="34" charset="-122"/>
+                <a:cs typeface="Arial" pitchFamily="34" charset="-120"/>
+              </a:rPr>
+              <a:t>Prune Catalog &amp; MCP tools</a:t>
+            </a:r>
+            <a:endParaRPr lang="en-US" sz="420" dirty="0"/>
+          </a:p>
+        </p:txBody>
+      </p:sp>
+      <p:sp>
+        <p:nvSpPr>
+          <p:cNvPr id="156" name="Text 134"/>
+          <p:cNvSpPr/>
+          <p:nvPr/>
+        </p:nvSpPr>
+        <p:spPr>
+          <a:xfrm>
+            <a:off x="4508906" y="4445813"/>
+            <a:ext cx="347472" cy="114300"/>
+          </a:xfrm>
+          <a:prstGeom prst="roundRect">
+            <a:avLst>
+              <a:gd name="adj" fmla="val 24000"/>
+            </a:avLst>
+          </a:prstGeom>
+          <a:solidFill>
+            <a:srgbClr val="FFFFFF"/>
+          </a:solidFill>
+          <a:ln w="5080">
+            <a:solidFill>
+              <a:srgbClr val="DADCE0"/>
+            </a:solidFill>
+          </a:ln>
+        </p:spPr>
+        <p:txBody>
+          <a:bodyPr wrap="square" lIns="0" tIns="0" rIns="0" bIns="0" rtlCol="0" anchor="ctr"/>
+          <a:lstStyle/>
+          <a:p>
+            <a:pPr algn="ctr" indent="0" marL="0">
+              <a:buNone/>
+            </a:pPr>
+            <a:r>
+              <a:rPr lang="en-US" sz="420" b="1" dirty="0">
+                <a:solidFill>
+                  <a:srgbClr val="202124"/>
+                </a:solidFill>
+                <a:latin typeface="Arial" pitchFamily="34" charset="0"/>
+                <a:ea typeface="Arial" pitchFamily="34" charset="-122"/>
+                <a:cs typeface="Arial" pitchFamily="34" charset="-120"/>
+              </a:rPr>
+              <a:t>Check quota</a:t>
+            </a:r>
+            <a:endParaRPr lang="en-US" sz="420" dirty="0"/>
+          </a:p>
+        </p:txBody>
+      </p:sp>
+      <p:sp>
+        <p:nvSpPr>
+          <p:cNvPr id="157" name="Text 135"/>
+          <p:cNvSpPr/>
+          <p:nvPr/>
+        </p:nvSpPr>
+        <p:spPr>
+          <a:xfrm>
+            <a:off x="4508906" y="4625950"/>
+            <a:ext cx="347472" cy="114300"/>
+          </a:xfrm>
+          <a:prstGeom prst="roundRect">
+            <a:avLst>
+              <a:gd name="adj" fmla="val 24000"/>
+            </a:avLst>
+          </a:prstGeom>
+          <a:solidFill>
+            <a:srgbClr val="FFFFFF"/>
+          </a:solidFill>
+          <a:ln w="5080">
+            <a:solidFill>
+              <a:srgbClr val="DADCE0"/>
+            </a:solidFill>
+          </a:ln>
+        </p:spPr>
+        <p:txBody>
+          <a:bodyPr wrap="square" lIns="0" tIns="0" rIns="0" bIns="0" rtlCol="0" anchor="ctr"/>
+          <a:lstStyle/>
+          <a:p>
+            <a:pPr algn="ctr" indent="0" marL="0">
+              <a:buNone/>
+            </a:pPr>
+            <a:r>
+              <a:rPr lang="en-US" sz="420" b="1" dirty="0">
+                <a:solidFill>
+                  <a:srgbClr val="202124"/>
+                </a:solidFill>
+                <a:latin typeface="Arial" pitchFamily="34" charset="0"/>
+                <a:ea typeface="Arial" pitchFamily="34" charset="-122"/>
+                <a:cs typeface="Arial" pitchFamily="34" charset="-120"/>
+              </a:rPr>
+              <a:t>Log COGS</a:t>
+            </a:r>
+            <a:endParaRPr lang="en-US" sz="420" dirty="0"/>
+          </a:p>
+        </p:txBody>
+      </p:sp>
+      <p:sp>
+        <p:nvSpPr>
+          <p:cNvPr id="158" name="Text 136"/>
+          <p:cNvSpPr/>
+          <p:nvPr/>
+        </p:nvSpPr>
+        <p:spPr>
+          <a:xfrm>
+            <a:off x="4938674" y="2299716"/>
+            <a:ext cx="492862" cy="114300"/>
+          </a:xfrm>
+          <a:prstGeom prst="roundRect">
+            <a:avLst>
+              <a:gd name="adj" fmla="val 24000"/>
+            </a:avLst>
+          </a:prstGeom>
+          <a:solidFill>
+            <a:srgbClr val="FFFFFF"/>
+          </a:solidFill>
+          <a:ln w="5080">
+            <a:solidFill>
+              <a:srgbClr val="DADCE0"/>
+            </a:solidFill>
+          </a:ln>
+        </p:spPr>
+        <p:txBody>
+          <a:bodyPr wrap="square" lIns="0" tIns="0" rIns="0" bIns="0" rtlCol="0" anchor="ctr"/>
+          <a:lstStyle/>
+          <a:p>
+            <a:pPr algn="ctr" indent="0" marL="0">
+              <a:buNone/>
+            </a:pPr>
+            <a:r>
+              <a:rPr lang="en-US" sz="420" b="1" dirty="0">
+                <a:solidFill>
+                  <a:srgbClr val="202124"/>
+                </a:solidFill>
+                <a:latin typeface="Arial" pitchFamily="34" charset="0"/>
+                <a:ea typeface="Arial" pitchFamily="34" charset="-122"/>
+                <a:cs typeface="Arial" pitchFamily="34" charset="-120"/>
+              </a:rPr>
+              <a:t>Verify OBO &amp; DPoP</a:t>
+            </a:r>
+            <a:endParaRPr lang="en-US" sz="420" dirty="0"/>
+          </a:p>
+        </p:txBody>
+      </p:sp>
+      <p:sp>
+        <p:nvSpPr>
+          <p:cNvPr id="159" name="Text 137"/>
+          <p:cNvSpPr/>
+          <p:nvPr/>
+        </p:nvSpPr>
+        <p:spPr>
+          <a:xfrm>
+            <a:off x="5077663" y="2816352"/>
+            <a:ext cx="542239" cy="114300"/>
+          </a:xfrm>
+          <a:prstGeom prst="roundRect">
+            <a:avLst>
+              <a:gd name="adj" fmla="val 24000"/>
+            </a:avLst>
+          </a:prstGeom>
+          <a:solidFill>
+            <a:srgbClr val="FFFFFF"/>
+          </a:solidFill>
+          <a:ln w="5080">
+            <a:solidFill>
+              <a:srgbClr val="DADCE0"/>
+            </a:solidFill>
+          </a:ln>
+        </p:spPr>
+        <p:txBody>
+          <a:bodyPr wrap="square" lIns="0" tIns="0" rIns="0" bIns="0" rtlCol="0" anchor="ctr"/>
+          <a:lstStyle/>
+          <a:p>
+            <a:pPr algn="ctr" indent="0" marL="0">
+              <a:buNone/>
+            </a:pPr>
+            <a:r>
+              <a:rPr lang="en-US" sz="420" b="1" dirty="0">
+                <a:solidFill>
+                  <a:srgbClr val="202124"/>
+                </a:solidFill>
+                <a:latin typeface="Arial" pitchFamily="34" charset="0"/>
+                <a:ea typeface="Arial" pitchFamily="34" charset="-122"/>
+                <a:cs typeface="Arial" pitchFamily="34" charset="-120"/>
+              </a:rPr>
+              <a:t>Screen &amp; redact PII</a:t>
+            </a:r>
+            <a:endParaRPr lang="en-US" sz="420" dirty="0"/>
+          </a:p>
+        </p:txBody>
+      </p:sp>
+      <p:sp>
+        <p:nvSpPr>
+          <p:cNvPr id="160" name="Text 138"/>
+          <p:cNvSpPr/>
+          <p:nvPr/>
+        </p:nvSpPr>
+        <p:spPr>
+          <a:xfrm>
+            <a:off x="6238951" y="1463954"/>
+            <a:ext cx="347472" cy="114300"/>
+          </a:xfrm>
+          <a:prstGeom prst="roundRect">
+            <a:avLst>
+              <a:gd name="adj" fmla="val 24000"/>
+            </a:avLst>
+          </a:prstGeom>
+          <a:solidFill>
+            <a:srgbClr val="FFFFFF"/>
+          </a:solidFill>
+          <a:ln w="5080">
+            <a:solidFill>
+              <a:srgbClr val="DADCE0"/>
+            </a:solidFill>
+          </a:ln>
+        </p:spPr>
+        <p:txBody>
+          <a:bodyPr wrap="square" lIns="0" tIns="0" rIns="0" bIns="0" rtlCol="0" anchor="ctr"/>
+          <a:lstStyle/>
+          <a:p>
+            <a:pPr algn="ctr" indent="0" marL="0">
+              <a:buNone/>
+            </a:pPr>
+            <a:r>
+              <a:rPr lang="en-US" sz="420" b="1" dirty="0">
+                <a:solidFill>
+                  <a:srgbClr val="202124"/>
+                </a:solidFill>
+                <a:latin typeface="Arial" pitchFamily="34" charset="0"/>
+                <a:ea typeface="Arial" pitchFamily="34" charset="-122"/>
+                <a:cs typeface="Arial" pitchFamily="34" charset="-120"/>
+              </a:rPr>
+              <a:t>Response</a:t>
+            </a:r>
+            <a:endParaRPr lang="en-US" sz="420" dirty="0"/>
+          </a:p>
+        </p:txBody>
+      </p:sp>
+      <p:sp>
+        <p:nvSpPr>
+          <p:cNvPr id="161" name="Text 139"/>
+          <p:cNvSpPr/>
+          <p:nvPr/>
+        </p:nvSpPr>
+        <p:spPr>
+          <a:xfrm>
+            <a:off x="6238951" y="2823667"/>
+            <a:ext cx="347472" cy="114300"/>
+          </a:xfrm>
+          <a:prstGeom prst="roundRect">
+            <a:avLst>
+              <a:gd name="adj" fmla="val 24000"/>
+            </a:avLst>
+          </a:prstGeom>
+          <a:solidFill>
+            <a:srgbClr val="FFFFFF"/>
+          </a:solidFill>
+          <a:ln w="5080">
+            <a:solidFill>
+              <a:srgbClr val="DADCE0"/>
+            </a:solidFill>
+          </a:ln>
+        </p:spPr>
+        <p:txBody>
+          <a:bodyPr wrap="square" lIns="0" tIns="0" rIns="0" bIns="0" rtlCol="0" anchor="ctr"/>
+          <a:lstStyle/>
+          <a:p>
+            <a:pPr algn="ctr" indent="0" marL="0">
+              <a:buNone/>
+            </a:pPr>
+            <a:r>
+              <a:rPr lang="en-US" sz="420" b="1" dirty="0">
+                <a:solidFill>
+                  <a:srgbClr val="202124"/>
+                </a:solidFill>
+                <a:latin typeface="Arial" pitchFamily="34" charset="0"/>
+                <a:ea typeface="Arial" pitchFamily="34" charset="-122"/>
+                <a:cs typeface="Arial" pitchFamily="34" charset="-120"/>
+              </a:rPr>
+              <a:t>Response</a:t>
+            </a:r>
+            <a:endParaRPr lang="en-US" sz="420" dirty="0"/>
+          </a:p>
+        </p:txBody>
+      </p:sp>
+      <p:sp>
+        <p:nvSpPr>
+          <p:cNvPr id="162" name="Text 140"/>
+          <p:cNvSpPr/>
+          <p:nvPr/>
+        </p:nvSpPr>
+        <p:spPr>
+          <a:xfrm>
+            <a:off x="5531206" y="1463954"/>
+            <a:ext cx="347472" cy="114300"/>
+          </a:xfrm>
+          <a:prstGeom prst="roundRect">
+            <a:avLst>
+              <a:gd name="adj" fmla="val 24000"/>
+            </a:avLst>
+          </a:prstGeom>
+          <a:solidFill>
+            <a:srgbClr val="FFFFFF"/>
+          </a:solidFill>
+          <a:ln w="5080">
+            <a:solidFill>
+              <a:srgbClr val="DADCE0"/>
+            </a:solidFill>
+          </a:ln>
+        </p:spPr>
+        <p:txBody>
+          <a:bodyPr wrap="square" lIns="0" tIns="0" rIns="0" bIns="0" rtlCol="0" anchor="ctr"/>
+          <a:lstStyle/>
+          <a:p>
+            <a:pPr algn="ctr" indent="0" marL="0">
+              <a:buNone/>
+            </a:pPr>
+            <a:r>
+              <a:rPr lang="en-US" sz="420" b="1" dirty="0">
+                <a:solidFill>
+                  <a:srgbClr val="202124"/>
+                </a:solidFill>
+                <a:latin typeface="Arial" pitchFamily="34" charset="0"/>
+                <a:ea typeface="Arial" pitchFamily="34" charset="-122"/>
+                <a:cs typeface="Arial" pitchFamily="34" charset="-120"/>
+              </a:rPr>
+              <a:t>Request</a:t>
+            </a:r>
+            <a:endParaRPr lang="en-US" sz="420" dirty="0"/>
+          </a:p>
+        </p:txBody>
+      </p:sp>
+      <p:sp>
+        <p:nvSpPr>
+          <p:cNvPr id="163" name="Text 141"/>
+          <p:cNvSpPr/>
+          <p:nvPr/>
+        </p:nvSpPr>
+        <p:spPr>
+          <a:xfrm>
+            <a:off x="5531206" y="2823667"/>
+            <a:ext cx="347472" cy="114300"/>
+          </a:xfrm>
+          <a:prstGeom prst="roundRect">
+            <a:avLst>
+              <a:gd name="adj" fmla="val 24000"/>
+            </a:avLst>
+          </a:prstGeom>
+          <a:solidFill>
+            <a:srgbClr val="FFFFFF"/>
+          </a:solidFill>
+          <a:ln w="5080">
+            <a:solidFill>
+              <a:srgbClr val="DADCE0"/>
+            </a:solidFill>
+          </a:ln>
+        </p:spPr>
+        <p:txBody>
+          <a:bodyPr wrap="square" lIns="0" tIns="0" rIns="0" bIns="0" rtlCol="0" anchor="ctr"/>
+          <a:lstStyle/>
+          <a:p>
+            <a:pPr algn="ctr" indent="0" marL="0">
+              <a:buNone/>
+            </a:pPr>
+            <a:r>
+              <a:rPr lang="en-US" sz="420" b="1" dirty="0">
+                <a:solidFill>
+                  <a:srgbClr val="202124"/>
+                </a:solidFill>
+                <a:latin typeface="Arial" pitchFamily="34" charset="0"/>
+                <a:ea typeface="Arial" pitchFamily="34" charset="-122"/>
+                <a:cs typeface="Arial" pitchFamily="34" charset="-120"/>
+              </a:rPr>
+              <a:t>Request</a:t>
+            </a:r>
+            <a:endParaRPr lang="en-US" sz="420" dirty="0"/>
           </a:p>
         </p:txBody>
       </p:sp>
@@ -7657,8 +7488,8 @@
         </p:nvSpPr>
         <p:spPr>
           <a:xfrm>
-            <a:off x="749808" y="621792"/>
-            <a:ext cx="10680192" cy="219456"/>
+            <a:off x="749808" y="603504"/>
+            <a:ext cx="10680192" cy="201168"/>
           </a:xfrm>
           <a:prstGeom prst="rect">
             <a:avLst/>
@@ -7674,7 +7505,7 @@
               <a:buNone/>
             </a:pPr>
             <a:r>
-              <a:rPr lang="en-US" sz="940" dirty="0">
+              <a:rPr lang="en-US" sz="920" dirty="0">
                 <a:solidFill>
                   <a:srgbClr val="3C4043"/>
                 </a:solidFill>
@@ -7684,7 +7515,7 @@
               </a:rPr>
               <a:t>The architecture consists of the following components:</a:t>
             </a:r>
-            <a:endParaRPr lang="en-US" sz="940" dirty="0"/>
+            <a:endParaRPr lang="en-US" sz="920" dirty="0"/>
           </a:p>
         </p:txBody>
       </p:sp>
@@ -7696,8 +7527,8 @@
         </p:nvSpPr>
         <p:spPr>
           <a:xfrm>
-            <a:off x="749808" y="877824"/>
-            <a:ext cx="2889504" cy="274320"/>
+            <a:off x="749808" y="841248"/>
+            <a:ext cx="2889504" cy="256032"/>
           </a:xfrm>
           <a:prstGeom prst="rect">
             <a:avLst/>
@@ -7721,8 +7552,8 @@
         </p:nvSpPr>
         <p:spPr>
           <a:xfrm>
-            <a:off x="841248" y="877824"/>
-            <a:ext cx="2706624" cy="274320"/>
+            <a:off x="841248" y="841248"/>
+            <a:ext cx="2706624" cy="256032"/>
           </a:xfrm>
           <a:prstGeom prst="rect">
             <a:avLst/>
@@ -7760,8 +7591,8 @@
         </p:nvSpPr>
         <p:spPr>
           <a:xfrm>
-            <a:off x="3639312" y="877824"/>
-            <a:ext cx="7790688" cy="274320"/>
+            <a:off x="3639312" y="841248"/>
+            <a:ext cx="7790688" cy="256032"/>
           </a:xfrm>
           <a:prstGeom prst="rect">
             <a:avLst/>
@@ -7785,8 +7616,8 @@
         </p:nvSpPr>
         <p:spPr>
           <a:xfrm>
-            <a:off x="3749040" y="877824"/>
-            <a:ext cx="7571232" cy="274320"/>
+            <a:off x="3749040" y="841248"/>
+            <a:ext cx="7571232" cy="256032"/>
           </a:xfrm>
           <a:prstGeom prst="rect">
             <a:avLst/>
@@ -7824,8 +7655,8 @@
         </p:nvSpPr>
         <p:spPr>
           <a:xfrm>
-            <a:off x="749808" y="1152144"/>
-            <a:ext cx="2889504" cy="296266"/>
+            <a:off x="749808" y="1097280"/>
+            <a:ext cx="2889504" cy="338328"/>
           </a:xfrm>
           <a:prstGeom prst="rect">
             <a:avLst/>
@@ -7849,8 +7680,8 @@
         </p:nvSpPr>
         <p:spPr>
           <a:xfrm>
-            <a:off x="841248" y="1170432"/>
-            <a:ext cx="2706624" cy="259690"/>
+            <a:off x="841248" y="1115568"/>
+            <a:ext cx="2706624" cy="301752"/>
           </a:xfrm>
           <a:prstGeom prst="rect">
             <a:avLst/>
@@ -7859,14 +7690,16 @@
           <a:ln/>
         </p:spPr>
         <p:txBody>
-          <a:bodyPr wrap="square" rtlCol="0" anchor="ctr"/>
-          <a:lstStyle/>
-          <a:p>
-            <a:pPr indent="0" marL="0">
-              <a:buNone/>
-            </a:pPr>
-            <a:r>
-              <a:rPr lang="en-US" sz="780" b="1" dirty="0">
+          <a:bodyPr wrap="square" rtlCol="0" anchor="ctr">
+            <a:normAutofit/>
+          </a:bodyPr>
+          <a:lstStyle/>
+          <a:p>
+            <a:pPr indent="0" marL="0">
+              <a:buNone/>
+            </a:pPr>
+            <a:r>
+              <a:rPr lang="en-US" sz="750" b="1" dirty="0">
                 <a:solidFill>
                   <a:srgbClr val="202124"/>
                 </a:solidFill>
@@ -7881,7 +7714,7 @@
               <a:buNone/>
             </a:pPr>
             <a:r>
-              <a:rPr lang="en-US" sz="670" dirty="0">
+              <a:rPr lang="en-US" sz="650" dirty="0">
                 <a:solidFill>
                   <a:srgbClr val="5F6368"/>
                 </a:solidFill>
@@ -7889,9 +7722,9 @@
                 <a:ea typeface="Arial" pitchFamily="34" charset="-122"/>
                 <a:cs typeface="Arial" pitchFamily="34" charset="-120"/>
               </a:rPr>
-              <a:t>Outer security and governance boundary that prevents unauthorized data exfiltration.</a:t>
-            </a:r>
-            <a:endParaRPr lang="en-US" sz="780" dirty="0"/>
+              <a:t>Outer security and governance boundary that prevents unauthorized data.</a:t>
+            </a:r>
+            <a:endParaRPr lang="en-US" sz="750" dirty="0"/>
           </a:p>
         </p:txBody>
       </p:sp>
@@ -7903,8 +7736,8 @@
         </p:nvSpPr>
         <p:spPr>
           <a:xfrm>
-            <a:off x="3639312" y="1152144"/>
-            <a:ext cx="7790688" cy="296266"/>
+            <a:off x="3639312" y="1097280"/>
+            <a:ext cx="7790688" cy="338328"/>
           </a:xfrm>
           <a:prstGeom prst="rect">
             <a:avLst/>
@@ -7928,8 +7761,8 @@
         </p:nvSpPr>
         <p:spPr>
           <a:xfrm>
-            <a:off x="3749040" y="1170432"/>
-            <a:ext cx="7571232" cy="259690"/>
+            <a:off x="3749040" y="1115568"/>
+            <a:ext cx="7571232" cy="301752"/>
           </a:xfrm>
           <a:prstGeom prst="rect">
             <a:avLst/>
@@ -7938,14 +7771,19 @@
           <a:ln/>
         </p:spPr>
         <p:txBody>
-          <a:bodyPr wrap="square" rtlCol="0" anchor="ctr"/>
-          <a:lstStyle/>
-          <a:p>
-            <a:pPr indent="0" marL="0">
-              <a:buNone/>
-            </a:pPr>
-            <a:r>
-              <a:rPr lang="en-US" sz="720" b="1" dirty="0">
+          <a:bodyPr wrap="square" rtlCol="0" anchor="ctr">
+            <a:normAutofit/>
+          </a:bodyPr>
+          <a:lstStyle/>
+          <a:p>
+            <a:pPr indent="0" marL="0">
+              <a:lnSpc>
+                <a:spcPct val="102000"/>
+              </a:lnSpc>
+              <a:buNone/>
+            </a:pPr>
+            <a:r>
+              <a:rPr lang="en-US" sz="690" b="1" dirty="0">
                 <a:solidFill>
                   <a:srgbClr val="202124"/>
                 </a:solidFill>
@@ -7956,10 +7794,13 @@
               <a:t>• The Multi-Tenant Agentic Triad: Security • FinOps COGS • Zero-PII Observability: </a:t>
             </a:r>
             <a:pPr indent="0" marL="0">
-              <a:buNone/>
-            </a:pPr>
-            <a:r>
-              <a:rPr lang="en-US" sz="700" dirty="0">
+              <a:lnSpc>
+                <a:spcPct val="102000"/>
+              </a:lnSpc>
+              <a:buNone/>
+            </a:pPr>
+            <a:r>
+              <a:rPr lang="en-US" sz="670" dirty="0">
                 <a:solidFill>
                   <a:srgbClr val="3C4043"/>
                 </a:solidFill>
@@ -7969,7 +7810,7 @@
               </a:rPr>
               <a:t>Enforces VPC Service Controls service perimeters around hub and spoke projects to block unauthorized cross-perimeter data movement.</a:t>
             </a:r>
-            <a:endParaRPr lang="en-US" sz="720" dirty="0"/>
+            <a:endParaRPr lang="en-US" sz="690" dirty="0"/>
           </a:p>
         </p:txBody>
       </p:sp>
@@ -7981,8 +7822,8 @@
         </p:nvSpPr>
         <p:spPr>
           <a:xfrm>
-            <a:off x="749808" y="1448410"/>
-            <a:ext cx="2889504" cy="786384"/>
+            <a:off x="749808" y="1435608"/>
+            <a:ext cx="2889504" cy="822960"/>
           </a:xfrm>
           <a:prstGeom prst="rect">
             <a:avLst/>
@@ -8006,8 +7847,8 @@
         </p:nvSpPr>
         <p:spPr>
           <a:xfrm>
-            <a:off x="841248" y="1466698"/>
-            <a:ext cx="2706624" cy="749808"/>
+            <a:off x="841248" y="1453896"/>
+            <a:ext cx="2706624" cy="786384"/>
           </a:xfrm>
           <a:prstGeom prst="rect">
             <a:avLst/>
@@ -8016,14 +7857,16 @@
           <a:ln/>
         </p:spPr>
         <p:txBody>
-          <a:bodyPr wrap="square" rtlCol="0" anchor="ctr"/>
-          <a:lstStyle/>
-          <a:p>
-            <a:pPr indent="0" marL="0">
-              <a:buNone/>
-            </a:pPr>
-            <a:r>
-              <a:rPr lang="en-US" sz="780" b="1" dirty="0">
+          <a:bodyPr wrap="square" rtlCol="0" anchor="ctr">
+            <a:normAutofit/>
+          </a:bodyPr>
+          <a:lstStyle/>
+          <a:p>
+            <a:pPr indent="0" marL="0">
+              <a:buNone/>
+            </a:pPr>
+            <a:r>
+              <a:rPr lang="en-US" sz="750" b="1" dirty="0">
                 <a:solidFill>
                   <a:srgbClr val="202124"/>
                 </a:solidFill>
@@ -8038,7 +7881,7 @@
               <a:buNone/>
             </a:pPr>
             <a:r>
-              <a:rPr lang="en-US" sz="670" dirty="0">
+              <a:rPr lang="en-US" sz="650" dirty="0">
                 <a:solidFill>
                   <a:srgbClr val="5F6368"/>
                 </a:solidFill>
@@ -8048,7 +7891,7 @@
               </a:rPr>
               <a:t>Centralized ingress and control plane managing edge security, identity verification, and request routing.</a:t>
             </a:r>
-            <a:endParaRPr lang="en-US" sz="780" dirty="0"/>
+            <a:endParaRPr lang="en-US" sz="750" dirty="0"/>
           </a:p>
         </p:txBody>
       </p:sp>
@@ -8060,8 +7903,8 @@
         </p:nvSpPr>
         <p:spPr>
           <a:xfrm>
-            <a:off x="3639312" y="1448410"/>
-            <a:ext cx="7790688" cy="786384"/>
+            <a:off x="3639312" y="1435608"/>
+            <a:ext cx="7790688" cy="822960"/>
           </a:xfrm>
           <a:prstGeom prst="rect">
             <a:avLst/>
@@ -8085,8 +7928,8 @@
         </p:nvSpPr>
         <p:spPr>
           <a:xfrm>
-            <a:off x="3749040" y="1466698"/>
-            <a:ext cx="7571232" cy="749808"/>
+            <a:off x="3749040" y="1453896"/>
+            <a:ext cx="7571232" cy="786384"/>
           </a:xfrm>
           <a:prstGeom prst="rect">
             <a:avLst/>
@@ -8095,14 +7938,19 @@
           <a:ln/>
         </p:spPr>
         <p:txBody>
-          <a:bodyPr wrap="square" rtlCol="0" anchor="ctr"/>
-          <a:lstStyle/>
-          <a:p>
-            <a:pPr indent="0" marL="0">
-              <a:buNone/>
-            </a:pPr>
-            <a:r>
-              <a:rPr lang="en-US" sz="720" b="1" dirty="0">
+          <a:bodyPr wrap="square" rtlCol="0" anchor="ctr">
+            <a:normAutofit/>
+          </a:bodyPr>
+          <a:lstStyle/>
+          <a:p>
+            <a:pPr indent="0" marL="0">
+              <a:lnSpc>
+                <a:spcPct val="102000"/>
+              </a:lnSpc>
+              <a:buNone/>
+            </a:pPr>
+            <a:r>
+              <a:rPr lang="en-US" sz="690" b="1" dirty="0">
                 <a:solidFill>
                   <a:srgbClr val="202124"/>
                 </a:solidFill>
@@ -8113,10 +7961,13 @@
               <a:t>• External Application Load Balancer: </a:t>
             </a:r>
             <a:pPr indent="0" marL="0">
-              <a:buNone/>
-            </a:pPr>
-            <a:r>
-              <a:rPr lang="en-US" sz="700" dirty="0">
+              <a:lnSpc>
+                <a:spcPct val="102000"/>
+              </a:lnSpc>
+              <a:buNone/>
+            </a:pPr>
+            <a:r>
+              <a:rPr lang="en-US" sz="670" dirty="0">
                 <a:solidFill>
                   <a:srgbClr val="3C4043"/>
                 </a:solidFill>
@@ -8128,24 +7979,30 @@
 </a:t>
             </a:r>
             <a:pPr indent="0" marL="0">
-              <a:buNone/>
-            </a:pPr>
-            <a:r>
-              <a:rPr lang="en-US" sz="720" b="1" dirty="0">
-                <a:solidFill>
-                  <a:srgbClr val="202124"/>
-                </a:solidFill>
-                <a:latin typeface="Arial" pitchFamily="34" charset="0"/>
-                <a:ea typeface="Arial" pitchFamily="34" charset="-122"/>
-                <a:cs typeface="Arial" pitchFamily="34" charset="-120"/>
-              </a:rPr>
-              <a:t>• Hop 1: Edge PEP &amp; Hop 2: Catalog PDP: </a:t>
-            </a:r>
-            <a:pPr indent="0" marL="0">
-              <a:buNone/>
-            </a:pPr>
-            <a:r>
-              <a:rPr lang="en-US" sz="700" dirty="0">
+              <a:lnSpc>
+                <a:spcPct val="102000"/>
+              </a:lnSpc>
+              <a:buNone/>
+            </a:pPr>
+            <a:r>
+              <a:rPr lang="en-US" sz="690" b="1" dirty="0">
+                <a:solidFill>
+                  <a:srgbClr val="202124"/>
+                </a:solidFill>
+                <a:latin typeface="Arial" pitchFamily="34" charset="0"/>
+                <a:ea typeface="Arial" pitchFamily="34" charset="-122"/>
+                <a:cs typeface="Arial" pitchFamily="34" charset="-120"/>
+              </a:rPr>
+              <a:t>• Hop 1: Cloud Armor &amp; Hop 2: Catalog PDP: </a:t>
+            </a:r>
+            <a:pPr indent="0" marL="0">
+              <a:lnSpc>
+                <a:spcPct val="102000"/>
+              </a:lnSpc>
+              <a:buNone/>
+            </a:pPr>
+            <a:r>
+              <a:rPr lang="en-US" sz="670" dirty="0">
                 <a:solidFill>
                   <a:srgbClr val="3C4043"/>
                 </a:solidFill>
@@ -8157,10 +8014,13 @@
 </a:t>
             </a:r>
             <a:pPr indent="0" marL="0">
-              <a:buNone/>
-            </a:pPr>
-            <a:r>
-              <a:rPr lang="en-US" sz="720" b="1" dirty="0">
+              <a:lnSpc>
+                <a:spcPct val="102000"/>
+              </a:lnSpc>
+              <a:buNone/>
+            </a:pPr>
+            <a:r>
+              <a:rPr lang="en-US" sz="690" b="1" dirty="0">
                 <a:solidFill>
                   <a:srgbClr val="202124"/>
                 </a:solidFill>
@@ -8171,10 +8031,13 @@
               <a:t>• Hop 4: Model Armor: </a:t>
             </a:r>
             <a:pPr indent="0" marL="0">
-              <a:buNone/>
-            </a:pPr>
-            <a:r>
-              <a:rPr lang="en-US" sz="700" dirty="0">
+              <a:lnSpc>
+                <a:spcPct val="102000"/>
+              </a:lnSpc>
+              <a:buNone/>
+            </a:pPr>
+            <a:r>
+              <a:rPr lang="en-US" sz="670" dirty="0">
                 <a:solidFill>
                   <a:srgbClr val="3C4043"/>
                 </a:solidFill>
@@ -8186,10 +8049,13 @@
 </a:t>
             </a:r>
             <a:pPr indent="0" marL="0">
-              <a:buNone/>
-            </a:pPr>
-            <a:r>
-              <a:rPr lang="en-US" sz="720" b="1" dirty="0">
+              <a:lnSpc>
+                <a:spcPct val="102000"/>
+              </a:lnSpc>
+              <a:buNone/>
+            </a:pPr>
+            <a:r>
+              <a:rPr lang="en-US" sz="690" b="1" dirty="0">
                 <a:solidFill>
                   <a:srgbClr val="202124"/>
                 </a:solidFill>
@@ -8200,10 +8066,13 @@
               <a:t>• Architecture Selector: </a:t>
             </a:r>
             <a:pPr indent="0" marL="0">
-              <a:buNone/>
-            </a:pPr>
-            <a:r>
-              <a:rPr lang="en-US" sz="700" dirty="0">
+              <a:lnSpc>
+                <a:spcPct val="102000"/>
+              </a:lnSpc>
+              <a:buNone/>
+            </a:pPr>
+            <a:r>
+              <a:rPr lang="en-US" sz="670" dirty="0">
                 <a:solidFill>
                   <a:srgbClr val="3C4043"/>
                 </a:solidFill>
@@ -8213,7 +8082,7 @@
               </a:rPr>
               <a:t>Serverless routing service that validates caller tokens and dispatches requests to the target execution spoke.</a:t>
             </a:r>
-            <a:endParaRPr lang="en-US" sz="720" dirty="0"/>
+            <a:endParaRPr lang="en-US" sz="690" dirty="0"/>
           </a:p>
         </p:txBody>
       </p:sp>
@@ -8225,8 +8094,8 @@
         </p:nvSpPr>
         <p:spPr>
           <a:xfrm>
-            <a:off x="749808" y="2234794"/>
-            <a:ext cx="2889504" cy="615391"/>
+            <a:off x="749808" y="2258568"/>
+            <a:ext cx="2889504" cy="822960"/>
           </a:xfrm>
           <a:prstGeom prst="rect">
             <a:avLst/>
@@ -8250,8 +8119,8 @@
         </p:nvSpPr>
         <p:spPr>
           <a:xfrm>
-            <a:off x="841248" y="2253082"/>
-            <a:ext cx="2706624" cy="578815"/>
+            <a:off x="841248" y="2276856"/>
+            <a:ext cx="2706624" cy="786384"/>
           </a:xfrm>
           <a:prstGeom prst="rect">
             <a:avLst/>
@@ -8260,14 +8129,16 @@
           <a:ln/>
         </p:spPr>
         <p:txBody>
-          <a:bodyPr wrap="square" rtlCol="0" anchor="ctr"/>
-          <a:lstStyle/>
-          <a:p>
-            <a:pPr indent="0" marL="0">
-              <a:buNone/>
-            </a:pPr>
-            <a:r>
-              <a:rPr lang="en-US" sz="780" b="1" dirty="0">
+          <a:bodyPr wrap="square" rtlCol="0" anchor="ctr">
+            <a:normAutofit/>
+          </a:bodyPr>
+          <a:lstStyle/>
+          <a:p>
+            <a:pPr indent="0" marL="0">
+              <a:buNone/>
+            </a:pPr>
+            <a:r>
+              <a:rPr lang="en-US" sz="750" b="1" dirty="0">
                 <a:solidFill>
                   <a:srgbClr val="202124"/>
                 </a:solidFill>
@@ -8282,7 +8153,7 @@
               <a:buNone/>
             </a:pPr>
             <a:r>
-              <a:rPr lang="en-US" sz="670" dirty="0">
+              <a:rPr lang="en-US" sz="650" dirty="0">
                 <a:solidFill>
                   <a:srgbClr val="5F6368"/>
                 </a:solidFill>
@@ -8292,7 +8163,7 @@
               </a:rPr>
               <a:t>Dedicated governance plane providing unified security posture, cryptographic key management, and OpenTelemetry observability.</a:t>
             </a:r>
-            <a:endParaRPr lang="en-US" sz="780" dirty="0"/>
+            <a:endParaRPr lang="en-US" sz="750" dirty="0"/>
           </a:p>
         </p:txBody>
       </p:sp>
@@ -8304,8 +8175,8 @@
         </p:nvSpPr>
         <p:spPr>
           <a:xfrm>
-            <a:off x="3639312" y="2234794"/>
-            <a:ext cx="7790688" cy="615391"/>
+            <a:off x="3639312" y="2258568"/>
+            <a:ext cx="7790688" cy="822960"/>
           </a:xfrm>
           <a:prstGeom prst="rect">
             <a:avLst/>
@@ -8329,8 +8200,8 @@
         </p:nvSpPr>
         <p:spPr>
           <a:xfrm>
-            <a:off x="3749040" y="2253082"/>
-            <a:ext cx="7571232" cy="578815"/>
+            <a:off x="3749040" y="2276856"/>
+            <a:ext cx="7571232" cy="786384"/>
           </a:xfrm>
           <a:prstGeom prst="rect">
             <a:avLst/>
@@ -8339,14 +8210,19 @@
           <a:ln/>
         </p:spPr>
         <p:txBody>
-          <a:bodyPr wrap="square" rtlCol="0" anchor="ctr"/>
-          <a:lstStyle/>
-          <a:p>
-            <a:pPr indent="0" marL="0">
-              <a:buNone/>
-            </a:pPr>
-            <a:r>
-              <a:rPr lang="en-US" sz="720" b="1" dirty="0">
+          <a:bodyPr wrap="square" rtlCol="0" anchor="ctr">
+            <a:normAutofit/>
+          </a:bodyPr>
+          <a:lstStyle/>
+          <a:p>
+            <a:pPr indent="0" marL="0">
+              <a:lnSpc>
+                <a:spcPct val="102000"/>
+              </a:lnSpc>
+              <a:buNone/>
+            </a:pPr>
+            <a:r>
+              <a:rPr lang="en-US" sz="690" b="1" dirty="0">
                 <a:solidFill>
                   <a:srgbClr val="202124"/>
                 </a:solidFill>
@@ -8357,10 +8233,13 @@
               <a:t>• Security Command Center: </a:t>
             </a:r>
             <a:pPr indent="0" marL="0">
-              <a:buNone/>
-            </a:pPr>
-            <a:r>
-              <a:rPr lang="en-US" sz="700" dirty="0">
+              <a:lnSpc>
+                <a:spcPct val="102000"/>
+              </a:lnSpc>
+              <a:buNone/>
+            </a:pPr>
+            <a:r>
+              <a:rPr lang="en-US" sz="670" dirty="0">
                 <a:solidFill>
                   <a:srgbClr val="3C4043"/>
                 </a:solidFill>
@@ -8372,10 +8251,13 @@
 </a:t>
             </a:r>
             <a:pPr indent="0" marL="0">
-              <a:buNone/>
-            </a:pPr>
-            <a:r>
-              <a:rPr lang="en-US" sz="720" b="1" dirty="0">
+              <a:lnSpc>
+                <a:spcPct val="102000"/>
+              </a:lnSpc>
+              <a:buNone/>
+            </a:pPr>
+            <a:r>
+              <a:rPr lang="en-US" sz="690" b="1" dirty="0">
                 <a:solidFill>
                   <a:srgbClr val="202124"/>
                 </a:solidFill>
@@ -8386,10 +8268,13 @@
               <a:t>• 3 Chargeback Models: </a:t>
             </a:r>
             <a:pPr indent="0" marL="0">
-              <a:buNone/>
-            </a:pPr>
-            <a:r>
-              <a:rPr lang="en-US" sz="700" dirty="0">
+              <a:lnSpc>
+                <a:spcPct val="102000"/>
+              </a:lnSpc>
+              <a:buNone/>
+            </a:pPr>
+            <a:r>
+              <a:rPr lang="en-US" sz="670" dirty="0">
                 <a:solidFill>
                   <a:srgbClr val="3C4043"/>
                 </a:solidFill>
@@ -8401,10 +8286,13 @@
 </a:t>
             </a:r>
             <a:pPr indent="0" marL="0">
-              <a:buNone/>
-            </a:pPr>
-            <a:r>
-              <a:rPr lang="en-US" sz="720" b="1" dirty="0">
+              <a:lnSpc>
+                <a:spcPct val="102000"/>
+              </a:lnSpc>
+              <a:buNone/>
+            </a:pPr>
+            <a:r>
+              <a:rPr lang="en-US" sz="690" b="1" dirty="0">
                 <a:solidFill>
                   <a:srgbClr val="202124"/>
                 </a:solidFill>
@@ -8415,10 +8303,13 @@
               <a:t>• BigQuery OTel Sink: </a:t>
             </a:r>
             <a:pPr indent="0" marL="0">
-              <a:buNone/>
-            </a:pPr>
-            <a:r>
-              <a:rPr lang="en-US" sz="700" dirty="0">
+              <a:lnSpc>
+                <a:spcPct val="102000"/>
+              </a:lnSpc>
+              <a:buNone/>
+            </a:pPr>
+            <a:r>
+              <a:rPr lang="en-US" sz="670" dirty="0">
                 <a:solidFill>
                   <a:srgbClr val="3C4043"/>
                 </a:solidFill>
@@ -8428,7 +8319,7 @@
               </a:rPr>
               <a:t>Aggregates audit logs, execution traces, and OpenTelemetry FinOps telemetry into BigQuery.</a:t>
             </a:r>
-            <a:endParaRPr lang="en-US" sz="720" dirty="0"/>
+            <a:endParaRPr lang="en-US" sz="690" dirty="0"/>
           </a:p>
         </p:txBody>
       </p:sp>
@@ -8440,8 +8331,8 @@
         </p:nvSpPr>
         <p:spPr>
           <a:xfrm>
-            <a:off x="749808" y="2850185"/>
-            <a:ext cx="2889504" cy="296266"/>
+            <a:off x="749808" y="3081528"/>
+            <a:ext cx="2889504" cy="338328"/>
           </a:xfrm>
           <a:prstGeom prst="rect">
             <a:avLst/>
@@ -8465,8 +8356,8 @@
         </p:nvSpPr>
         <p:spPr>
           <a:xfrm>
-            <a:off x="841248" y="2868473"/>
-            <a:ext cx="2706624" cy="259690"/>
+            <a:off x="841248" y="3099816"/>
+            <a:ext cx="2706624" cy="301752"/>
           </a:xfrm>
           <a:prstGeom prst="rect">
             <a:avLst/>
@@ -8475,14 +8366,16 @@
           <a:ln/>
         </p:spPr>
         <p:txBody>
-          <a:bodyPr wrap="square" rtlCol="0" anchor="ctr"/>
-          <a:lstStyle/>
-          <a:p>
-            <a:pPr indent="0" marL="0">
-              <a:buNone/>
-            </a:pPr>
-            <a:r>
-              <a:rPr lang="en-US" sz="780" b="1" dirty="0">
+          <a:bodyPr wrap="square" rtlCol="0" anchor="ctr">
+            <a:normAutofit/>
+          </a:bodyPr>
+          <a:lstStyle/>
+          <a:p>
+            <a:pPr indent="0" marL="0">
+              <a:buNone/>
+            </a:pPr>
+            <a:r>
+              <a:rPr lang="en-US" sz="750" b="1" dirty="0">
                 <a:solidFill>
                   <a:srgbClr val="202124"/>
                 </a:solidFill>
@@ -8497,7 +8390,7 @@
               <a:buNone/>
             </a:pPr>
             <a:r>
-              <a:rPr lang="en-US" sz="670" dirty="0">
+              <a:rPr lang="en-US" sz="650" dirty="0">
                 <a:solidFill>
                   <a:srgbClr val="5F6368"/>
                 </a:solidFill>
@@ -8507,7 +8400,7 @@
               </a:rPr>
               <a:t>Identity and resource isolation boundary restricting principal access so workloads.</a:t>
             </a:r>
-            <a:endParaRPr lang="en-US" sz="780" dirty="0"/>
+            <a:endParaRPr lang="en-US" sz="750" dirty="0"/>
           </a:p>
         </p:txBody>
       </p:sp>
@@ -8519,8 +8412,8 @@
         </p:nvSpPr>
         <p:spPr>
           <a:xfrm>
-            <a:off x="3639312" y="2850185"/>
-            <a:ext cx="7790688" cy="296266"/>
+            <a:off x="3639312" y="3081528"/>
+            <a:ext cx="7790688" cy="338328"/>
           </a:xfrm>
           <a:prstGeom prst="rect">
             <a:avLst/>
@@ -8544,8 +8437,8 @@
         </p:nvSpPr>
         <p:spPr>
           <a:xfrm>
-            <a:off x="3749040" y="2868473"/>
-            <a:ext cx="7571232" cy="259690"/>
+            <a:off x="3749040" y="3099816"/>
+            <a:ext cx="7571232" cy="301752"/>
           </a:xfrm>
           <a:prstGeom prst="rect">
             <a:avLst/>
@@ -8554,14 +8447,19 @@
           <a:ln/>
         </p:spPr>
         <p:txBody>
-          <a:bodyPr wrap="square" rtlCol="0" anchor="ctr"/>
-          <a:lstStyle/>
-          <a:p>
-            <a:pPr indent="0" marL="0">
-              <a:buNone/>
-            </a:pPr>
-            <a:r>
-              <a:rPr lang="en-US" sz="720" b="1" dirty="0">
+          <a:bodyPr wrap="square" rtlCol="0" anchor="ctr">
+            <a:normAutofit/>
+          </a:bodyPr>
+          <a:lstStyle/>
+          <a:p>
+            <a:pPr indent="0" marL="0">
+              <a:lnSpc>
+                <a:spcPct val="102000"/>
+              </a:lnSpc>
+              <a:buNone/>
+            </a:pPr>
+            <a:r>
+              <a:rPr lang="en-US" sz="690" b="1" dirty="0">
                 <a:solidFill>
                   <a:srgbClr val="202124"/>
                 </a:solidFill>
@@ -8572,10 +8470,13 @@
               <a:t>• Unified Vertex AI Agent Engine &amp; Google ADK Reference Architecture: </a:t>
             </a:r>
             <a:pPr indent="0" marL="0">
-              <a:buNone/>
-            </a:pPr>
-            <a:r>
-              <a:rPr lang="en-US" sz="700" dirty="0">
+              <a:lnSpc>
+                <a:spcPct val="102000"/>
+              </a:lnSpc>
+              <a:buNone/>
+            </a:pPr>
+            <a:r>
+              <a:rPr lang="en-US" sz="670" dirty="0">
                 <a:solidFill>
                   <a:srgbClr val="3C4043"/>
                 </a:solidFill>
@@ -8585,7 +8486,7 @@
               </a:rPr>
               <a:t>Binds IAM Principal Access Boundary (PAB) policies to spoke principals so credentials and tool calls remain strictly scoped to their authorized boundary.</a:t>
             </a:r>
-            <a:endParaRPr lang="en-US" sz="720" dirty="0"/>
+            <a:endParaRPr lang="en-US" sz="690" dirty="0"/>
           </a:p>
         </p:txBody>
       </p:sp>
@@ -8597,8 +8498,8 @@
         </p:nvSpPr>
         <p:spPr>
           <a:xfrm>
-            <a:off x="749808" y="3146450"/>
-            <a:ext cx="2889504" cy="785470"/>
+            <a:off x="749808" y="3419856"/>
+            <a:ext cx="2889504" cy="822960"/>
           </a:xfrm>
           <a:prstGeom prst="rect">
             <a:avLst/>
@@ -8622,8 +8523,8 @@
         </p:nvSpPr>
         <p:spPr>
           <a:xfrm>
-            <a:off x="841248" y="3164738"/>
-            <a:ext cx="2706624" cy="748894"/>
+            <a:off x="841248" y="3438144"/>
+            <a:ext cx="2706624" cy="786384"/>
           </a:xfrm>
           <a:prstGeom prst="rect">
             <a:avLst/>
@@ -8632,14 +8533,16 @@
           <a:ln/>
         </p:spPr>
         <p:txBody>
-          <a:bodyPr wrap="square" rtlCol="0" anchor="ctr"/>
-          <a:lstStyle/>
-          <a:p>
-            <a:pPr indent="0" marL="0">
-              <a:buNone/>
-            </a:pPr>
-            <a:r>
-              <a:rPr lang="en-US" sz="780" b="1" dirty="0">
+          <a:bodyPr wrap="square" rtlCol="0" anchor="ctr">
+            <a:normAutofit/>
+          </a:bodyPr>
+          <a:lstStyle/>
+          <a:p>
+            <a:pPr indent="0" marL="0">
+              <a:buNone/>
+            </a:pPr>
+            <a:r>
+              <a:rPr lang="en-US" sz="750" b="1" dirty="0">
                 <a:solidFill>
                   <a:srgbClr val="202124"/>
                 </a:solidFill>
@@ -8654,7 +8557,7 @@
               <a:buNone/>
             </a:pPr>
             <a:r>
-              <a:rPr lang="en-US" sz="670" dirty="0">
+              <a:rPr lang="en-US" sz="650" dirty="0">
                 <a:solidFill>
                   <a:srgbClr val="5F6368"/>
                 </a:solidFill>
@@ -8664,7 +8567,7 @@
               </a:rPr>
               <a:t>Isolated Google Cloud execution spokes.</a:t>
             </a:r>
-            <a:endParaRPr lang="en-US" sz="780" dirty="0"/>
+            <a:endParaRPr lang="en-US" sz="750" dirty="0"/>
           </a:p>
         </p:txBody>
       </p:sp>
@@ -8676,8 +8579,8 @@
         </p:nvSpPr>
         <p:spPr>
           <a:xfrm>
-            <a:off x="3639312" y="3146450"/>
-            <a:ext cx="7790688" cy="785470"/>
+            <a:off x="3639312" y="3419856"/>
+            <a:ext cx="7790688" cy="822960"/>
           </a:xfrm>
           <a:prstGeom prst="rect">
             <a:avLst/>
@@ -8701,8 +8604,8 @@
         </p:nvSpPr>
         <p:spPr>
           <a:xfrm>
-            <a:off x="3749040" y="3164738"/>
-            <a:ext cx="7571232" cy="748894"/>
+            <a:off x="3749040" y="3438144"/>
+            <a:ext cx="7571232" cy="786384"/>
           </a:xfrm>
           <a:prstGeom prst="rect">
             <a:avLst/>
@@ -8711,14 +8614,19 @@
           <a:ln/>
         </p:spPr>
         <p:txBody>
-          <a:bodyPr wrap="square" rtlCol="0" anchor="ctr"/>
-          <a:lstStyle/>
-          <a:p>
-            <a:pPr indent="0" marL="0">
-              <a:buNone/>
-            </a:pPr>
-            <a:r>
-              <a:rPr lang="en-US" sz="720" b="1" dirty="0">
+          <a:bodyPr wrap="square" rtlCol="0" anchor="ctr">
+            <a:normAutofit/>
+          </a:bodyPr>
+          <a:lstStyle/>
+          <a:p>
+            <a:pPr indent="0" marL="0">
+              <a:lnSpc>
+                <a:spcPct val="102000"/>
+              </a:lnSpc>
+              <a:buNone/>
+            </a:pPr>
+            <a:r>
+              <a:rPr lang="en-US" sz="690" b="1" dirty="0">
                 <a:solidFill>
                   <a:srgbClr val="202124"/>
                 </a:solidFill>
@@ -8729,10 +8637,13 @@
               <a:t>• Thinking Budget Cap: </a:t>
             </a:r>
             <a:pPr indent="0" marL="0">
-              <a:buNone/>
-            </a:pPr>
-            <a:r>
-              <a:rPr lang="en-US" sz="700" dirty="0">
+              <a:lnSpc>
+                <a:spcPct val="102000"/>
+              </a:lnSpc>
+              <a:buNone/>
+            </a:pPr>
+            <a:r>
+              <a:rPr lang="en-US" sz="670" dirty="0">
                 <a:solidFill>
                   <a:srgbClr val="3C4043"/>
                 </a:solidFill>
@@ -8744,10 +8655,13 @@
 </a:t>
             </a:r>
             <a:pPr indent="0" marL="0">
-              <a:buNone/>
-            </a:pPr>
-            <a:r>
-              <a:rPr lang="en-US" sz="720" b="1" dirty="0">
+              <a:lnSpc>
+                <a:spcPct val="102000"/>
+              </a:lnSpc>
+              <a:buNone/>
+            </a:pPr>
+            <a:r>
+              <a:rPr lang="en-US" sz="690" b="1" dirty="0">
                 <a:solidFill>
                   <a:srgbClr val="202124"/>
                 </a:solidFill>
@@ -8758,10 +8672,13 @@
               <a:t>• Valkey Rate Bulkhead: </a:t>
             </a:r>
             <a:pPr indent="0" marL="0">
-              <a:buNone/>
-            </a:pPr>
-            <a:r>
-              <a:rPr lang="en-US" sz="700" dirty="0">
+              <a:lnSpc>
+                <a:spcPct val="102000"/>
+              </a:lnSpc>
+              <a:buNone/>
+            </a:pPr>
+            <a:r>
+              <a:rPr lang="en-US" sz="670" dirty="0">
                 <a:solidFill>
                   <a:srgbClr val="3C4043"/>
                 </a:solidFill>
@@ -8773,10 +8690,13 @@
 </a:t>
             </a:r>
             <a:pPr indent="0" marL="0">
-              <a:buNone/>
-            </a:pPr>
-            <a:r>
-              <a:rPr lang="en-US" sz="720" b="1" dirty="0">
+              <a:lnSpc>
+                <a:spcPct val="102000"/>
+              </a:lnSpc>
+              <a:buNone/>
+            </a:pPr>
+            <a:r>
+              <a:rPr lang="en-US" sz="690" b="1" dirty="0">
                 <a:solidFill>
                   <a:srgbClr val="202124"/>
                 </a:solidFill>
@@ -8787,10 +8707,13 @@
               <a:t>• 2LO &amp; 3LO Auth Mgr: </a:t>
             </a:r>
             <a:pPr indent="0" marL="0">
-              <a:buNone/>
-            </a:pPr>
-            <a:r>
-              <a:rPr lang="en-US" sz="700" dirty="0">
+              <a:lnSpc>
+                <a:spcPct val="102000"/>
+              </a:lnSpc>
+              <a:buNone/>
+            </a:pPr>
+            <a:r>
+              <a:rPr lang="en-US" sz="670" dirty="0">
                 <a:solidFill>
                   <a:srgbClr val="3C4043"/>
                 </a:solidFill>
@@ -8802,10 +8725,13 @@
 </a:t>
             </a:r>
             <a:pPr indent="0" marL="0">
-              <a:buNone/>
-            </a:pPr>
-            <a:r>
-              <a:rPr lang="en-US" sz="720" b="1" dirty="0">
+              <a:lnSpc>
+                <a:spcPct val="102000"/>
+              </a:lnSpc>
+              <a:buNone/>
+            </a:pPr>
+            <a:r>
+              <a:rPr lang="en-US" sz="690" b="1" dirty="0">
                 <a:solidFill>
                   <a:srgbClr val="202124"/>
                 </a:solidFill>
@@ -8816,10 +8742,13 @@
               <a:t>• AlloyDB RLS &amp; L1–L5: </a:t>
             </a:r>
             <a:pPr indent="0" marL="0">
-              <a:buNone/>
-            </a:pPr>
-            <a:r>
-              <a:rPr lang="en-US" sz="700" dirty="0">
+              <a:lnSpc>
+                <a:spcPct val="102000"/>
+              </a:lnSpc>
+              <a:buNone/>
+            </a:pPr>
+            <a:r>
+              <a:rPr lang="en-US" sz="670" dirty="0">
                 <a:solidFill>
                   <a:srgbClr val="3C4043"/>
                 </a:solidFill>
@@ -8829,7 +8758,7 @@
               </a:rPr>
               <a:t>Isolated persistence layer enforcing access boundaries, vector namespaces, and encryption at rest.</a:t>
             </a:r>
-            <a:endParaRPr lang="en-US" sz="720" dirty="0"/>
+            <a:endParaRPr lang="en-US" sz="690" dirty="0"/>
           </a:p>
         </p:txBody>
       </p:sp>
@@ -8841,7 +8770,7 @@
         </p:nvSpPr>
         <p:spPr>
           <a:xfrm>
-            <a:off x="749808" y="4041648"/>
+            <a:off x="749808" y="4315968"/>
             <a:ext cx="10680192" cy="0"/>
           </a:xfrm>
           <a:prstGeom prst="line">
@@ -8864,8 +8793,8 @@
         </p:nvSpPr>
         <p:spPr>
           <a:xfrm>
-            <a:off x="749808" y="4114800"/>
-            <a:ext cx="10680192" cy="256032"/>
+            <a:off x="749808" y="4370832"/>
+            <a:ext cx="10680192" cy="237744"/>
           </a:xfrm>
           <a:prstGeom prst="rect">
             <a:avLst/>
@@ -8881,7 +8810,7 @@
               <a:buNone/>
             </a:pPr>
             <a:r>
-              <a:rPr lang="en-US" sz="1300" dirty="0">
+              <a:rPr lang="en-US" sz="1250" dirty="0">
                 <a:solidFill>
                   <a:srgbClr val="202124"/>
                 </a:solidFill>
@@ -8891,7 +8820,7 @@
               </a:rPr>
               <a:t>Agentic flow</a:t>
             </a:r>
-            <a:endParaRPr lang="en-US" sz="1300" dirty="0"/>
+            <a:endParaRPr lang="en-US" sz="1250" dirty="0"/>
           </a:p>
         </p:txBody>
       </p:sp>
@@ -8903,8 +8832,8 @@
         </p:nvSpPr>
         <p:spPr>
           <a:xfrm>
-            <a:off x="749808" y="4407408"/>
-            <a:ext cx="10680192" cy="2139696"/>
+            <a:off x="749808" y="4626864"/>
+            <a:ext cx="10680192" cy="1901952"/>
           </a:xfrm>
           <a:prstGeom prst="rect">
             <a:avLst/>
@@ -8913,17 +8842,19 @@
           <a:ln/>
         </p:spPr>
         <p:txBody>
-          <a:bodyPr wrap="square" rtlCol="0" anchor="t"/>
-          <a:lstStyle/>
-          <a:p>
-            <a:pPr indent="0" marL="0">
-              <a:lnSpc>
-                <a:spcPct val="108000"/>
-              </a:lnSpc>
-              <a:buNone/>
-            </a:pPr>
-            <a:r>
-              <a:rPr lang="en-US" sz="740" b="1" dirty="0">
+          <a:bodyPr wrap="square" rtlCol="0" anchor="t">
+            <a:normAutofit/>
+          </a:bodyPr>
+          <a:lstStyle/>
+          <a:p>
+            <a:pPr indent="0" marL="0">
+              <a:lnSpc>
+                <a:spcPct val="106000"/>
+              </a:lnSpc>
+              <a:buNone/>
+            </a:pPr>
+            <a:r>
+              <a:rPr lang="en-US" sz="730" b="1" dirty="0">
                 <a:solidFill>
                   <a:srgbClr val="202124"/>
                 </a:solidFill>
@@ -8935,12 +8866,12 @@
             </a:r>
             <a:pPr indent="0" marL="0">
               <a:lnSpc>
-                <a:spcPct val="108000"/>
-              </a:lnSpc>
-              <a:buNone/>
-            </a:pPr>
-            <a:r>
-              <a:rPr lang="en-US" sz="730" dirty="0">
+                <a:spcPct val="106000"/>
+              </a:lnSpc>
+              <a:buNone/>
+            </a:pPr>
+            <a:r>
+              <a:rPr lang="en-US" sz="720" dirty="0">
                 <a:solidFill>
                   <a:srgbClr val="3C4043"/>
                 </a:solidFill>
@@ -8953,12 +8884,12 @@
             </a:r>
             <a:pPr indent="0" marL="0">
               <a:lnSpc>
-                <a:spcPct val="108000"/>
-              </a:lnSpc>
-              <a:buNone/>
-            </a:pPr>
-            <a:r>
-              <a:rPr lang="en-US" sz="740" b="1" dirty="0">
+                <a:spcPct val="106000"/>
+              </a:lnSpc>
+              <a:buNone/>
+            </a:pPr>
+            <a:r>
+              <a:rPr lang="en-US" sz="730" b="1" dirty="0">
                 <a:solidFill>
                   <a:srgbClr val="202124"/>
                 </a:solidFill>
@@ -8970,12 +8901,12 @@
             </a:r>
             <a:pPr indent="0" marL="0">
               <a:lnSpc>
-                <a:spcPct val="108000"/>
-              </a:lnSpc>
-              <a:buNone/>
-            </a:pPr>
-            <a:r>
-              <a:rPr lang="en-US" sz="730" dirty="0">
+                <a:spcPct val="106000"/>
+              </a:lnSpc>
+              <a:buNone/>
+            </a:pPr>
+            <a:r>
+              <a:rPr lang="en-US" sz="720" dirty="0">
                 <a:solidFill>
                   <a:srgbClr val="3C4043"/>
                 </a:solidFill>
@@ -8983,17 +8914,17 @@
                 <a:ea typeface="Arial" pitchFamily="34" charset="-122"/>
                 <a:cs typeface="Arial" pitchFamily="34" charset="-120"/>
               </a:rPr>
-              <a:t>After passing policy and security checks across Hop 1: Edge PEP, Hop 4: Model Armor, and Hop 2: Catalog PDP, the request is forwarded to Architecture Selector.
+              <a:t>After passing policy and security checks across Hop 1: Cloud Armor, Hop 4: Model Armor, and Hop 2: Catalog PDP, the request is forwarded to Architecture Selector.
 </a:t>
             </a:r>
             <a:pPr indent="0" marL="0">
               <a:lnSpc>
-                <a:spcPct val="108000"/>
-              </a:lnSpc>
-              <a:buNone/>
-            </a:pPr>
-            <a:r>
-              <a:rPr lang="en-US" sz="740" b="1" dirty="0">
+                <a:spcPct val="106000"/>
+              </a:lnSpc>
+              <a:buNone/>
+            </a:pPr>
+            <a:r>
+              <a:rPr lang="en-US" sz="730" b="1" dirty="0">
                 <a:solidFill>
                   <a:srgbClr val="202124"/>
                 </a:solidFill>
@@ -9005,12 +8936,12 @@
             </a:r>
             <a:pPr indent="0" marL="0">
               <a:lnSpc>
-                <a:spcPct val="108000"/>
-              </a:lnSpc>
-              <a:buNone/>
-            </a:pPr>
-            <a:r>
-              <a:rPr lang="en-US" sz="730" dirty="0">
+                <a:spcPct val="106000"/>
+              </a:lnSpc>
+              <a:buNone/>
+            </a:pPr>
+            <a:r>
+              <a:rPr lang="en-US" sz="720" dirty="0">
                 <a:solidFill>
                   <a:srgbClr val="3C4043"/>
                 </a:solidFill>
@@ -9023,12 +8954,12 @@
             </a:r>
             <a:pPr indent="0" marL="0">
               <a:lnSpc>
-                <a:spcPct val="108000"/>
-              </a:lnSpc>
-              <a:buNone/>
-            </a:pPr>
-            <a:r>
-              <a:rPr lang="en-US" sz="740" b="1" dirty="0">
+                <a:spcPct val="106000"/>
+              </a:lnSpc>
+              <a:buNone/>
+            </a:pPr>
+            <a:r>
+              <a:rPr lang="en-US" sz="730" b="1" dirty="0">
                 <a:solidFill>
                   <a:srgbClr val="202124"/>
                 </a:solidFill>
@@ -9040,12 +8971,12 @@
             </a:r>
             <a:pPr indent="0" marL="0">
               <a:lnSpc>
-                <a:spcPct val="108000"/>
-              </a:lnSpc>
-              <a:buNone/>
-            </a:pPr>
-            <a:r>
-              <a:rPr lang="en-US" sz="730" dirty="0">
+                <a:spcPct val="106000"/>
+              </a:lnSpc>
+              <a:buNone/>
+            </a:pPr>
+            <a:r>
+              <a:rPr lang="en-US" sz="720" dirty="0">
                 <a:solidFill>
                   <a:srgbClr val="3C4043"/>
                 </a:solidFill>
@@ -9058,12 +8989,12 @@
             </a:r>
             <a:pPr indent="0" marL="0">
               <a:lnSpc>
-                <a:spcPct val="108000"/>
-              </a:lnSpc>
-              <a:buNone/>
-            </a:pPr>
-            <a:r>
-              <a:rPr lang="en-US" sz="700" b="1" dirty="0">
+                <a:spcPct val="106000"/>
+              </a:lnSpc>
+              <a:buNone/>
+            </a:pPr>
+            <a:r>
+              <a:rPr lang="en-US" sz="690" b="1" dirty="0">
                 <a:solidFill>
                   <a:srgbClr val="202124"/>
                 </a:solidFill>
@@ -9075,12 +9006,12 @@
             </a:r>
             <a:pPr indent="0" marL="0">
               <a:lnSpc>
-                <a:spcPct val="108000"/>
-              </a:lnSpc>
-              <a:buNone/>
-            </a:pPr>
-            <a:r>
-              <a:rPr lang="en-US" sz="690" dirty="0">
+                <a:spcPct val="106000"/>
+              </a:lnSpc>
+              <a:buNone/>
+            </a:pPr>
+            <a:r>
+              <a:rPr lang="en-US" sz="680" dirty="0">
                 <a:solidFill>
                   <a:srgbClr val="3C4043"/>
                 </a:solidFill>
@@ -9093,12 +9024,12 @@
             </a:r>
             <a:pPr indent="0" marL="0">
               <a:lnSpc>
-                <a:spcPct val="108000"/>
-              </a:lnSpc>
-              <a:buNone/>
-            </a:pPr>
-            <a:r>
-              <a:rPr lang="en-US" sz="700" b="1" dirty="0">
+                <a:spcPct val="106000"/>
+              </a:lnSpc>
+              <a:buNone/>
+            </a:pPr>
+            <a:r>
+              <a:rPr lang="en-US" sz="690" b="1" dirty="0">
                 <a:solidFill>
                   <a:srgbClr val="202124"/>
                 </a:solidFill>
@@ -9110,12 +9041,12 @@
             </a:r>
             <a:pPr indent="0" marL="0">
               <a:lnSpc>
-                <a:spcPct val="108000"/>
-              </a:lnSpc>
-              <a:buNone/>
-            </a:pPr>
-            <a:r>
-              <a:rPr lang="en-US" sz="690" dirty="0">
+                <a:spcPct val="106000"/>
+              </a:lnSpc>
+              <a:buNone/>
+            </a:pPr>
+            <a:r>
+              <a:rPr lang="en-US" sz="680" dirty="0">
                 <a:solidFill>
                   <a:srgbClr val="3C4043"/>
                 </a:solidFill>
@@ -9128,12 +9059,12 @@
             </a:r>
             <a:pPr indent="0" marL="0">
               <a:lnSpc>
-                <a:spcPct val="108000"/>
-              </a:lnSpc>
-              <a:buNone/>
-            </a:pPr>
-            <a:r>
-              <a:rPr lang="en-US" sz="700" b="1" dirty="0">
+                <a:spcPct val="106000"/>
+              </a:lnSpc>
+              <a:buNone/>
+            </a:pPr>
+            <a:r>
+              <a:rPr lang="en-US" sz="690" b="1" dirty="0">
                 <a:solidFill>
                   <a:srgbClr val="202124"/>
                 </a:solidFill>
@@ -9145,12 +9076,12 @@
             </a:r>
             <a:pPr indent="0" marL="0">
               <a:lnSpc>
-                <a:spcPct val="108000"/>
-              </a:lnSpc>
-              <a:buNone/>
-            </a:pPr>
-            <a:r>
-              <a:rPr lang="en-US" sz="690" dirty="0">
+                <a:spcPct val="106000"/>
+              </a:lnSpc>
+              <a:buNone/>
+            </a:pPr>
+            <a:r>
+              <a:rPr lang="en-US" sz="680" dirty="0">
                 <a:solidFill>
                   <a:srgbClr val="3C4043"/>
                 </a:solidFill>
@@ -9163,12 +9094,12 @@
             </a:r>
             <a:pPr indent="0" marL="0">
               <a:lnSpc>
-                <a:spcPct val="108000"/>
-              </a:lnSpc>
-              <a:buNone/>
-            </a:pPr>
-            <a:r>
-              <a:rPr lang="en-US" sz="700" b="1" dirty="0">
+                <a:spcPct val="106000"/>
+              </a:lnSpc>
+              <a:buNone/>
+            </a:pPr>
+            <a:r>
+              <a:rPr lang="en-US" sz="690" b="1" dirty="0">
                 <a:solidFill>
                   <a:srgbClr val="202124"/>
                 </a:solidFill>
@@ -9180,12 +9111,12 @@
             </a:r>
             <a:pPr indent="0" marL="0">
               <a:lnSpc>
-                <a:spcPct val="108000"/>
-              </a:lnSpc>
-              <a:buNone/>
-            </a:pPr>
-            <a:r>
-              <a:rPr lang="en-US" sz="690" dirty="0">
+                <a:spcPct val="106000"/>
+              </a:lnSpc>
+              <a:buNone/>
+            </a:pPr>
+            <a:r>
+              <a:rPr lang="en-US" sz="680" dirty="0">
                 <a:solidFill>
                   <a:srgbClr val="3C4043"/>
                 </a:solidFill>
@@ -9198,12 +9129,12 @@
             </a:r>
             <a:pPr indent="0" marL="0">
               <a:lnSpc>
-                <a:spcPct val="108000"/>
-              </a:lnSpc>
-              <a:buNone/>
-            </a:pPr>
-            <a:r>
-              <a:rPr lang="en-US" sz="740" b="1" dirty="0">
+                <a:spcPct val="106000"/>
+              </a:lnSpc>
+              <a:buNone/>
+            </a:pPr>
+            <a:r>
+              <a:rPr lang="en-US" sz="730" b="1" dirty="0">
                 <a:solidFill>
                   <a:srgbClr val="202124"/>
                 </a:solidFill>
@@ -9215,12 +9146,12 @@
             </a:r>
             <a:pPr indent="0" marL="0">
               <a:lnSpc>
-                <a:spcPct val="108000"/>
-              </a:lnSpc>
-              <a:buNone/>
-            </a:pPr>
-            <a:r>
-              <a:rPr lang="en-US" sz="730" dirty="0">
+                <a:spcPct val="106000"/>
+              </a:lnSpc>
+              <a:buNone/>
+            </a:pPr>
+            <a:r>
+              <a:rPr lang="en-US" sz="720" dirty="0">
                 <a:solidFill>
                   <a:srgbClr val="3C4043"/>
                 </a:solidFill>
@@ -9233,12 +9164,12 @@
             </a:r>
             <a:pPr indent="0" marL="0">
               <a:lnSpc>
-                <a:spcPct val="108000"/>
-              </a:lnSpc>
-              <a:buNone/>
-            </a:pPr>
-            <a:r>
-              <a:rPr lang="en-US" sz="740" b="1" dirty="0">
+                <a:spcPct val="106000"/>
+              </a:lnSpc>
+              <a:buNone/>
+            </a:pPr>
+            <a:r>
+              <a:rPr lang="en-US" sz="730" b="1" dirty="0">
                 <a:solidFill>
                   <a:srgbClr val="202124"/>
                 </a:solidFill>
@@ -9250,12 +9181,12 @@
             </a:r>
             <a:pPr indent="0" marL="0">
               <a:lnSpc>
-                <a:spcPct val="108000"/>
-              </a:lnSpc>
-              <a:buNone/>
-            </a:pPr>
-            <a:r>
-              <a:rPr lang="en-US" sz="730" dirty="0">
+                <a:spcPct val="106000"/>
+              </a:lnSpc>
+              <a:buNone/>
+            </a:pPr>
+            <a:r>
+              <a:rPr lang="en-US" sz="720" dirty="0">
                 <a:solidFill>
                   <a:srgbClr val="3C4043"/>
                 </a:solidFill>
@@ -9268,12 +9199,12 @@
             </a:r>
             <a:pPr indent="0" marL="0">
               <a:lnSpc>
-                <a:spcPct val="108000"/>
-              </a:lnSpc>
-              <a:buNone/>
-            </a:pPr>
-            <a:r>
-              <a:rPr lang="en-US" sz="740" b="1" dirty="0">
+                <a:spcPct val="106000"/>
+              </a:lnSpc>
+              <a:buNone/>
+            </a:pPr>
+            <a:r>
+              <a:rPr lang="en-US" sz="730" b="1" dirty="0">
                 <a:solidFill>
                   <a:srgbClr val="202124"/>
                 </a:solidFill>
@@ -9285,12 +9216,12 @@
             </a:r>
             <a:pPr indent="0" marL="0">
               <a:lnSpc>
-                <a:spcPct val="108000"/>
-              </a:lnSpc>
-              <a:buNone/>
-            </a:pPr>
-            <a:r>
-              <a:rPr lang="en-US" sz="730" dirty="0">
+                <a:spcPct val="106000"/>
+              </a:lnSpc>
+              <a:buNone/>
+            </a:pPr>
+            <a:r>
+              <a:rPr lang="en-US" sz="720" dirty="0">
                 <a:solidFill>
                   <a:srgbClr val="3C4043"/>
                 </a:solidFill>
@@ -9301,7 +9232,7 @@
               <a:t>The verified response returns to the caller through the Triad Pillar 1: Zero-Trust Cryptographic Security, while structured OpenTelemetry audit and FinOps spans stream to the Triad Pillar 3: Privacy- Preserving OTel &amp; Chargeback.
 </a:t>
             </a:r>
-            <a:endParaRPr lang="en-US" sz="740" dirty="0"/>
+            <a:endParaRPr lang="en-US" sz="730" dirty="0"/>
           </a:p>
         </p:txBody>
       </p:sp>
@@ -9473,8 +9404,8 @@
         </p:nvSpPr>
         <p:spPr>
           <a:xfrm>
-            <a:off x="749808" y="658368"/>
-            <a:ext cx="10680192" cy="310896"/>
+            <a:off x="749808" y="621792"/>
+            <a:ext cx="10680192" cy="274320"/>
           </a:xfrm>
           <a:prstGeom prst="rect">
             <a:avLst/>
@@ -9490,7 +9421,7 @@
               <a:buNone/>
             </a:pPr>
             <a:r>
-              <a:rPr lang="en-US" sz="1550" dirty="0">
+              <a:rPr lang="en-US" sz="1500" dirty="0">
                 <a:solidFill>
                   <a:srgbClr val="202124"/>
                 </a:solidFill>
@@ -9500,7 +9431,7 @@
               </a:rPr>
               <a:t>Products used</a:t>
             </a:r>
-            <a:endParaRPr lang="en-US" sz="1550" dirty="0"/>
+            <a:endParaRPr lang="en-US" sz="1500" dirty="0"/>
           </a:p>
         </p:txBody>
       </p:sp>
@@ -9512,8 +9443,8 @@
         </p:nvSpPr>
         <p:spPr>
           <a:xfrm>
-            <a:off x="749808" y="1005840"/>
-            <a:ext cx="10680192" cy="219456"/>
+            <a:off x="749808" y="914400"/>
+            <a:ext cx="10680192" cy="329184"/>
           </a:xfrm>
           <a:prstGeom prst="rect">
             <a:avLst/>
@@ -9522,14 +9453,14 @@
           <a:ln/>
         </p:spPr>
         <p:txBody>
-          <a:bodyPr wrap="square" rtlCol="0" anchor="ctr"/>
-          <a:lstStyle/>
-          <a:p>
-            <a:pPr indent="0" marL="0">
-              <a:buNone/>
-            </a:pPr>
-            <a:r>
-              <a:rPr lang="en-US" sz="920" dirty="0">
+          <a:bodyPr wrap="square" rtlCol="0" anchor="t"/>
+          <a:lstStyle/>
+          <a:p>
+            <a:pPr indent="0" marL="0">
+              <a:buNone/>
+            </a:pPr>
+            <a:r>
+              <a:rPr lang="en-US" sz="860" dirty="0">
                 <a:solidFill>
                   <a:srgbClr val="3C4043"/>
                 </a:solidFill>
@@ -9539,7 +9470,7 @@
               </a:rPr>
               <a:t>This reference architecture uses the following Google Cloud services and open-source frameworks to implement Design Patterns for Scalable Multi-Agent Ecosystems: Vertex AI Agent Engine, MCP &amp; A2A.</a:t>
             </a:r>
-            <a:endParaRPr lang="en-US" sz="920" dirty="0"/>
+            <a:endParaRPr lang="en-US" sz="860" dirty="0"/>
           </a:p>
         </p:txBody>
       </p:sp>
@@ -9551,8 +9482,8 @@
         </p:nvSpPr>
         <p:spPr>
           <a:xfrm>
-            <a:off x="877824" y="1280160"/>
-            <a:ext cx="10552176" cy="1993392"/>
+            <a:off x="877824" y="1261872"/>
+            <a:ext cx="10552176" cy="2011680"/>
           </a:xfrm>
           <a:prstGeom prst="rect">
             <a:avLst/>
@@ -9561,17 +9492,19 @@
           <a:ln/>
         </p:spPr>
         <p:txBody>
-          <a:bodyPr wrap="square" rtlCol="0" anchor="t"/>
-          <a:lstStyle/>
-          <a:p>
-            <a:pPr indent="0" marL="0">
-              <a:lnSpc>
-                <a:spcPct val="124000"/>
-              </a:lnSpc>
-              <a:buNone/>
-            </a:pPr>
-            <a:r>
-              <a:rPr lang="en-US" sz="840" b="1" dirty="0">
+          <a:bodyPr wrap="square" rtlCol="0" anchor="t">
+            <a:normAutofit/>
+          </a:bodyPr>
+          <a:lstStyle/>
+          <a:p>
+            <a:pPr indent="0" marL="0">
+              <a:lnSpc>
+                <a:spcPct val="118000"/>
+              </a:lnSpc>
+              <a:buNone/>
+            </a:pPr>
+            <a:r>
+              <a:rPr lang="en-US" sz="810" b="1" dirty="0">
                 <a:solidFill>
                   <a:srgbClr val="1A73E8"/>
                 </a:solidFill>
@@ -9583,12 +9516,12 @@
             </a:r>
             <a:pPr indent="0" marL="0">
               <a:lnSpc>
-                <a:spcPct val="124000"/>
-              </a:lnSpc>
-              <a:buNone/>
-            </a:pPr>
-            <a:r>
-              <a:rPr lang="en-US" sz="820" dirty="0">
+                <a:spcPct val="118000"/>
+              </a:lnSpc>
+              <a:buNone/>
+            </a:pPr>
+            <a:r>
+              <a:rPr lang="en-US" sz="790" dirty="0">
                 <a:solidFill>
                   <a:srgbClr val="3C4043"/>
                 </a:solidFill>
@@ -9601,12 +9534,12 @@
             </a:r>
             <a:pPr indent="0" marL="0">
               <a:lnSpc>
-                <a:spcPct val="124000"/>
-              </a:lnSpc>
-              <a:buNone/>
-            </a:pPr>
-            <a:r>
-              <a:rPr lang="en-US" sz="840" b="1" dirty="0">
+                <a:spcPct val="118000"/>
+              </a:lnSpc>
+              <a:buNone/>
+            </a:pPr>
+            <a:r>
+              <a:rPr lang="en-US" sz="810" b="1" dirty="0">
                 <a:solidFill>
                   <a:srgbClr val="1A73E8"/>
                 </a:solidFill>
@@ -9618,12 +9551,12 @@
             </a:r>
             <a:pPr indent="0" marL="0">
               <a:lnSpc>
-                <a:spcPct val="124000"/>
-              </a:lnSpc>
-              <a:buNone/>
-            </a:pPr>
-            <a:r>
-              <a:rPr lang="en-US" sz="820" dirty="0">
+                <a:spcPct val="118000"/>
+              </a:lnSpc>
+              <a:buNone/>
+            </a:pPr>
+            <a:r>
+              <a:rPr lang="en-US" sz="790" dirty="0">
                 <a:solidFill>
                   <a:srgbClr val="3C4043"/>
                 </a:solidFill>
@@ -9636,12 +9569,12 @@
             </a:r>
             <a:pPr indent="0" marL="0">
               <a:lnSpc>
-                <a:spcPct val="124000"/>
-              </a:lnSpc>
-              <a:buNone/>
-            </a:pPr>
-            <a:r>
-              <a:rPr lang="en-US" sz="840" b="1" dirty="0">
+                <a:spcPct val="118000"/>
+              </a:lnSpc>
+              <a:buNone/>
+            </a:pPr>
+            <a:r>
+              <a:rPr lang="en-US" sz="810" b="1" dirty="0">
                 <a:solidFill>
                   <a:srgbClr val="1A73E8"/>
                 </a:solidFill>
@@ -9653,12 +9586,12 @@
             </a:r>
             <a:pPr indent="0" marL="0">
               <a:lnSpc>
-                <a:spcPct val="124000"/>
-              </a:lnSpc>
-              <a:buNone/>
-            </a:pPr>
-            <a:r>
-              <a:rPr lang="en-US" sz="820" dirty="0">
+                <a:spcPct val="118000"/>
+              </a:lnSpc>
+              <a:buNone/>
+            </a:pPr>
+            <a:r>
+              <a:rPr lang="en-US" sz="790" dirty="0">
                 <a:solidFill>
                   <a:srgbClr val="3C4043"/>
                 </a:solidFill>
@@ -9671,12 +9604,12 @@
             </a:r>
             <a:pPr indent="0" marL="0">
               <a:lnSpc>
-                <a:spcPct val="124000"/>
-              </a:lnSpc>
-              <a:buNone/>
-            </a:pPr>
-            <a:r>
-              <a:rPr lang="en-US" sz="840" b="1" dirty="0">
+                <a:spcPct val="118000"/>
+              </a:lnSpc>
+              <a:buNone/>
+            </a:pPr>
+            <a:r>
+              <a:rPr lang="en-US" sz="810" b="1" dirty="0">
                 <a:solidFill>
                   <a:srgbClr val="1A73E8"/>
                 </a:solidFill>
@@ -9688,12 +9621,12 @@
             </a:r>
             <a:pPr indent="0" marL="0">
               <a:lnSpc>
-                <a:spcPct val="124000"/>
-              </a:lnSpc>
-              <a:buNone/>
-            </a:pPr>
-            <a:r>
-              <a:rPr lang="en-US" sz="820" dirty="0">
+                <a:spcPct val="118000"/>
+              </a:lnSpc>
+              <a:buNone/>
+            </a:pPr>
+            <a:r>
+              <a:rPr lang="en-US" sz="790" dirty="0">
                 <a:solidFill>
                   <a:srgbClr val="3C4043"/>
                 </a:solidFill>
@@ -9706,12 +9639,12 @@
             </a:r>
             <a:pPr indent="0" marL="0">
               <a:lnSpc>
-                <a:spcPct val="124000"/>
-              </a:lnSpc>
-              <a:buNone/>
-            </a:pPr>
-            <a:r>
-              <a:rPr lang="en-US" sz="840" b="1" dirty="0">
+                <a:spcPct val="118000"/>
+              </a:lnSpc>
+              <a:buNone/>
+            </a:pPr>
+            <a:r>
+              <a:rPr lang="en-US" sz="810" b="1" dirty="0">
                 <a:solidFill>
                   <a:srgbClr val="1A73E8"/>
                 </a:solidFill>
@@ -9723,12 +9656,12 @@
             </a:r>
             <a:pPr indent="0" marL="0">
               <a:lnSpc>
-                <a:spcPct val="124000"/>
-              </a:lnSpc>
-              <a:buNone/>
-            </a:pPr>
-            <a:r>
-              <a:rPr lang="en-US" sz="820" dirty="0">
+                <a:spcPct val="118000"/>
+              </a:lnSpc>
+              <a:buNone/>
+            </a:pPr>
+            <a:r>
+              <a:rPr lang="en-US" sz="790" dirty="0">
                 <a:solidFill>
                   <a:srgbClr val="3C4043"/>
                 </a:solidFill>
@@ -9738,43 +9671,165 @@
               </a:rPr>
               <a:t>Core Google Cloud service used in DOC-REF-09 to enforce production security, scalability, and observability.</a:t>
             </a:r>
+            <a:endParaRPr lang="en-US" sz="810" dirty="0"/>
+          </a:p>
+        </p:txBody>
+      </p:sp>
+      <p:sp>
+        <p:nvSpPr>
+          <p:cNvPr id="9" name="Shape 7"/>
+          <p:cNvSpPr/>
+          <p:nvPr/>
+        </p:nvSpPr>
+        <p:spPr>
+          <a:xfrm>
+            <a:off x="749808" y="3346704"/>
+            <a:ext cx="10680192" cy="0"/>
+          </a:xfrm>
+          <a:prstGeom prst="line">
+            <a:avLst/>
+          </a:prstGeom>
+          <a:noFill/>
+          <a:ln w="9525">
+            <a:solidFill>
+              <a:srgbClr val="DADCE0"/>
+            </a:solidFill>
+            <a:prstDash val="solid"/>
+          </a:ln>
+        </p:spPr>
+      </p:sp>
+      <p:sp>
+        <p:nvSpPr>
+          <p:cNvPr id="10" name="Text 8"/>
+          <p:cNvSpPr/>
+          <p:nvPr/>
+        </p:nvSpPr>
+        <p:spPr>
+          <a:xfrm>
+            <a:off x="749808" y="3419856"/>
+            <a:ext cx="10680192" cy="274320"/>
+          </a:xfrm>
+          <a:prstGeom prst="rect">
+            <a:avLst/>
+          </a:prstGeom>
+          <a:noFill/>
+          <a:ln/>
+        </p:spPr>
+        <p:txBody>
+          <a:bodyPr wrap="square" rtlCol="0" anchor="ctr"/>
+          <a:lstStyle/>
+          <a:p>
+            <a:pPr indent="0" marL="0">
+              <a:buNone/>
+            </a:pPr>
+            <a:r>
+              <a:rPr lang="en-US" sz="1500" dirty="0">
+                <a:solidFill>
+                  <a:srgbClr val="202124"/>
+                </a:solidFill>
+                <a:latin typeface="Arial" pitchFamily="34" charset="0"/>
+                <a:ea typeface="Arial" pitchFamily="34" charset="-122"/>
+                <a:cs typeface="Arial" pitchFamily="34" charset="-120"/>
+              </a:rPr>
+              <a:t>Use case</a:t>
+            </a:r>
+            <a:endParaRPr lang="en-US" sz="1500" dirty="0"/>
+          </a:p>
+        </p:txBody>
+      </p:sp>
+      <p:sp>
+        <p:nvSpPr>
+          <p:cNvPr id="11" name="Text 9"/>
+          <p:cNvSpPr/>
+          <p:nvPr/>
+        </p:nvSpPr>
+        <p:spPr>
+          <a:xfrm>
+            <a:off x="749808" y="3712464"/>
+            <a:ext cx="10680192" cy="237744"/>
+          </a:xfrm>
+          <a:prstGeom prst="rect">
+            <a:avLst/>
+          </a:prstGeom>
+          <a:noFill/>
+          <a:ln/>
+        </p:spPr>
+        <p:txBody>
+          <a:bodyPr wrap="square" rtlCol="0" anchor="ctr"/>
+          <a:lstStyle/>
+          <a:p>
+            <a:pPr indent="0" marL="0">
+              <a:buNone/>
+            </a:pPr>
+            <a:r>
+              <a:rPr lang="en-US" sz="1100" b="1" dirty="0">
+                <a:solidFill>
+                  <a:srgbClr val="202124"/>
+                </a:solidFill>
+                <a:latin typeface="Arial" pitchFamily="34" charset="0"/>
+                <a:ea typeface="Arial" pitchFamily="34" charset="-122"/>
+                <a:cs typeface="Arial" pitchFamily="34" charset="-120"/>
+              </a:rPr>
+              <a:t>A2A Agent Card Discovery, OBO Scope Narrowing &amp; Circuit Breaking</a:t>
+            </a:r>
+            <a:endParaRPr lang="en-US" sz="1100" dirty="0"/>
+          </a:p>
+        </p:txBody>
+      </p:sp>
+      <p:sp>
+        <p:nvSpPr>
+          <p:cNvPr id="12" name="Text 10"/>
+          <p:cNvSpPr/>
+          <p:nvPr/>
+        </p:nvSpPr>
+        <p:spPr>
+          <a:xfrm>
+            <a:off x="749808" y="3986784"/>
+            <a:ext cx="10680192" cy="749808"/>
+          </a:xfrm>
+          <a:prstGeom prst="rect">
+            <a:avLst/>
+          </a:prstGeom>
+          <a:noFill/>
+          <a:ln/>
+        </p:spPr>
+        <p:txBody>
+          <a:bodyPr wrap="square" rtlCol="0" anchor="t">
+            <a:normAutofit/>
+          </a:bodyPr>
+          <a:lstStyle/>
+          <a:p>
+            <a:pPr indent="0" marL="0">
+              <a:lnSpc>
+                <a:spcPct val="114000"/>
+              </a:lnSpc>
+              <a:buNone/>
+            </a:pPr>
+            <a:r>
+              <a:rPr lang="en-US" sz="840" dirty="0">
+                <a:solidFill>
+                  <a:srgbClr val="3C4043"/>
+                </a:solidFill>
+                <a:latin typeface="Arial" pitchFamily="34" charset="0"/>
+                <a:ea typeface="Arial" pitchFamily="34" charset="-122"/>
+                <a:cs typeface="Arial" pitchFamily="34" charset="-120"/>
+              </a:rPr>
+              <a:t>When the Root Orchestrator delegates a supply-chain disruption query across Order, Distributor, and Logistics Tracking agents, each A2A hop narrows the OBO token scope to the target agent’s declared capabilities.</a:t>
+            </a:r>
             <a:endParaRPr lang="en-US" sz="840" dirty="0"/>
           </a:p>
         </p:txBody>
       </p:sp>
       <p:sp>
         <p:nvSpPr>
-          <p:cNvPr id="9" name="Shape 7"/>
-          <p:cNvSpPr/>
-          <p:nvPr/>
-        </p:nvSpPr>
-        <p:spPr>
-          <a:xfrm>
-            <a:off x="749808" y="3383280"/>
-            <a:ext cx="10680192" cy="0"/>
-          </a:xfrm>
-          <a:prstGeom prst="line">
-            <a:avLst/>
-          </a:prstGeom>
-          <a:noFill/>
-          <a:ln w="9525">
-            <a:solidFill>
-              <a:srgbClr val="DADCE0"/>
-            </a:solidFill>
-            <a:prstDash val="solid"/>
-          </a:ln>
-        </p:spPr>
-      </p:sp>
-      <p:sp>
-        <p:nvSpPr>
-          <p:cNvPr id="10" name="Text 8"/>
-          <p:cNvSpPr/>
-          <p:nvPr/>
-        </p:nvSpPr>
-        <p:spPr>
-          <a:xfrm>
-            <a:off x="749808" y="3511296"/>
-            <a:ext cx="10680192" cy="310896"/>
+          <p:cNvPr id="13" name="Text 11"/>
+          <p:cNvSpPr/>
+          <p:nvPr/>
+        </p:nvSpPr>
+        <p:spPr>
+          <a:xfrm>
+            <a:off x="749808" y="4773168"/>
+            <a:ext cx="10680192" cy="201168"/>
           </a:xfrm>
           <a:prstGeom prst="rect">
             <a:avLst/>
@@ -9790,30 +9845,30 @@
               <a:buNone/>
             </a:pPr>
             <a:r>
-              <a:rPr lang="en-US" sz="1550" dirty="0">
-                <a:solidFill>
-                  <a:srgbClr val="202124"/>
-                </a:solidFill>
-                <a:latin typeface="Arial" pitchFamily="34" charset="0"/>
-                <a:ea typeface="Arial" pitchFamily="34" charset="-122"/>
-                <a:cs typeface="Arial" pitchFamily="34" charset="-120"/>
-              </a:rPr>
-              <a:t>Use case</a:t>
-            </a:r>
-            <a:endParaRPr lang="en-US" sz="1550" dirty="0"/>
-          </a:p>
-        </p:txBody>
-      </p:sp>
-      <p:sp>
-        <p:nvSpPr>
-          <p:cNvPr id="11" name="Text 9"/>
-          <p:cNvSpPr/>
-          <p:nvPr/>
-        </p:nvSpPr>
-        <p:spPr>
-          <a:xfrm>
-            <a:off x="749808" y="3858768"/>
-            <a:ext cx="10680192" cy="256032"/>
+              <a:rPr lang="en-US" sz="860" dirty="0">
+                <a:solidFill>
+                  <a:srgbClr val="3C4043"/>
+                </a:solidFill>
+                <a:latin typeface="Arial" pitchFamily="34" charset="0"/>
+                <a:ea typeface="Arial" pitchFamily="34" charset="-122"/>
+                <a:cs typeface="Arial" pitchFamily="34" charset="-120"/>
+              </a:rPr>
+              <a:t>For this use case, the architecture provides the following benefits:</a:t>
+            </a:r>
+            <a:endParaRPr lang="en-US" sz="860" dirty="0"/>
+          </a:p>
+        </p:txBody>
+      </p:sp>
+      <p:sp>
+        <p:nvSpPr>
+          <p:cNvPr id="14" name="Text 12"/>
+          <p:cNvSpPr/>
+          <p:nvPr/>
+        </p:nvSpPr>
+        <p:spPr>
+          <a:xfrm>
+            <a:off x="877824" y="5010912"/>
+            <a:ext cx="10552176" cy="1481328"/>
           </a:xfrm>
           <a:prstGeom prst="rect">
             <a:avLst/>
@@ -9822,137 +9877,19 @@
           <a:ln/>
         </p:spPr>
         <p:txBody>
-          <a:bodyPr wrap="square" rtlCol="0" anchor="ctr"/>
-          <a:lstStyle/>
-          <a:p>
-            <a:pPr indent="0" marL="0">
-              <a:buNone/>
-            </a:pPr>
-            <a:r>
-              <a:rPr lang="en-US" sz="1150" b="1" dirty="0">
-                <a:solidFill>
-                  <a:srgbClr val="202124"/>
-                </a:solidFill>
-                <a:latin typeface="Arial" pitchFamily="34" charset="0"/>
-                <a:ea typeface="Arial" pitchFamily="34" charset="-122"/>
-                <a:cs typeface="Arial" pitchFamily="34" charset="-120"/>
-              </a:rPr>
-              <a:t>A2A Agent Card Discovery, OBO Scope Narrowing &amp; Circuit Breaking</a:t>
-            </a:r>
-            <a:endParaRPr lang="en-US" sz="1150" dirty="0"/>
-          </a:p>
-        </p:txBody>
-      </p:sp>
-      <p:sp>
-        <p:nvSpPr>
-          <p:cNvPr id="12" name="Text 10"/>
-          <p:cNvSpPr/>
-          <p:nvPr/>
-        </p:nvSpPr>
-        <p:spPr>
-          <a:xfrm>
-            <a:off x="749808" y="4151376"/>
-            <a:ext cx="10680192" cy="658368"/>
-          </a:xfrm>
-          <a:prstGeom prst="rect">
-            <a:avLst/>
-          </a:prstGeom>
-          <a:noFill/>
-          <a:ln/>
-        </p:spPr>
-        <p:txBody>
-          <a:bodyPr wrap="square" rtlCol="0" anchor="t"/>
-          <a:lstStyle/>
-          <a:p>
-            <a:pPr indent="0" marL="0">
-              <a:lnSpc>
-                <a:spcPct val="118000"/>
-              </a:lnSpc>
-              <a:buNone/>
-            </a:pPr>
-            <a:r>
-              <a:rPr lang="en-US" sz="880" dirty="0">
-                <a:solidFill>
-                  <a:srgbClr val="3C4043"/>
-                </a:solidFill>
-                <a:latin typeface="Arial" pitchFamily="34" charset="0"/>
-                <a:ea typeface="Arial" pitchFamily="34" charset="-122"/>
-                <a:cs typeface="Arial" pitchFamily="34" charset="-120"/>
-              </a:rPr>
-              <a:t>When the Root Orchestrator delegates a supply-chain disruption query across Order, Distributor, and Logistics Tracking agents, each A2A hop narrows the OBO token scope to the target agent’s declared capabilities.</a:t>
-            </a:r>
-            <a:endParaRPr lang="en-US" sz="880" dirty="0"/>
-          </a:p>
-        </p:txBody>
-      </p:sp>
-      <p:sp>
-        <p:nvSpPr>
-          <p:cNvPr id="13" name="Text 11"/>
-          <p:cNvSpPr/>
-          <p:nvPr/>
-        </p:nvSpPr>
-        <p:spPr>
-          <a:xfrm>
-            <a:off x="749808" y="4846320"/>
-            <a:ext cx="10680192" cy="201168"/>
-          </a:xfrm>
-          <a:prstGeom prst="rect">
-            <a:avLst/>
-          </a:prstGeom>
-          <a:noFill/>
-          <a:ln/>
-        </p:spPr>
-        <p:txBody>
-          <a:bodyPr wrap="square" rtlCol="0" anchor="ctr"/>
-          <a:lstStyle/>
-          <a:p>
-            <a:pPr indent="0" marL="0">
-              <a:buNone/>
-            </a:pPr>
-            <a:r>
-              <a:rPr lang="en-US" sz="880" dirty="0">
-                <a:solidFill>
-                  <a:srgbClr val="3C4043"/>
-                </a:solidFill>
-                <a:latin typeface="Arial" pitchFamily="34" charset="0"/>
-                <a:ea typeface="Arial" pitchFamily="34" charset="-122"/>
-                <a:cs typeface="Arial" pitchFamily="34" charset="-120"/>
-              </a:rPr>
-              <a:t>For this use case, the architecture provides the following benefits:</a:t>
-            </a:r>
-            <a:endParaRPr lang="en-US" sz="880" dirty="0"/>
-          </a:p>
-        </p:txBody>
-      </p:sp>
-      <p:sp>
-        <p:nvSpPr>
-          <p:cNvPr id="14" name="Text 12"/>
-          <p:cNvSpPr/>
-          <p:nvPr/>
-        </p:nvSpPr>
-        <p:spPr>
-          <a:xfrm>
-            <a:off x="877824" y="5084064"/>
-            <a:ext cx="10552176" cy="1426464"/>
-          </a:xfrm>
-          <a:prstGeom prst="rect">
-            <a:avLst/>
-          </a:prstGeom>
-          <a:noFill/>
-          <a:ln/>
-        </p:spPr>
-        <p:txBody>
-          <a:bodyPr wrap="square" rtlCol="0" anchor="t"/>
-          <a:lstStyle/>
-          <a:p>
-            <a:pPr indent="0" marL="0">
-              <a:lnSpc>
-                <a:spcPct val="120000"/>
-              </a:lnSpc>
-              <a:buNone/>
-            </a:pPr>
-            <a:r>
-              <a:rPr lang="en-US" sz="820" b="1" dirty="0">
+          <a:bodyPr wrap="square" rtlCol="0" anchor="t">
+            <a:normAutofit/>
+          </a:bodyPr>
+          <a:lstStyle/>
+          <a:p>
+            <a:pPr indent="0" marL="0">
+              <a:lnSpc>
+                <a:spcPct val="116000"/>
+              </a:lnSpc>
+              <a:buNone/>
+            </a:pPr>
+            <a:r>
+              <a:rPr lang="en-US" sz="800" b="1" dirty="0">
                 <a:solidFill>
                   <a:srgbClr val="202124"/>
                 </a:solidFill>
@@ -9964,12 +9901,12 @@
             </a:r>
             <a:pPr indent="0" marL="0">
               <a:lnSpc>
-                <a:spcPct val="120000"/>
-              </a:lnSpc>
-              <a:buNone/>
-            </a:pPr>
-            <a:r>
-              <a:rPr lang="en-US" sz="800" dirty="0">
+                <a:spcPct val="116000"/>
+              </a:lnSpc>
+              <a:buNone/>
+            </a:pPr>
+            <a:r>
+              <a:rPr lang="en-US" sz="780" dirty="0">
                 <a:solidFill>
                   <a:srgbClr val="3C4043"/>
                 </a:solidFill>
@@ -9982,12 +9919,12 @@
             </a:r>
             <a:pPr indent="0" marL="0">
               <a:lnSpc>
-                <a:spcPct val="120000"/>
-              </a:lnSpc>
-              <a:buNone/>
-            </a:pPr>
-            <a:r>
-              <a:rPr lang="en-US" sz="820" b="1" dirty="0">
+                <a:spcPct val="116000"/>
+              </a:lnSpc>
+              <a:buNone/>
+            </a:pPr>
+            <a:r>
+              <a:rPr lang="en-US" sz="800" b="1" dirty="0">
                 <a:solidFill>
                   <a:srgbClr val="202124"/>
                 </a:solidFill>
@@ -9999,12 +9936,12 @@
             </a:r>
             <a:pPr indent="0" marL="0">
               <a:lnSpc>
-                <a:spcPct val="120000"/>
-              </a:lnSpc>
-              <a:buNone/>
-            </a:pPr>
-            <a:r>
-              <a:rPr lang="en-US" sz="800" dirty="0">
+                <a:spcPct val="116000"/>
+              </a:lnSpc>
+              <a:buNone/>
+            </a:pPr>
+            <a:r>
+              <a:rPr lang="en-US" sz="780" dirty="0">
                 <a:solidFill>
                   <a:srgbClr val="3C4043"/>
                 </a:solidFill>
@@ -10017,12 +9954,12 @@
             </a:r>
             <a:pPr indent="0" marL="0">
               <a:lnSpc>
-                <a:spcPct val="120000"/>
-              </a:lnSpc>
-              <a:buNone/>
-            </a:pPr>
-            <a:r>
-              <a:rPr lang="en-US" sz="820" b="1" dirty="0">
+                <a:spcPct val="116000"/>
+              </a:lnSpc>
+              <a:buNone/>
+            </a:pPr>
+            <a:r>
+              <a:rPr lang="en-US" sz="800" b="1" dirty="0">
                 <a:solidFill>
                   <a:srgbClr val="202124"/>
                 </a:solidFill>
@@ -10034,12 +9971,12 @@
             </a:r>
             <a:pPr indent="0" marL="0">
               <a:lnSpc>
-                <a:spcPct val="120000"/>
-              </a:lnSpc>
-              <a:buNone/>
-            </a:pPr>
-            <a:r>
-              <a:rPr lang="en-US" sz="800" dirty="0">
+                <a:spcPct val="116000"/>
+              </a:lnSpc>
+              <a:buNone/>
+            </a:pPr>
+            <a:r>
+              <a:rPr lang="en-US" sz="780" dirty="0">
                 <a:solidFill>
                   <a:srgbClr val="3C4043"/>
                 </a:solidFill>
@@ -10049,7 +9986,7 @@
               </a:rPr>
               <a:t>The Root Orchestrator enforces a 4,000-token budget and 8-second deadline per A2A sub-agent call, gracefully degrading to cached BigQuery inventory snapshots if an external logistics partner API times out.</a:t>
             </a:r>
-            <a:endParaRPr lang="en-US" sz="820" dirty="0"/>
+            <a:endParaRPr lang="en-US" sz="800" dirty="0"/>
           </a:p>
         </p:txBody>
       </p:sp>
@@ -10270,7 +10207,9 @@
           <a:ln/>
         </p:spPr>
         <p:txBody>
-          <a:bodyPr wrap="square" rtlCol="0" anchor="t"/>
+          <a:bodyPr wrap="square" rtlCol="0" anchor="t">
+            <a:normAutofit/>
+          </a:bodyPr>
           <a:lstStyle/>
           <a:p>
             <a:pPr indent="0" marL="0">
@@ -10280,7 +10219,7 @@
               <a:buNone/>
             </a:pPr>
             <a:r>
-              <a:rPr lang="en-US" sz="820" b="1" dirty="0">
+              <a:rPr lang="en-US" sz="810" b="1" dirty="0">
                 <a:solidFill>
                   <a:srgbClr val="202124"/>
                 </a:solidFill>
@@ -10340,7 +10279,7 @@
                 <a:ea typeface="Arial" pitchFamily="34" charset="-122"/>
                 <a:cs typeface="Arial" pitchFamily="34" charset="-120"/>
               </a:rPr>
-              <a:t>For internet-facing workloads, retain the global External Application Load Balancer with Hop 1: Edge PEP and Hop 4: Model Armor.
+              <a:t>For internet-facing workloads, retain the global External Application Load Balancer with Hop 1: Cloud Armor and Hop 4: Model Armor.
 </a:t>
             </a:r>
             <a:pPr indent="0" marL="0">
@@ -10349,14 +10288,8 @@
               </a:lnSpc>
               <a:buNone/>
             </a:pPr>
-            <a:pPr indent="0" marL="0">
-              <a:lnSpc>
-                <a:spcPct val="112000"/>
-              </a:lnSpc>
-              <a:buNone/>
-            </a:pPr>
-            <a:r>
-              <a:rPr lang="en-US" sz="820" b="1" dirty="0">
+            <a:r>
+              <a:rPr lang="en-US" sz="810" b="1" dirty="0">
                 <a:solidFill>
                   <a:srgbClr val="202124"/>
                 </a:solidFill>
@@ -10419,7 +10352,7 @@
               <a:t>Spoke-local 2LO &amp; 3LO Auth Mgr: Maximizes blast-radius containment by keeping credentials, service accounts, and data access strictly inside.; Shared enterprise tool gateway: Consolidates stateless, non-tenant-specific MCP tools into a central hub project via Private Service Connect.
 </a:t>
             </a:r>
-            <a:endParaRPr lang="en-US" sz="820" dirty="0"/>
+            <a:endParaRPr lang="en-US" sz="810" dirty="0"/>
           </a:p>
         </p:txBody>
       </p:sp>
@@ -10823,48 +10756,50 @@
           <a:ln/>
         </p:spPr>
         <p:txBody>
-          <a:bodyPr wrap="square" rtlCol="0" anchor="ctr"/>
-          <a:lstStyle/>
-          <a:p>
-            <a:pPr indent="0" marL="0">
-              <a:buNone/>
-            </a:pPr>
-            <a:r>
-              <a:rPr lang="en-US" sz="720" b="1" dirty="0">
-                <a:solidFill>
-                  <a:srgbClr val="202124"/>
-                </a:solidFill>
-                <a:latin typeface="Arial" pitchFamily="34" charset="0"/>
-                <a:ea typeface="Arial" pitchFamily="34" charset="-122"/>
-                <a:cs typeface="Arial" pitchFamily="34" charset="-120"/>
-              </a:rPr>
-              <a:t>• The Multi-Tenant Agentic Triad: Security • FinOps COGS • Zero-PII Observability &amp; Unified Vertex AI Agent Engine &amp; Google ADK Reference Architecture</a:t>
-            </a:r>
-            <a:endParaRPr lang="en-US" sz="720" dirty="0"/>
-          </a:p>
-          <a:p>
-            <a:pPr indent="0" marL="0">
-              <a:buNone/>
-            </a:pPr>
-            <a:r>
-              <a:rPr lang="en-US" sz="720" b="1" dirty="0">
-                <a:solidFill>
-                  <a:srgbClr val="202124"/>
-                </a:solidFill>
-                <a:latin typeface="Arial" pitchFamily="34" charset="0"/>
-                <a:ea typeface="Arial" pitchFamily="34" charset="-122"/>
-                <a:cs typeface="Arial" pitchFamily="34" charset="-120"/>
-              </a:rPr>
-              <a:t>• Hop 1: Edge PEP, Hop 4: Model Armor &amp; Valkey Rate Bulkhead</a:t>
-            </a:r>
-            <a:endParaRPr lang="en-US" sz="720" dirty="0"/>
-          </a:p>
-          <a:p>
-            <a:pPr indent="0" marL="0">
-              <a:buNone/>
-            </a:pPr>
-            <a:r>
-              <a:rPr lang="en-US" sz="720" b="1" dirty="0">
+          <a:bodyPr wrap="square" rtlCol="0" anchor="ctr">
+            <a:normAutofit/>
+          </a:bodyPr>
+          <a:lstStyle/>
+          <a:p>
+            <a:pPr indent="0" marL="0">
+              <a:buNone/>
+            </a:pPr>
+            <a:r>
+              <a:rPr lang="en-US" sz="710" b="1" dirty="0">
+                <a:solidFill>
+                  <a:srgbClr val="202124"/>
+                </a:solidFill>
+                <a:latin typeface="Arial" pitchFamily="34" charset="0"/>
+                <a:ea typeface="Arial" pitchFamily="34" charset="-122"/>
+                <a:cs typeface="Arial" pitchFamily="34" charset="-120"/>
+              </a:rPr>
+              <a:t>• VPC Service Controls &amp; Access Boundaries</a:t>
+            </a:r>
+            <a:endParaRPr lang="en-US" sz="710" dirty="0"/>
+          </a:p>
+          <a:p>
+            <a:pPr indent="0" marL="0">
+              <a:buNone/>
+            </a:pPr>
+            <a:r>
+              <a:rPr lang="en-US" sz="710" b="1" dirty="0">
+                <a:solidFill>
+                  <a:srgbClr val="202124"/>
+                </a:solidFill>
+                <a:latin typeface="Arial" pitchFamily="34" charset="0"/>
+                <a:ea typeface="Arial" pitchFamily="34" charset="-122"/>
+                <a:cs typeface="Arial" pitchFamily="34" charset="-120"/>
+              </a:rPr>
+              <a:t>• Hop 1: Cloud Armor &amp; Hop 4: Model Armor &amp; Valkey Rate Bulkhead</a:t>
+            </a:r>
+            <a:endParaRPr lang="en-US" sz="710" dirty="0"/>
+          </a:p>
+          <a:p>
+            <a:pPr indent="0" marL="0">
+              <a:buNone/>
+            </a:pPr>
+            <a:r>
+              <a:rPr lang="en-US" sz="710" b="1" dirty="0">
                 <a:solidFill>
                   <a:srgbClr val="202124"/>
                 </a:solidFill>
@@ -10874,7 +10809,7 @@
               </a:rPr>
               <a:t>• AlloyDB RLS &amp; L1–L5 &amp; 3 Chargeback Models</a:t>
             </a:r>
-            <a:endParaRPr lang="en-US" sz="720" dirty="0"/>
+            <a:endParaRPr lang="en-US" sz="710" dirty="0"/>
           </a:p>
         </p:txBody>
       </p:sp>
@@ -10921,28 +10856,30 @@
           <a:ln/>
         </p:spPr>
         <p:txBody>
-          <a:bodyPr wrap="square" rtlCol="0" anchor="ctr"/>
-          <a:lstStyle/>
-          <a:p>
-            <a:pPr indent="0" marL="0">
-              <a:buNone/>
-            </a:pPr>
-            <a:r>
-              <a:rPr lang="en-US" sz="710" b="1" dirty="0">
-                <a:solidFill>
-                  <a:srgbClr val="202124"/>
-                </a:solidFill>
-                <a:latin typeface="Arial" pitchFamily="34" charset="0"/>
-                <a:ea typeface="Arial" pitchFamily="34" charset="-122"/>
-                <a:cs typeface="Arial" pitchFamily="34" charset="-120"/>
-              </a:rPr>
-              <a:t>• The Multi-Tenant Agentic Triad: Security • FinOps COGS • Zero-PII Observability &amp; Unified Vertex AI Agent Engine &amp; Google ADK Reference Architecture: </a:t>
-            </a:r>
-            <a:pPr indent="0" marL="0">
-              <a:buNone/>
-            </a:pPr>
-            <a:r>
-              <a:rPr lang="en-US" sz="700" dirty="0">
+          <a:bodyPr wrap="square" rtlCol="0" anchor="ctr">
+            <a:normAutofit/>
+          </a:bodyPr>
+          <a:lstStyle/>
+          <a:p>
+            <a:pPr indent="0" marL="0">
+              <a:buNone/>
+            </a:pPr>
+            <a:r>
+              <a:rPr lang="en-US" sz="700" b="1" dirty="0">
+                <a:solidFill>
+                  <a:srgbClr val="202124"/>
+                </a:solidFill>
+                <a:latin typeface="Arial" pitchFamily="34" charset="0"/>
+                <a:ea typeface="Arial" pitchFamily="34" charset="-122"/>
+                <a:cs typeface="Arial" pitchFamily="34" charset="-120"/>
+              </a:rPr>
+              <a:t>• VPC Service Controls &amp; Access Boundaries: </a:t>
+            </a:r>
+            <a:pPr indent="0" marL="0">
+              <a:buNone/>
+            </a:pPr>
+            <a:r>
+              <a:rPr lang="en-US" sz="690" dirty="0">
                 <a:solidFill>
                   <a:srgbClr val="3C4043"/>
                 </a:solidFill>
@@ -10950,28 +10887,28 @@
                 <a:ea typeface="Arial" pitchFamily="34" charset="-122"/>
                 <a:cs typeface="Arial" pitchFamily="34" charset="-120"/>
               </a:rPr>
-              <a:t>Enforce The Multi-Tenant Agentic Triad: Security • FinOps COGS • Zero-PII Observability perimeters around hub and spoke projects to block unauthorized data exfiltration, and bind.
+              <a:t>Enforce VPC Service Controls perimeters around hub and spoke projects to block unauthorized data exfiltration, and bind Principal Access Boundary (PAB) policies to spoke principals.
 </a:t>
             </a:r>
             <a:pPr indent="0" marL="0">
               <a:buNone/>
             </a:pPr>
             <a:r>
-              <a:rPr lang="en-US" sz="710" b="1" dirty="0">
-                <a:solidFill>
-                  <a:srgbClr val="202124"/>
-                </a:solidFill>
-                <a:latin typeface="Arial" pitchFamily="34" charset="0"/>
-                <a:ea typeface="Arial" pitchFamily="34" charset="-122"/>
-                <a:cs typeface="Arial" pitchFamily="34" charset="-120"/>
-              </a:rPr>
-              <a:t>• Hop 1: Edge PEP, Hop 4: Model Armor &amp; Valkey Rate Bulkhead: </a:t>
-            </a:r>
-            <a:pPr indent="0" marL="0">
-              <a:buNone/>
-            </a:pPr>
-            <a:r>
-              <a:rPr lang="en-US" sz="700" dirty="0">
+              <a:rPr lang="en-US" sz="700" b="1" dirty="0">
+                <a:solidFill>
+                  <a:srgbClr val="202124"/>
+                </a:solidFill>
+                <a:latin typeface="Arial" pitchFamily="34" charset="0"/>
+                <a:ea typeface="Arial" pitchFamily="34" charset="-122"/>
+                <a:cs typeface="Arial" pitchFamily="34" charset="-120"/>
+              </a:rPr>
+              <a:t>• Hop 1: Cloud Armor &amp; Hop 4: Model Armor &amp; Valkey Rate Bulkhead: </a:t>
+            </a:r>
+            <a:pPr indent="0" marL="0">
+              <a:buNone/>
+            </a:pPr>
+            <a:r>
+              <a:rPr lang="en-US" sz="690" dirty="0">
                 <a:solidFill>
                   <a:srgbClr val="3C4043"/>
                 </a:solidFill>
@@ -10979,14 +10916,14 @@
                 <a:ea typeface="Arial" pitchFamily="34" charset="-122"/>
                 <a:cs typeface="Arial" pitchFamily="34" charset="-120"/>
               </a:rPr>
-              <a:t>Strip client-supplied privilege headers at the edge, verify caller identity claims, and screen both incoming prompts and outgoing completions with Valkey Rate Bulkhead.
+              <a:t>Strip client-supplied privilege headers at the edge, verify caller identity claims, and screen prompts and completions with Valkey Rate Bulkhead.
 </a:t>
             </a:r>
             <a:pPr indent="0" marL="0">
               <a:buNone/>
             </a:pPr>
             <a:r>
-              <a:rPr lang="en-US" sz="710" b="1" dirty="0">
+              <a:rPr lang="en-US" sz="700" b="1" dirty="0">
                 <a:solidFill>
                   <a:srgbClr val="202124"/>
                 </a:solidFill>
@@ -11000,7 +10937,7 @@
               <a:buNone/>
             </a:pPr>
             <a:r>
-              <a:rPr lang="en-US" sz="700" dirty="0">
+              <a:rPr lang="en-US" sz="690" dirty="0">
                 <a:solidFill>
                   <a:srgbClr val="3C4043"/>
                 </a:solidFill>
@@ -11010,7 +10947,7 @@
               </a:rPr>
               <a:t>Encrypt state at rest with Customer-Managed Encryption Keys and enforce least-privilege access scopes on AlloyDB RLS &amp; L1–L5.</a:t>
             </a:r>
-            <a:endParaRPr lang="en-US" sz="710" dirty="0"/>
+            <a:endParaRPr lang="en-US" sz="700" dirty="0"/>
           </a:p>
         </p:txBody>
       </p:sp>
@@ -11121,14 +11058,16 @@
           <a:ln/>
         </p:spPr>
         <p:txBody>
-          <a:bodyPr wrap="square" rtlCol="0" anchor="ctr"/>
-          <a:lstStyle/>
-          <a:p>
-            <a:pPr indent="0" marL="0">
-              <a:buNone/>
-            </a:pPr>
-            <a:r>
-              <a:rPr lang="en-US" sz="720" b="1" dirty="0">
+          <a:bodyPr wrap="square" rtlCol="0" anchor="ctr">
+            <a:normAutofit/>
+          </a:bodyPr>
+          <a:lstStyle/>
+          <a:p>
+            <a:pPr indent="0" marL="0">
+              <a:buNone/>
+            </a:pPr>
+            <a:r>
+              <a:rPr lang="en-US" sz="710" b="1" dirty="0">
                 <a:solidFill>
                   <a:srgbClr val="202124"/>
                 </a:solidFill>
@@ -11138,14 +11077,14 @@
               </a:rPr>
               <a:t>• External Application Load Balancer &amp; Architecture Selector</a:t>
             </a:r>
-            <a:endParaRPr lang="en-US" sz="720" dirty="0"/>
-          </a:p>
-          <a:p>
-            <a:pPr indent="0" marL="0">
-              <a:buNone/>
-            </a:pPr>
-            <a:r>
-              <a:rPr lang="en-US" sz="720" b="1" dirty="0">
+            <a:endParaRPr lang="en-US" sz="710" dirty="0"/>
+          </a:p>
+          <a:p>
+            <a:pPr indent="0" marL="0">
+              <a:buNone/>
+            </a:pPr>
+            <a:r>
+              <a:rPr lang="en-US" sz="710" b="1" dirty="0">
                 <a:solidFill>
                   <a:srgbClr val="202124"/>
                 </a:solidFill>
@@ -11155,14 +11094,14 @@
               </a:rPr>
               <a:t>• Thinking Budget Cap &amp; 2LO &amp; 3LO Auth Mgr</a:t>
             </a:r>
-            <a:endParaRPr lang="en-US" sz="720" dirty="0"/>
-          </a:p>
-          <a:p>
-            <a:pPr indent="0" marL="0">
-              <a:buNone/>
-            </a:pPr>
-            <a:r>
-              <a:rPr lang="en-US" sz="720" b="1" dirty="0">
+            <a:endParaRPr lang="en-US" sz="710" dirty="0"/>
+          </a:p>
+          <a:p>
+            <a:pPr indent="0" marL="0">
+              <a:buNone/>
+            </a:pPr>
+            <a:r>
+              <a:rPr lang="en-US" sz="710" b="1" dirty="0">
                 <a:solidFill>
                   <a:srgbClr val="202124"/>
                 </a:solidFill>
@@ -11172,7 +11111,7 @@
               </a:rPr>
               <a:t>• AlloyDB RLS &amp; L1–L5</a:t>
             </a:r>
-            <a:endParaRPr lang="en-US" sz="720" dirty="0"/>
+            <a:endParaRPr lang="en-US" sz="710" dirty="0"/>
           </a:p>
         </p:txBody>
       </p:sp>
@@ -11219,14 +11158,16 @@
           <a:ln/>
         </p:spPr>
         <p:txBody>
-          <a:bodyPr wrap="square" rtlCol="0" anchor="ctr"/>
-          <a:lstStyle/>
-          <a:p>
-            <a:pPr indent="0" marL="0">
-              <a:buNone/>
-            </a:pPr>
-            <a:r>
-              <a:rPr lang="en-US" sz="710" b="1" dirty="0">
+          <a:bodyPr wrap="square" rtlCol="0" anchor="ctr">
+            <a:normAutofit/>
+          </a:bodyPr>
+          <a:lstStyle/>
+          <a:p>
+            <a:pPr indent="0" marL="0">
+              <a:buNone/>
+            </a:pPr>
+            <a:r>
+              <a:rPr lang="en-US" sz="700" b="1" dirty="0">
                 <a:solidFill>
                   <a:srgbClr val="202124"/>
                 </a:solidFill>
@@ -11240,7 +11181,7 @@
               <a:buNone/>
             </a:pPr>
             <a:r>
-              <a:rPr lang="en-US" sz="700" dirty="0">
+              <a:rPr lang="en-US" sz="690" dirty="0">
                 <a:solidFill>
                   <a:srgbClr val="3C4043"/>
                 </a:solidFill>
@@ -11255,7 +11196,7 @@
               <a:buNone/>
             </a:pPr>
             <a:r>
-              <a:rPr lang="en-US" sz="710" b="1" dirty="0">
+              <a:rPr lang="en-US" sz="700" b="1" dirty="0">
                 <a:solidFill>
                   <a:srgbClr val="202124"/>
                 </a:solidFill>
@@ -11269,7 +11210,7 @@
               <a:buNone/>
             </a:pPr>
             <a:r>
-              <a:rPr lang="en-US" sz="700" dirty="0">
+              <a:rPr lang="en-US" sz="690" dirty="0">
                 <a:solidFill>
                   <a:srgbClr val="3C4043"/>
                 </a:solidFill>
@@ -11284,7 +11225,7 @@
               <a:buNone/>
             </a:pPr>
             <a:r>
-              <a:rPr lang="en-US" sz="710" b="1" dirty="0">
+              <a:rPr lang="en-US" sz="700" b="1" dirty="0">
                 <a:solidFill>
                   <a:srgbClr val="202124"/>
                 </a:solidFill>
@@ -11298,7 +11239,7 @@
               <a:buNone/>
             </a:pPr>
             <a:r>
-              <a:rPr lang="en-US" sz="700" dirty="0">
+              <a:rPr lang="en-US" sz="690" dirty="0">
                 <a:solidFill>
                   <a:srgbClr val="3C4043"/>
                 </a:solidFill>
@@ -11308,7 +11249,7 @@
               </a:rPr>
               <a:t>Enable regional high availability and Point-in-Time Recovery on AlloyDB RLS &amp; L1–L5 with automated backup verification.</a:t>
             </a:r>
-            <a:endParaRPr lang="en-US" sz="710" dirty="0"/>
+            <a:endParaRPr lang="en-US" sz="700" dirty="0"/>
           </a:p>
         </p:txBody>
       </p:sp>
@@ -11419,14 +11360,16 @@
           <a:ln/>
         </p:spPr>
         <p:txBody>
-          <a:bodyPr wrap="square" rtlCol="0" anchor="ctr"/>
-          <a:lstStyle/>
-          <a:p>
-            <a:pPr indent="0" marL="0">
-              <a:buNone/>
-            </a:pPr>
-            <a:r>
-              <a:rPr lang="en-US" sz="720" b="1" dirty="0">
+          <a:bodyPr wrap="square" rtlCol="0" anchor="ctr">
+            <a:normAutofit/>
+          </a:bodyPr>
+          <a:lstStyle/>
+          <a:p>
+            <a:pPr indent="0" marL="0">
+              <a:buNone/>
+            </a:pPr>
+            <a:r>
+              <a:rPr lang="en-US" sz="710" b="1" dirty="0">
                 <a:solidFill>
                   <a:srgbClr val="202124"/>
                 </a:solidFill>
@@ -11436,14 +11379,14 @@
               </a:rPr>
               <a:t>• Infrastructure as Code</a:t>
             </a:r>
-            <a:endParaRPr lang="en-US" sz="720" dirty="0"/>
-          </a:p>
-          <a:p>
-            <a:pPr indent="0" marL="0">
-              <a:buNone/>
-            </a:pPr>
-            <a:r>
-              <a:rPr lang="en-US" sz="720" b="1" dirty="0">
+            <a:endParaRPr lang="en-US" sz="710" dirty="0"/>
+          </a:p>
+          <a:p>
+            <a:pPr indent="0" marL="0">
+              <a:buNone/>
+            </a:pPr>
+            <a:r>
+              <a:rPr lang="en-US" sz="710" b="1" dirty="0">
                 <a:solidFill>
                   <a:srgbClr val="202124"/>
                 </a:solidFill>
@@ -11453,14 +11396,14 @@
               </a:rPr>
               <a:t>• Security Command Center &amp; BigQuery OTel Sink</a:t>
             </a:r>
-            <a:endParaRPr lang="en-US" sz="720" dirty="0"/>
-          </a:p>
-          <a:p>
-            <a:pPr indent="0" marL="0">
-              <a:buNone/>
-            </a:pPr>
-            <a:r>
-              <a:rPr lang="en-US" sz="720" b="1" dirty="0">
+            <a:endParaRPr lang="en-US" sz="710" dirty="0"/>
+          </a:p>
+          <a:p>
+            <a:pPr indent="0" marL="0">
+              <a:buNone/>
+            </a:pPr>
+            <a:r>
+              <a:rPr lang="en-US" sz="710" b="1" dirty="0">
                 <a:solidFill>
                   <a:srgbClr val="202124"/>
                 </a:solidFill>
@@ -11470,7 +11413,7 @@
               </a:rPr>
               <a:t>• Automated CI/CD &amp; Red-Team Gates</a:t>
             </a:r>
-            <a:endParaRPr lang="en-US" sz="720" dirty="0"/>
+            <a:endParaRPr lang="en-US" sz="710" dirty="0"/>
           </a:p>
         </p:txBody>
       </p:sp>
@@ -11517,14 +11460,16 @@
           <a:ln/>
         </p:spPr>
         <p:txBody>
-          <a:bodyPr wrap="square" rtlCol="0" anchor="ctr"/>
-          <a:lstStyle/>
-          <a:p>
-            <a:pPr indent="0" marL="0">
-              <a:buNone/>
-            </a:pPr>
-            <a:r>
-              <a:rPr lang="en-US" sz="710" b="1" dirty="0">
+          <a:bodyPr wrap="square" rtlCol="0" anchor="ctr">
+            <a:normAutofit/>
+          </a:bodyPr>
+          <a:lstStyle/>
+          <a:p>
+            <a:pPr indent="0" marL="0">
+              <a:buNone/>
+            </a:pPr>
+            <a:r>
+              <a:rPr lang="en-US" sz="700" b="1" dirty="0">
                 <a:solidFill>
                   <a:srgbClr val="202124"/>
                 </a:solidFill>
@@ -11538,7 +11483,7 @@
               <a:buNone/>
             </a:pPr>
             <a:r>
-              <a:rPr lang="en-US" sz="700" dirty="0">
+              <a:rPr lang="en-US" sz="690" dirty="0">
                 <a:solidFill>
                   <a:srgbClr val="3C4043"/>
                 </a:solidFill>
@@ -11553,7 +11498,7 @@
               <a:buNone/>
             </a:pPr>
             <a:r>
-              <a:rPr lang="en-US" sz="710" b="1" dirty="0">
+              <a:rPr lang="en-US" sz="700" b="1" dirty="0">
                 <a:solidFill>
                   <a:srgbClr val="202124"/>
                 </a:solidFill>
@@ -11567,7 +11512,7 @@
               <a:buNone/>
             </a:pPr>
             <a:r>
-              <a:rPr lang="en-US" sz="700" dirty="0">
+              <a:rPr lang="en-US" sz="690" dirty="0">
                 <a:solidFill>
                   <a:srgbClr val="3C4043"/>
                 </a:solidFill>
@@ -11582,7 +11527,7 @@
               <a:buNone/>
             </a:pPr>
             <a:r>
-              <a:rPr lang="en-US" sz="710" b="1" dirty="0">
+              <a:rPr lang="en-US" sz="700" b="1" dirty="0">
                 <a:solidFill>
                   <a:srgbClr val="202124"/>
                 </a:solidFill>
@@ -11596,7 +11541,7 @@
               <a:buNone/>
             </a:pPr>
             <a:r>
-              <a:rPr lang="en-US" sz="700" dirty="0">
+              <a:rPr lang="en-US" sz="690" dirty="0">
                 <a:solidFill>
                   <a:srgbClr val="3C4043"/>
                 </a:solidFill>
@@ -11606,7 +11551,7 @@
               </a:rPr>
               <a:t>Gate every prompt, model, or tool change on automated Vertex AI Gen AI Evaluation Service benchmarks and security regression checks before production rollout.</a:t>
             </a:r>
-            <a:endParaRPr lang="en-US" sz="710" dirty="0"/>
+            <a:endParaRPr lang="en-US" sz="700" dirty="0"/>
           </a:p>
         </p:txBody>
       </p:sp>
@@ -11717,14 +11662,16 @@
           <a:ln/>
         </p:spPr>
         <p:txBody>
-          <a:bodyPr wrap="square" rtlCol="0" anchor="ctr"/>
-          <a:lstStyle/>
-          <a:p>
-            <a:pPr indent="0" marL="0">
-              <a:buNone/>
-            </a:pPr>
-            <a:r>
-              <a:rPr lang="en-US" sz="720" b="1" dirty="0">
+          <a:bodyPr wrap="square" rtlCol="0" anchor="ctr">
+            <a:normAutofit/>
+          </a:bodyPr>
+          <a:lstStyle/>
+          <a:p>
+            <a:pPr indent="0" marL="0">
+              <a:buNone/>
+            </a:pPr>
+            <a:r>
+              <a:rPr lang="en-US" sz="710" b="1" dirty="0">
                 <a:solidFill>
                   <a:srgbClr val="202124"/>
                 </a:solidFill>
@@ -11734,14 +11681,14 @@
               </a:rPr>
               <a:t>• ContextCacheConfig Context Caching</a:t>
             </a:r>
-            <a:endParaRPr lang="en-US" sz="720" dirty="0"/>
-          </a:p>
-          <a:p>
-            <a:pPr indent="0" marL="0">
-              <a:buNone/>
-            </a:pPr>
-            <a:r>
-              <a:rPr lang="en-US" sz="720" b="1" dirty="0">
+            <a:endParaRPr lang="en-US" sz="710" dirty="0"/>
+          </a:p>
+          <a:p>
+            <a:pPr indent="0" marL="0">
+              <a:buNone/>
+            </a:pPr>
+            <a:r>
+              <a:rPr lang="en-US" sz="710" b="1" dirty="0">
                 <a:solidFill>
                   <a:srgbClr val="202124"/>
                 </a:solidFill>
@@ -11751,14 +11698,14 @@
               </a:rPr>
               <a:t>• Hop 2: Catalog PDP &amp; 2LO &amp; 3LO Auth Mgr</a:t>
             </a:r>
-            <a:endParaRPr lang="en-US" sz="720" dirty="0"/>
-          </a:p>
-          <a:p>
-            <a:pPr indent="0" marL="0">
-              <a:buNone/>
-            </a:pPr>
-            <a:r>
-              <a:rPr lang="en-US" sz="720" b="1" dirty="0">
+            <a:endParaRPr lang="en-US" sz="710" dirty="0"/>
+          </a:p>
+          <a:p>
+            <a:pPr indent="0" marL="0">
+              <a:buNone/>
+            </a:pPr>
+            <a:r>
+              <a:rPr lang="en-US" sz="710" b="1" dirty="0">
                 <a:solidFill>
                   <a:srgbClr val="202124"/>
                 </a:solidFill>
@@ -11768,7 +11715,7 @@
               </a:rPr>
               <a:t>• BigQuery OTel Sink FinOps Attribution</a:t>
             </a:r>
-            <a:endParaRPr lang="en-US" sz="720" dirty="0"/>
+            <a:endParaRPr lang="en-US" sz="710" dirty="0"/>
           </a:p>
         </p:txBody>
       </p:sp>
@@ -11815,14 +11762,16 @@
           <a:ln/>
         </p:spPr>
         <p:txBody>
-          <a:bodyPr wrap="square" rtlCol="0" anchor="ctr"/>
-          <a:lstStyle/>
-          <a:p>
-            <a:pPr indent="0" marL="0">
-              <a:buNone/>
-            </a:pPr>
-            <a:r>
-              <a:rPr lang="en-US" sz="710" b="1" dirty="0">
+          <a:bodyPr wrap="square" rtlCol="0" anchor="ctr">
+            <a:normAutofit/>
+          </a:bodyPr>
+          <a:lstStyle/>
+          <a:p>
+            <a:pPr indent="0" marL="0">
+              <a:buNone/>
+            </a:pPr>
+            <a:r>
+              <a:rPr lang="en-US" sz="700" b="1" dirty="0">
                 <a:solidFill>
                   <a:srgbClr val="202124"/>
                 </a:solidFill>
@@ -11836,7 +11785,7 @@
               <a:buNone/>
             </a:pPr>
             <a:r>
-              <a:rPr lang="en-US" sz="700" dirty="0">
+              <a:rPr lang="en-US" sz="690" dirty="0">
                 <a:solidFill>
                   <a:srgbClr val="3C4043"/>
                 </a:solidFill>
@@ -11851,7 +11800,7 @@
               <a:buNone/>
             </a:pPr>
             <a:r>
-              <a:rPr lang="en-US" sz="710" b="1" dirty="0">
+              <a:rPr lang="en-US" sz="700" b="1" dirty="0">
                 <a:solidFill>
                   <a:srgbClr val="202124"/>
                 </a:solidFill>
@@ -11865,7 +11814,7 @@
               <a:buNone/>
             </a:pPr>
             <a:r>
-              <a:rPr lang="en-US" sz="700" dirty="0">
+              <a:rPr lang="en-US" sz="690" dirty="0">
                 <a:solidFill>
                   <a:srgbClr val="3C4043"/>
                 </a:solidFill>
@@ -11880,7 +11829,7 @@
               <a:buNone/>
             </a:pPr>
             <a:r>
-              <a:rPr lang="en-US" sz="710" b="1" dirty="0">
+              <a:rPr lang="en-US" sz="700" b="1" dirty="0">
                 <a:solidFill>
                   <a:srgbClr val="202124"/>
                 </a:solidFill>
@@ -11894,7 +11843,7 @@
               <a:buNone/>
             </a:pPr>
             <a:r>
-              <a:rPr lang="en-US" sz="700" dirty="0">
+              <a:rPr lang="en-US" sz="690" dirty="0">
                 <a:solidFill>
                   <a:srgbClr val="3C4043"/>
                 </a:solidFill>
@@ -11904,7 +11853,7 @@
               </a:rPr>
               <a:t>Export OpenTelemetry token usage spans and Cloud Billing records to BigQuery to enforce per-spoke quota budgets and automated spend alerts.</a:t>
             </a:r>
-            <a:endParaRPr lang="en-US" sz="710" dirty="0"/>
+            <a:endParaRPr lang="en-US" sz="700" dirty="0"/>
           </a:p>
         </p:txBody>
       </p:sp>
@@ -12282,8 +12231,8 @@
         </p:nvSpPr>
         <p:spPr>
           <a:xfrm>
-            <a:off x="877824" y="1554480"/>
-            <a:ext cx="10424160" cy="1920240"/>
+            <a:off x="877824" y="1536192"/>
+            <a:ext cx="10424160" cy="1956816"/>
           </a:xfrm>
           <a:prstGeom prst="rect">
             <a:avLst/>
@@ -12292,17 +12241,19 @@
           <a:ln/>
         </p:spPr>
         <p:txBody>
-          <a:bodyPr wrap="square" rtlCol="0" anchor="t"/>
-          <a:lstStyle/>
-          <a:p>
-            <a:pPr indent="0" marL="0">
-              <a:lnSpc>
-                <a:spcPct val="112000"/>
-              </a:lnSpc>
-              <a:buNone/>
-            </a:pPr>
-            <a:r>
-              <a:rPr lang="en-US" sz="740" dirty="0">
+          <a:bodyPr wrap="square" rtlCol="0" anchor="t">
+            <a:normAutofit/>
+          </a:bodyPr>
+          <a:lstStyle/>
+          <a:p>
+            <a:pPr indent="0" marL="0">
+              <a:lnSpc>
+                <a:spcPct val="106000"/>
+              </a:lnSpc>
+              <a:buNone/>
+            </a:pPr>
+            <a:r>
+              <a:rPr lang="en-US" sz="690" dirty="0">
                 <a:solidFill>
                   <a:srgbClr val="202124"/>
                 </a:solidFill>
@@ -12312,17 +12263,17 @@
               </a:rPr>
               <a:t>from google.adk.agents import LlmAgent</a:t>
             </a:r>
-            <a:endParaRPr lang="en-US" sz="740" dirty="0"/>
-          </a:p>
-          <a:p>
-            <a:pPr indent="0" marL="0">
-              <a:lnSpc>
-                <a:spcPct val="112000"/>
-              </a:lnSpc>
-              <a:buNone/>
-            </a:pPr>
-            <a:r>
-              <a:rPr lang="en-US" sz="740" dirty="0">
+            <a:endParaRPr lang="en-US" sz="690" dirty="0"/>
+          </a:p>
+          <a:p>
+            <a:pPr indent="0" marL="0">
+              <a:lnSpc>
+                <a:spcPct val="106000"/>
+              </a:lnSpc>
+              <a:buNone/>
+            </a:pPr>
+            <a:r>
+              <a:rPr lang="en-US" sz="690" dirty="0">
                 <a:solidFill>
                   <a:srgbClr val="202124"/>
                 </a:solidFill>
@@ -12332,17 +12283,17 @@
               </a:rPr>
               <a:t>from google.adk.tools.mcp_tool import MCPToolset, SseServerParams</a:t>
             </a:r>
-            <a:endParaRPr lang="en-US" sz="740" dirty="0"/>
-          </a:p>
-          <a:p>
-            <a:pPr indent="0" marL="0">
-              <a:lnSpc>
-                <a:spcPct val="112000"/>
-              </a:lnSpc>
-              <a:buNone/>
-            </a:pPr>
-            <a:r>
-              <a:rPr lang="en-US" sz="740" dirty="0">
+            <a:endParaRPr lang="en-US" sz="690" dirty="0"/>
+          </a:p>
+          <a:p>
+            <a:pPr indent="0" marL="0">
+              <a:lnSpc>
+                <a:spcPct val="106000"/>
+              </a:lnSpc>
+              <a:buNone/>
+            </a:pPr>
+            <a:r>
+              <a:rPr lang="en-US" sz="690" dirty="0">
                 <a:solidFill>
                   <a:srgbClr val="202124"/>
                 </a:solidFill>
@@ -12352,17 +12303,17 @@
               </a:rPr>
               <a:t># Connect Order Agent to Stateless Cloud Run MCP Server with OBO+DPoP headers</a:t>
             </a:r>
-            <a:endParaRPr lang="en-US" sz="740" dirty="0"/>
-          </a:p>
-          <a:p>
-            <a:pPr indent="0" marL="0">
-              <a:lnSpc>
-                <a:spcPct val="112000"/>
-              </a:lnSpc>
-              <a:buNone/>
-            </a:pPr>
-            <a:r>
-              <a:rPr lang="en-US" sz="740" dirty="0">
+            <a:endParaRPr lang="en-US" sz="690" dirty="0"/>
+          </a:p>
+          <a:p>
+            <a:pPr indent="0" marL="0">
+              <a:lnSpc>
+                <a:spcPct val="106000"/>
+              </a:lnSpc>
+              <a:buNone/>
+            </a:pPr>
+            <a:r>
+              <a:rPr lang="en-US" sz="690" dirty="0">
                 <a:solidFill>
                   <a:srgbClr val="202124"/>
                 </a:solidFill>
@@ -12372,17 +12323,17 @@
               </a:rPr>
               <a:t>inventory_mcp_tools = MCPToolset(</a:t>
             </a:r>
-            <a:endParaRPr lang="en-US" sz="740" dirty="0"/>
-          </a:p>
-          <a:p>
-            <a:pPr indent="0" marL="0">
-              <a:lnSpc>
-                <a:spcPct val="112000"/>
-              </a:lnSpc>
-              <a:buNone/>
-            </a:pPr>
-            <a:r>
-              <a:rPr lang="en-US" sz="740" dirty="0">
+            <a:endParaRPr lang="en-US" sz="690" dirty="0"/>
+          </a:p>
+          <a:p>
+            <a:pPr indent="0" marL="0">
+              <a:lnSpc>
+                <a:spcPct val="106000"/>
+              </a:lnSpc>
+              <a:buNone/>
+            </a:pPr>
+            <a:r>
+              <a:rPr lang="en-US" sz="690" dirty="0">
                 <a:solidFill>
                   <a:srgbClr val="202124"/>
                 </a:solidFill>
@@ -12392,17 +12343,17 @@
               </a:rPr>
               <a:t>    connection_params=SseServerParams(</a:t>
             </a:r>
-            <a:endParaRPr lang="en-US" sz="740" dirty="0"/>
-          </a:p>
-          <a:p>
-            <a:pPr indent="0" marL="0">
-              <a:lnSpc>
-                <a:spcPct val="112000"/>
-              </a:lnSpc>
-              <a:buNone/>
-            </a:pPr>
-            <a:r>
-              <a:rPr lang="en-US" sz="740" dirty="0">
+            <a:endParaRPr lang="en-US" sz="690" dirty="0"/>
+          </a:p>
+          <a:p>
+            <a:pPr indent="0" marL="0">
+              <a:lnSpc>
+                <a:spcPct val="106000"/>
+              </a:lnSpc>
+              <a:buNone/>
+            </a:pPr>
+            <a:r>
+              <a:rPr lang="en-US" sz="690" dirty="0">
                 <a:solidFill>
                   <a:srgbClr val="202124"/>
                 </a:solidFill>
@@ -12412,17 +12363,17 @@
               </a:rPr>
               <a:t>        url="https://inventory-mcp-server-uc.a.run.app/sse",</a:t>
             </a:r>
-            <a:endParaRPr lang="en-US" sz="740" dirty="0"/>
-          </a:p>
-          <a:p>
-            <a:pPr indent="0" marL="0">
-              <a:lnSpc>
-                <a:spcPct val="112000"/>
-              </a:lnSpc>
-              <a:buNone/>
-            </a:pPr>
-            <a:r>
-              <a:rPr lang="en-US" sz="740" dirty="0">
+            <a:endParaRPr lang="en-US" sz="690" dirty="0"/>
+          </a:p>
+          <a:p>
+            <a:pPr indent="0" marL="0">
+              <a:lnSpc>
+                <a:spcPct val="106000"/>
+              </a:lnSpc>
+              <a:buNone/>
+            </a:pPr>
+            <a:r>
+              <a:rPr lang="en-US" sz="690" dirty="0">
                 <a:solidFill>
                   <a:srgbClr val="202124"/>
                 </a:solidFill>
@@ -12432,17 +12383,17 @@
               </a:rPr>
               <a:t>        headers={"Authorization": f"DPoP {obo_intent_token}", "DPoP": dpop_proof_jwt},</a:t>
             </a:r>
-            <a:endParaRPr lang="en-US" sz="740" dirty="0"/>
-          </a:p>
-          <a:p>
-            <a:pPr indent="0" marL="0">
-              <a:lnSpc>
-                <a:spcPct val="112000"/>
-              </a:lnSpc>
-              <a:buNone/>
-            </a:pPr>
-            <a:r>
-              <a:rPr lang="en-US" sz="740" dirty="0">
+            <a:endParaRPr lang="en-US" sz="690" dirty="0"/>
+          </a:p>
+          <a:p>
+            <a:pPr indent="0" marL="0">
+              <a:lnSpc>
+                <a:spcPct val="106000"/>
+              </a:lnSpc>
+              <a:buNone/>
+            </a:pPr>
+            <a:r>
+              <a:rPr lang="en-US" sz="690" dirty="0">
                 <a:solidFill>
                   <a:srgbClr val="202124"/>
                 </a:solidFill>
@@ -12452,17 +12403,17 @@
               </a:rPr>
               <a:t>    )</a:t>
             </a:r>
-            <a:endParaRPr lang="en-US" sz="740" dirty="0"/>
-          </a:p>
-          <a:p>
-            <a:pPr indent="0" marL="0">
-              <a:lnSpc>
-                <a:spcPct val="112000"/>
-              </a:lnSpc>
-              <a:buNone/>
-            </a:pPr>
-            <a:r>
-              <a:rPr lang="en-US" sz="740" dirty="0">
+            <a:endParaRPr lang="en-US" sz="690" dirty="0"/>
+          </a:p>
+          <a:p>
+            <a:pPr indent="0" marL="0">
+              <a:lnSpc>
+                <a:spcPct val="106000"/>
+              </a:lnSpc>
+              <a:buNone/>
+            </a:pPr>
+            <a:r>
+              <a:rPr lang="en-US" sz="690" dirty="0">
                 <a:solidFill>
                   <a:srgbClr val="202124"/>
                 </a:solidFill>
@@ -12472,17 +12423,17 @@
               </a:rPr>
               <a:t>)</a:t>
             </a:r>
-            <a:endParaRPr lang="en-US" sz="740" dirty="0"/>
-          </a:p>
-          <a:p>
-            <a:pPr indent="0" marL="0">
-              <a:lnSpc>
-                <a:spcPct val="112000"/>
-              </a:lnSpc>
-              <a:buNone/>
-            </a:pPr>
-            <a:r>
-              <a:rPr lang="en-US" sz="740" dirty="0">
+            <a:endParaRPr lang="en-US" sz="690" dirty="0"/>
+          </a:p>
+          <a:p>
+            <a:pPr indent="0" marL="0">
+              <a:lnSpc>
+                <a:spcPct val="106000"/>
+              </a:lnSpc>
+              <a:buNone/>
+            </a:pPr>
+            <a:r>
+              <a:rPr lang="en-US" sz="690" dirty="0">
                 <a:solidFill>
                   <a:srgbClr val="202124"/>
                 </a:solidFill>
@@ -12492,17 +12443,17 @@
               </a:rPr>
               <a:t>order_agent = LlmAgent(</a:t>
             </a:r>
-            <a:endParaRPr lang="en-US" sz="740" dirty="0"/>
-          </a:p>
-          <a:p>
-            <a:pPr indent="0" marL="0">
-              <a:lnSpc>
-                <a:spcPct val="112000"/>
-              </a:lnSpc>
-              <a:buNone/>
-            </a:pPr>
-            <a:r>
-              <a:rPr lang="en-US" sz="740" dirty="0">
+            <a:endParaRPr lang="en-US" sz="690" dirty="0"/>
+          </a:p>
+          <a:p>
+            <a:pPr indent="0" marL="0">
+              <a:lnSpc>
+                <a:spcPct val="106000"/>
+              </a:lnSpc>
+              <a:buNone/>
+            </a:pPr>
+            <a:r>
+              <a:rPr lang="en-US" sz="690" dirty="0">
                 <a:solidFill>
                   <a:srgbClr val="202124"/>
                 </a:solidFill>
@@ -12512,17 +12463,17 @@
               </a:rPr>
               <a:t>    name="order_inventory_agent",</a:t>
             </a:r>
-            <a:endParaRPr lang="en-US" sz="740" dirty="0"/>
-          </a:p>
-          <a:p>
-            <a:pPr indent="0" marL="0">
-              <a:lnSpc>
-                <a:spcPct val="112000"/>
-              </a:lnSpc>
-              <a:buNone/>
-            </a:pPr>
-            <a:r>
-              <a:rPr lang="en-US" sz="740" dirty="0">
+            <a:endParaRPr lang="en-US" sz="690" dirty="0"/>
+          </a:p>
+          <a:p>
+            <a:pPr indent="0" marL="0">
+              <a:lnSpc>
+                <a:spcPct val="106000"/>
+              </a:lnSpc>
+              <a:buNone/>
+            </a:pPr>
+            <a:r>
+              <a:rPr lang="en-US" sz="690" dirty="0">
                 <a:solidFill>
                   <a:srgbClr val="202124"/>
                 </a:solidFill>
@@ -12532,17 +12483,17 @@
               </a:rPr>
               <a:t>    model="gemini-2.5-pro",</a:t>
             </a:r>
-            <a:endParaRPr lang="en-US" sz="740" dirty="0"/>
-          </a:p>
-          <a:p>
-            <a:pPr indent="0" marL="0">
-              <a:lnSpc>
-                <a:spcPct val="112000"/>
-              </a:lnSpc>
-              <a:buNone/>
-            </a:pPr>
-            <a:r>
-              <a:rPr lang="en-US" sz="740" dirty="0">
+            <a:endParaRPr lang="en-US" sz="690" dirty="0"/>
+          </a:p>
+          <a:p>
+            <a:pPr indent="0" marL="0">
+              <a:lnSpc>
+                <a:spcPct val="106000"/>
+              </a:lnSpc>
+              <a:buNone/>
+            </a:pPr>
+            <a:r>
+              <a:rPr lang="en-US" sz="690" dirty="0">
                 <a:solidFill>
                   <a:srgbClr val="202124"/>
                 </a:solidFill>
@@ -12552,17 +12503,17 @@
               </a:rPr>
               <a:t>    instruction="Check regional BigQuery warehouse stock via MCP and reserve safety stock.",</a:t>
             </a:r>
-            <a:endParaRPr lang="en-US" sz="740" dirty="0"/>
-          </a:p>
-          <a:p>
-            <a:pPr indent="0" marL="0">
-              <a:lnSpc>
-                <a:spcPct val="112000"/>
-              </a:lnSpc>
-              <a:buNone/>
-            </a:pPr>
-            <a:r>
-              <a:rPr lang="en-US" sz="740" dirty="0">
+            <a:endParaRPr lang="en-US" sz="690" dirty="0"/>
+          </a:p>
+          <a:p>
+            <a:pPr indent="0" marL="0">
+              <a:lnSpc>
+                <a:spcPct val="106000"/>
+              </a:lnSpc>
+              <a:buNone/>
+            </a:pPr>
+            <a:r>
+              <a:rPr lang="en-US" sz="690" dirty="0">
                 <a:solidFill>
                   <a:srgbClr val="202124"/>
                 </a:solidFill>
@@ -12572,7 +12523,27 @@
               </a:rPr>
               <a:t>    tools=[inventory_mcp_tools],</a:t>
             </a:r>
-            <a:endParaRPr lang="en-US" sz="740" dirty="0"/>
+            <a:endParaRPr lang="en-US" sz="690" dirty="0"/>
+          </a:p>
+          <a:p>
+            <a:pPr indent="0" marL="0">
+              <a:lnSpc>
+                <a:spcPct val="106000"/>
+              </a:lnSpc>
+              <a:buNone/>
+            </a:pPr>
+            <a:r>
+              <a:rPr lang="en-US" sz="690" dirty="0">
+                <a:solidFill>
+                  <a:srgbClr val="202124"/>
+                </a:solidFill>
+                <a:latin typeface="Courier New" pitchFamily="34" charset="0"/>
+                <a:ea typeface="Courier New" pitchFamily="34" charset="-122"/>
+                <a:cs typeface="Courier New" pitchFamily="34" charset="-120"/>
+              </a:rPr>
+              <a:t>)</a:t>
+            </a:r>
+            <a:endParaRPr lang="en-US" sz="690" dirty="0"/>
           </a:p>
         </p:txBody>
       </p:sp>

--- a/slides/doc-ref-09-editable-slides.pptx
+++ b/slides/doc-ref-09-editable-slides.pptx
@@ -1753,7 +1753,7 @@
                 <a:ea typeface="Arial" pitchFamily="34" charset="-122"/>
                 <a:cs typeface="Arial" pitchFamily="34" charset="-120"/>
               </a:rPr>
-              <a:t>The topology separates centralized ingress and governance from isolated execution spokes (Triad Pillar 2: Pattern A Pooled FinOps &amp; COGS Engine and Triad Pillar 2: Pattern B Silos &amp; Pattern C Hybrid), ensuring deterministic policy enforcement and unified observability across the Google Cloud organization.</a:t>
+              <a:t>The topology separates centralized ingress and governance from isolated execution spokes (Domain Spoke A: Order &amp; Warehouse Inventory Agent and Domain Spoke B: Distributor &amp; Logistics Tracking Agent), ensuring deterministic policy enforcement and unified observability across the Google Cloud organization.</a:t>
             </a:r>
             <a:endParaRPr lang="en-US" sz="960" dirty="0"/>
           </a:p>
@@ -2166,7 +2166,7 @@
                 <a:ea typeface="Arial" pitchFamily="34" charset="-122"/>
                 <a:cs typeface="Arial" pitchFamily="34" charset="-120"/>
               </a:rPr>
-              <a:t>The Multi-Tenant Agentic Triad: Security (Hops 1–5) • FinOps COGS (-84.7%)</a:t>
+              <a:t>VPC Service Controls Multi-Agent Ecosystem Perimeter</a:t>
             </a:r>
             <a:endParaRPr lang="en-US" sz="420" dirty="0"/>
           </a:p>
@@ -2237,7 +2237,7 @@
                 <a:ea typeface="Arial" pitchFamily="34" charset="-122"/>
                 <a:cs typeface="Arial" pitchFamily="34" charset="-120"/>
               </a:rPr>
-              <a:t>Unified Vertex AI Agent Engine &amp; Google ADK Reference Architecture</a:t>
+              <a:t>A2A JSON-RPC Mesh &amp; OBO+DPoP Scope Narrowing</a:t>
             </a:r>
             <a:endParaRPr lang="en-US" sz="420" dirty="0"/>
           </a:p>
@@ -2308,7 +2308,7 @@
                 <a:ea typeface="Arial" pitchFamily="34" charset="-122"/>
                 <a:cs typeface="Arial" pitchFamily="34" charset="-120"/>
               </a:rPr>
-              <a:t>Triad Pillar 2 (High Density): Pattern A Pooled FinOps &amp; COGS Engine</a:t>
+              <a:t>Domain Spoke A: Order &amp; Warehouse Inventory Agent</a:t>
             </a:r>
             <a:endParaRPr lang="en-US" sz="385" dirty="0"/>
           </a:p>
@@ -2379,7 +2379,7 @@
                 <a:ea typeface="Arial" pitchFamily="34" charset="-122"/>
                 <a:cs typeface="Arial" pitchFamily="34" charset="-120"/>
               </a:rPr>
-              <a:t>Triad Pillar 2 (Regulated Scale): Pattern B Silos ($$$) &amp; Pattern C Hybrid</a:t>
+              <a:t>Domain Spoke B: Distributor &amp; Logistics Tracking Agent</a:t>
             </a:r>
             <a:endParaRPr lang="en-US" sz="385" dirty="0"/>
           </a:p>
@@ -2450,7 +2450,7 @@
                 <a:ea typeface="Arial" pitchFamily="34" charset="-122"/>
                 <a:cs typeface="Arial" pitchFamily="34" charset="-120"/>
               </a:rPr>
-              <a:t>Pattern A: Pooled Unit Economics</a:t>
+              <a:t>Order &amp; Inventory Domain Agent</a:t>
             </a:r>
             <a:endParaRPr lang="en-US" sz="540" dirty="0"/>
           </a:p>
@@ -2470,7 +2470,7 @@
                 <a:ea typeface="Arial" pitchFamily="34" charset="-122"/>
                 <a:cs typeface="Arial" pitchFamily="34" charset="-120"/>
               </a:rPr>
-              <a:t>Lowest COGS ($) • 84.7% Net Input Token Savings</a:t>
+              <a:t>Independent ADK deployment with Stateless Cloud Run MCP Server</a:t>
             </a:r>
             <a:endParaRPr lang="en-US" sz="540" dirty="0"/>
           </a:p>
@@ -2541,7 +2541,7 @@
                 <a:ea typeface="Arial" pitchFamily="34" charset="-122"/>
                 <a:cs typeface="Arial" pitchFamily="34" charset="-120"/>
               </a:rPr>
-              <a:t>Pattern B Silos &amp; Pattern C PSC Spokes</a:t>
+              <a:t>Distributor &amp; Tracking Domain Agent</a:t>
             </a:r>
             <a:endParaRPr lang="en-US" sz="540" dirty="0"/>
           </a:p>
@@ -2561,7 +2561,7 @@
                 <a:ea typeface="Arial" pitchFamily="34" charset="-122"/>
                 <a:cs typeface="Arial" pitchFamily="34" charset="-120"/>
               </a:rPr>
-              <a:t>Zero Blast Radius + Zero-Downtime Tier Promotion</a:t>
+              <a:t>Federated A2A peer with partner API circuit breakers</a:t>
             </a:r>
             <a:endParaRPr lang="en-US" sz="540" dirty="0"/>
           </a:p>
@@ -2632,7 +2632,7 @@
                 <a:ea typeface="Arial" pitchFamily="34" charset="-122"/>
                 <a:cs typeface="Arial" pitchFamily="34" charset="-120"/>
               </a:rPr>
-              <a:t>Triad Pillar 1: Zero-Trust Cryptographic Security</a:t>
+              <a:t>A2A Discovery &amp; Federation Hub</a:t>
             </a:r>
             <a:endParaRPr lang="en-US" sz="480" dirty="0"/>
           </a:p>
@@ -2652,7 +2652,7 @@
                 <a:ea typeface="Arial" pitchFamily="34" charset="-122"/>
                 <a:cs typeface="Arial" pitchFamily="34" charset="-120"/>
               </a:rPr>
-              <a:t>5-Hop Context Chain across Ingress, Catalog &amp; Runtime</a:t>
+              <a:t>Agent Card registry (/.well-known/agent.json) &amp; OBO token narrowing</a:t>
             </a:r>
             <a:endParaRPr lang="en-US" sz="480" dirty="0"/>
           </a:p>
@@ -2723,7 +2723,7 @@
                 <a:ea typeface="Arial" pitchFamily="34" charset="-122"/>
                 <a:cs typeface="Arial" pitchFamily="34" charset="-120"/>
               </a:rPr>
-              <a:t>Triad Pillar 3: Privacy- Preserving OTel &amp; Chargeback</a:t>
+              <a:t>Central governance and circuit-breaker telemetry</a:t>
             </a:r>
             <a:endParaRPr lang="en-US" sz="460" dirty="0"/>
           </a:p>
@@ -3454,6 +3454,7 @@
               <a:srgbClr val="5F6368"/>
             </a:solidFill>
             <a:prstDash val="solid"/>
+            <a:headEnd type="triangle" w="sm" len="sm"/>
           </a:ln>
         </p:spPr>
       </p:sp>
@@ -3501,6 +3502,7 @@
               <a:srgbClr val="5F6368"/>
             </a:solidFill>
             <a:prstDash val="solid"/>
+            <a:headEnd type="triangle" w="sm" len="sm"/>
           </a:ln>
         </p:spPr>
       </p:sp>
@@ -3686,6 +3688,7 @@
               <a:srgbClr val="5F6368"/>
             </a:solidFill>
             <a:prstDash val="solid"/>
+            <a:headEnd type="triangle" w="sm" len="sm"/>
           </a:ln>
         </p:spPr>
       </p:sp>
@@ -3733,6 +3736,7 @@
               <a:srgbClr val="5F6368"/>
             </a:solidFill>
             <a:prstDash val="solid"/>
+            <a:headEnd type="triangle" w="sm" len="sm"/>
           </a:ln>
         </p:spPr>
       </p:sp>
@@ -3849,7 +3853,7 @@
                 <a:ea typeface="Arial" pitchFamily="34" charset="-122"/>
                 <a:cs typeface="Arial" pitchFamily="34" charset="-120"/>
               </a:rPr>
-              <a:t>Enterprise &amp; SMB Users</a:t>
+              <a:t>Enterprise Caller</a:t>
             </a:r>
             <a:endParaRPr lang="en-US" sz="560" dirty="0"/>
           </a:p>
@@ -3869,7 +3873,7 @@
                 <a:ea typeface="Arial" pitchFamily="34" charset="-122"/>
                 <a:cs typeface="Arial" pitchFamily="34" charset="-120"/>
               </a:rPr>
-              <a:t>10,000+ Multi-Tier Tenants</a:t>
+              <a:t>Root Orchestrator Client</a:t>
             </a:r>
             <a:endParaRPr lang="en-US" sz="560" dirty="0"/>
           </a:p>
@@ -3984,7 +3988,7 @@
                 <a:ea typeface="Arial" pitchFamily="34" charset="-122"/>
                 <a:cs typeface="Arial" pitchFamily="34" charset="-120"/>
               </a:rPr>
-              <a:t>Global Anycast Ingress</a:t>
+              <a:t>Global A2A Gateway Ingress</a:t>
             </a:r>
             <a:endParaRPr lang="en-US" sz="435" dirty="0"/>
           </a:p>
@@ -4099,7 +4103,7 @@
                 <a:ea typeface="Arial" pitchFamily="34" charset="-122"/>
                 <a:cs typeface="Arial" pitchFamily="34" charset="-120"/>
               </a:rPr>
-              <a:t>Unified SIEM &amp; Audit Lineage</a:t>
+              <a:t>A2A &amp; MCP Posture Monitoring</a:t>
             </a:r>
             <a:endParaRPr lang="en-US" sz="435" dirty="0"/>
           </a:p>
@@ -4194,7 +4198,7 @@
                 <a:ea typeface="Arial" pitchFamily="34" charset="-122"/>
                 <a:cs typeface="Arial" pitchFamily="34" charset="-120"/>
               </a:rPr>
-              <a:t>BigQuery OTel Sink</a:t>
+              <a:t>Cloud Trace &amp; BigQuery</a:t>
             </a:r>
             <a:endParaRPr lang="en-US" sz="435" dirty="0"/>
           </a:p>
@@ -4214,7 +4218,7 @@
                 <a:ea typeface="Arial" pitchFamily="34" charset="-122"/>
                 <a:cs typeface="Arial" pitchFamily="34" charset="-120"/>
               </a:rPr>
-              <a:t>Zero-PII Cryptographic Spans</a:t>
+              <a:t>8s Deadline &amp; 4k Token Budgets</a:t>
             </a:r>
             <a:endParaRPr lang="en-US" sz="435" dirty="0"/>
           </a:p>
@@ -4309,7 +4313,7 @@
                 <a:ea typeface="Arial" pitchFamily="34" charset="-122"/>
                 <a:cs typeface="Arial" pitchFamily="34" charset="-120"/>
               </a:rPr>
-              <a:t>3 Chargeback Models</a:t>
+              <a:t>Central IAM &amp; PAB</a:t>
             </a:r>
             <a:endParaRPr lang="en-US" sz="435" dirty="0"/>
           </a:p>
@@ -4329,7 +4333,7 @@
                 <a:ea typeface="Arial" pitchFamily="34" charset="-122"/>
                 <a:cs typeface="Arial" pitchFamily="34" charset="-120"/>
               </a:rPr>
-              <a:t>Even, Proportional &amp; Tiered</a:t>
+              <a:t>Workload Identity Federation</a:t>
             </a:r>
             <a:endParaRPr lang="en-US" sz="435" dirty="0"/>
           </a:p>
@@ -4424,7 +4428,7 @@
                 <a:ea typeface="Arial" pitchFamily="34" charset="-122"/>
                 <a:cs typeface="Arial" pitchFamily="34" charset="-120"/>
               </a:rPr>
-              <a:t>Thinking Budget Cap</a:t>
+              <a:t>Order Agent (ADK)</a:t>
             </a:r>
             <a:endParaRPr lang="en-US" sz="435" dirty="0"/>
           </a:p>
@@ -4444,7 +4448,7 @@
                 <a:ea typeface="Arial" pitchFamily="34" charset="-122"/>
                 <a:cs typeface="Arial" pitchFamily="34" charset="-120"/>
               </a:rPr>
-              <a:t>Clamps 4k Std vs 8k Ent</a:t>
+              <a:t>Vertex AI Agent Engine</a:t>
             </a:r>
             <a:endParaRPr lang="en-US" sz="435" dirty="0"/>
           </a:p>
@@ -4539,7 +4543,7 @@
                 <a:ea typeface="Arial" pitchFamily="34" charset="-122"/>
                 <a:cs typeface="Arial" pitchFamily="34" charset="-120"/>
               </a:rPr>
-              <a:t>2LO &amp; 3LO Auth Mgr</a:t>
+              <a:t>Inventory MCP Server</a:t>
             </a:r>
             <a:endParaRPr lang="en-US" sz="435" dirty="0"/>
           </a:p>
@@ -4559,7 +4563,7 @@
                 <a:ea typeface="Arial" pitchFamily="34" charset="-122"/>
                 <a:cs typeface="Arial" pitchFamily="34" charset="-120"/>
               </a:rPr>
-              <a:t>Scoped Per-Tenant Vault</a:t>
+              <a:t>Stateless Cloud Run SSE Pool</a:t>
             </a:r>
             <a:endParaRPr lang="en-US" sz="435" dirty="0"/>
           </a:p>
@@ -4654,7 +4658,7 @@
                 <a:ea typeface="Arial" pitchFamily="34" charset="-122"/>
                 <a:cs typeface="Arial" pitchFamily="34" charset="-120"/>
               </a:rPr>
-              <a:t>AlloyDB RLS &amp; L1–L5</a:t>
+              <a:t>BigQuery &amp; AlloyDB</a:t>
             </a:r>
             <a:endParaRPr lang="en-US" sz="435" dirty="0"/>
           </a:p>
@@ -4674,7 +4678,7 @@
                 <a:ea typeface="Arial" pitchFamily="34" charset="-122"/>
                 <a:cs typeface="Arial" pitchFamily="34" charset="-120"/>
               </a:rPr>
-              <a:t>Shared Storage Density</a:t>
+              <a:t>Regional Warehouse Stock Ledger</a:t>
             </a:r>
             <a:endParaRPr lang="en-US" sz="435" dirty="0"/>
           </a:p>
@@ -4769,7 +4773,7 @@
                 <a:ea typeface="Arial" pitchFamily="34" charset="-122"/>
                 <a:cs typeface="Arial" pitchFamily="34" charset="-120"/>
               </a:rPr>
-              <a:t>PSC Spoke Runtime</a:t>
+              <a:t>Tracking Agent (A2A)</a:t>
             </a:r>
             <a:endParaRPr lang="en-US" sz="435" dirty="0"/>
           </a:p>
@@ -4789,7 +4793,7 @@
                 <a:ea typeface="Arial" pitchFamily="34" charset="-122"/>
                 <a:cs typeface="Arial" pitchFamily="34" charset="-120"/>
               </a:rPr>
-              <a:t>3-Phase Live Tier Upgrade</a:t>
+              <a:t>Cloud Run + Agent Engine</a:t>
             </a:r>
             <a:endParaRPr lang="en-US" sz="435" dirty="0"/>
           </a:p>
@@ -4884,7 +4888,7 @@
                 <a:ea typeface="Arial" pitchFamily="34" charset="-122"/>
                 <a:cs typeface="Arial" pitchFamily="34" charset="-120"/>
               </a:rPr>
-              <a:t>Dedicated Silo MCP</a:t>
+              <a:t>Logistics MCP Server</a:t>
             </a:r>
             <a:endParaRPr lang="en-US" sz="435" dirty="0"/>
           </a:p>
@@ -4904,7 +4908,7 @@
                 <a:ea typeface="Arial" pitchFamily="34" charset="-122"/>
                 <a:cs typeface="Arial" pitchFamily="34" charset="-120"/>
               </a:rPr>
-              <a:t>Zero Cross-Project Egress</a:t>
+              <a:t>Stateless Cloud Run Partner API</a:t>
             </a:r>
             <a:endParaRPr lang="en-US" sz="435" dirty="0"/>
           </a:p>
@@ -4999,7 +5003,7 @@
                 <a:ea typeface="Arial" pitchFamily="34" charset="-122"/>
                 <a:cs typeface="Arial" pitchFamily="34" charset="-120"/>
               </a:rPr>
-              <a:t>Cloud KMS CMEK Lock</a:t>
+              <a:t>BigQuery &amp; Spanner</a:t>
             </a:r>
             <a:endParaRPr lang="en-US" sz="435" dirty="0"/>
           </a:p>
@@ -5019,7 +5023,7 @@
                 <a:ea typeface="Arial" pitchFamily="34" charset="-122"/>
                 <a:cs typeface="Arial" pitchFamily="34" charset="-120"/>
               </a:rPr>
-              <a:t>Instant HTTP 423 Kill-Switch</a:t>
+              <a:t>Carrier Telemetry &amp; Fallback Cache</a:t>
             </a:r>
             <a:endParaRPr lang="en-US" sz="435" dirty="0"/>
           </a:p>
@@ -5114,7 +5118,7 @@
                 <a:ea typeface="Arial" pitchFamily="34" charset="-122"/>
                 <a:cs typeface="Arial" pitchFamily="34" charset="-120"/>
               </a:rPr>
-              <a:t>Architecture Selector</a:t>
+              <a:t>Gemini Enterprise Catalog</a:t>
             </a:r>
             <a:endParaRPr lang="en-US" sz="435" dirty="0"/>
           </a:p>
@@ -5134,7 +5138,7 @@
                 <a:ea typeface="Arial" pitchFamily="34" charset="-122"/>
                 <a:cs typeface="Arial" pitchFamily="34" charset="-120"/>
               </a:rPr>
-              <a:t>Routes Pattern A, B or C</a:t>
+              <a:t>A2A Agent Card Discovery</a:t>
             </a:r>
             <a:endParaRPr lang="en-US" sz="435" dirty="0"/>
           </a:p>
@@ -5229,7 +5233,7 @@
                 <a:ea typeface="Arial" pitchFamily="34" charset="-122"/>
                 <a:cs typeface="Arial" pitchFamily="34" charset="-120"/>
               </a:rPr>
-              <a:t>Valkey Rate Bulkhead</a:t>
+              <a:t>Model Armor Spoke Guard</a:t>
             </a:r>
             <a:endParaRPr lang="en-US" sz="435" dirty="0"/>
           </a:p>
@@ -5249,7 +5253,7 @@
                 <a:ea typeface="Arial" pitchFamily="34" charset="-122"/>
                 <a:cs typeface="Arial" pitchFamily="34" charset="-120"/>
               </a:rPr>
-              <a:t>120 RPM Std / 600 RPM Ent</a:t>
+              <a:t>Domain Input/Output Guard</a:t>
             </a:r>
             <a:endParaRPr lang="en-US" sz="435" dirty="0"/>
           </a:p>
@@ -5344,7 +5348,7 @@
                 <a:ea typeface="Arial" pitchFamily="34" charset="-122"/>
                 <a:cs typeface="Arial" pitchFamily="34" charset="-120"/>
               </a:rPr>
-              <a:t>ContextCacheConfig</a:t>
+              <a:t>Gemini 2.5 Pro</a:t>
             </a:r>
             <a:endParaRPr lang="en-US" sz="435" dirty="0"/>
           </a:p>
@@ -5364,7 +5368,7 @@
                 <a:ea typeface="Arial" pitchFamily="34" charset="-122"/>
                 <a:cs typeface="Arial" pitchFamily="34" charset="-120"/>
               </a:rPr>
-              <a:t>90% Discount on 32k Prefix</a:t>
+              <a:t>4,000-Token Circuit Breaker</a:t>
             </a:r>
             <a:endParaRPr lang="en-US" sz="435" dirty="0"/>
           </a:p>
@@ -5459,7 +5463,7 @@
                 <a:ea typeface="Arial" pitchFamily="34" charset="-122"/>
                 <a:cs typeface="Arial" pitchFamily="34" charset="-120"/>
               </a:rPr>
-              <a:t>VPC-SC &amp; IAM PAB</a:t>
+              <a:t>Cloud DLP &amp; Model Armor</a:t>
             </a:r>
             <a:endParaRPr lang="en-US" sz="435" dirty="0"/>
           </a:p>
@@ -5479,7 +5483,7 @@
                 <a:ea typeface="Arial" pitchFamily="34" charset="-122"/>
                 <a:cs typeface="Arial" pitchFamily="34" charset="-120"/>
               </a:rPr>
-              <a:t>Hard Perimeter Isolation</a:t>
+              <a:t>Partner Payload Sanitization</a:t>
             </a:r>
             <a:endParaRPr lang="en-US" sz="435" dirty="0"/>
           </a:p>
@@ -5574,7 +5578,7 @@
                 <a:ea typeface="Arial" pitchFamily="34" charset="-122"/>
                 <a:cs typeface="Arial" pitchFamily="34" charset="-120"/>
               </a:rPr>
-              <a:t>Gemma 3 &amp; Claude 3.7</a:t>
+              <a:t>Gemini 2.5 Flash</a:t>
             </a:r>
             <a:endParaRPr lang="en-US" sz="435" dirty="0"/>
           </a:p>
@@ -5594,7 +5598,7 @@
                 <a:ea typeface="Arial" pitchFamily="34" charset="-122"/>
                 <a:cs typeface="Arial" pitchFamily="34" charset="-120"/>
               </a:rPr>
-              <a:t>Air-Gapped GKE &amp; Dedicated PT</a:t>
+              <a:t>8-Second SLA Deadline</a:t>
             </a:r>
             <a:endParaRPr lang="en-US" sz="435" dirty="0"/>
           </a:p>
@@ -5689,7 +5693,7 @@
                 <a:ea typeface="Arial" pitchFamily="34" charset="-122"/>
                 <a:cs typeface="Arial" pitchFamily="34" charset="-120"/>
               </a:rPr>
-              <a:t>Hop 1: Cloud Armor</a:t>
+              <a:t>Google Cloud Armor</a:t>
             </a:r>
             <a:endParaRPr lang="en-US" sz="435" dirty="0"/>
           </a:p>
@@ -5709,7 +5713,7 @@
                 <a:ea typeface="Arial" pitchFamily="34" charset="-122"/>
                 <a:cs typeface="Arial" pitchFamily="34" charset="-120"/>
               </a:rPr>
-              <a:t>WAF Header Strip + OBO + DPoP</a:t>
+              <a:t>Ingress WAF &amp; Rate Control</a:t>
             </a:r>
             <a:endParaRPr lang="en-US" sz="435" dirty="0"/>
           </a:p>
@@ -5804,7 +5808,7 @@
                 <a:ea typeface="Arial" pitchFamily="34" charset="-122"/>
                 <a:cs typeface="Arial" pitchFamily="34" charset="-120"/>
               </a:rPr>
-              <a:t>Hop 4: Model Armor</a:t>
+              <a:t>Model Armor</a:t>
             </a:r>
             <a:endParaRPr lang="en-US" sz="435" dirty="0"/>
           </a:p>
@@ -5824,7 +5828,7 @@
                 <a:ea typeface="Arial" pitchFamily="34" charset="-122"/>
                 <a:cs typeface="Arial" pitchFamily="34" charset="-120"/>
               </a:rPr>
-              <a:t>Injection 400 + Policy 422 + SDP</a:t>
+              <a:t>Cross-Agent Payload Screen</a:t>
             </a:r>
             <a:endParaRPr lang="en-US" sz="435" dirty="0"/>
           </a:p>
@@ -5919,7 +5923,7 @@
                 <a:ea typeface="Arial" pitchFamily="34" charset="-122"/>
                 <a:cs typeface="Arial" pitchFamily="34" charset="-120"/>
               </a:rPr>
-              <a:t>Hop 2: Catalog PDP</a:t>
+              <a:t>OBO + DPoP Broker</a:t>
             </a:r>
             <a:endParaRPr lang="en-US" sz="435" dirty="0"/>
           </a:p>
@@ -5939,7 +5943,7 @@
                 <a:ea typeface="Arial" pitchFamily="34" charset="-122"/>
                 <a:cs typeface="Arial" pitchFamily="34" charset="-120"/>
               </a:rPr>
-              <a:t>Discovery Catalog + Tool Prune</a:t>
+              <a:t>Per-Hop Scope Narrowing</a:t>
             </a:r>
             <a:endParaRPr lang="en-US" sz="435" dirty="0"/>
           </a:p>
@@ -6562,7 +6566,7 @@
                 <a:ea typeface="Arial" pitchFamily="34" charset="-122"/>
                 <a:cs typeface="Arial" pitchFamily="34" charset="-120"/>
               </a:rPr>
-              <a:t>Real-time COGS &amp; security telemetry</a:t>
+              <a:t>Distributed A2A &amp; MCP trace spans</a:t>
             </a:r>
             <a:endParaRPr lang="en-US" sz="420" dirty="0"/>
           </a:p>
@@ -6576,8 +6580,8 @@
         </p:nvSpPr>
         <p:spPr>
           <a:xfrm>
-            <a:off x="5295290" y="4659782"/>
-            <a:ext cx="468173" cy="114300"/>
+            <a:off x="5221224" y="4659782"/>
+            <a:ext cx="616306" cy="114300"/>
           </a:xfrm>
           <a:prstGeom prst="roundRect">
             <a:avLst>
@@ -6609,7 +6613,7 @@
                 <a:ea typeface="Arial" pitchFamily="34" charset="-122"/>
                 <a:cs typeface="Arial" pitchFamily="34" charset="-120"/>
               </a:rPr>
-              <a:t>Zero Cache Bleed</a:t>
+              <a:t>Stateless MCP SSE Call</a:t>
             </a:r>
             <a:endParaRPr lang="en-US" sz="420" dirty="0"/>
           </a:p>
@@ -6656,7 +6660,7 @@
                 <a:ea typeface="Arial" pitchFamily="34" charset="-122"/>
                 <a:cs typeface="Arial" pitchFamily="34" charset="-120"/>
               </a:rPr>
-              <a:t>Storage-Engine RLS Policy</a:t>
+              <a:t>Parameterized Stock Query</a:t>
             </a:r>
             <a:endParaRPr lang="en-US" sz="420" dirty="0"/>
           </a:p>
@@ -6670,8 +6674,8 @@
         </p:nvSpPr>
         <p:spPr>
           <a:xfrm>
-            <a:off x="7258507" y="4659782"/>
-            <a:ext cx="616306" cy="114300"/>
+            <a:off x="7246620" y="4659782"/>
+            <a:ext cx="640994" cy="114300"/>
           </a:xfrm>
           <a:prstGeom prst="roundRect">
             <a:avLst>
@@ -6703,7 +6707,7 @@
                 <a:ea typeface="Arial" pitchFamily="34" charset="-122"/>
                 <a:cs typeface="Arial" pitchFamily="34" charset="-120"/>
               </a:rPr>
-              <a:t>Private PSC NAT Bridge</a:t>
+              <a:t>Stateless MCP Tool Call</a:t>
             </a:r>
             <a:endParaRPr lang="en-US" sz="420" dirty="0"/>
           </a:p>
@@ -6750,7 +6754,7 @@
                 <a:ea typeface="Arial" pitchFamily="34" charset="-122"/>
                 <a:cs typeface="Arial" pitchFamily="34" charset="-120"/>
               </a:rPr>
-              <a:t>Customer-Revocable CMEK Keys</a:t>
+              <a:t>Partner API &amp; Cache Fallback</a:t>
             </a:r>
             <a:endParaRPr lang="en-US" sz="420" dirty="0"/>
           </a:p>
@@ -6764,8 +6768,8 @@
         </p:nvSpPr>
         <p:spPr>
           <a:xfrm>
-            <a:off x="4399178" y="5337353"/>
-            <a:ext cx="566928" cy="114300"/>
+            <a:off x="4387291" y="5337353"/>
+            <a:ext cx="591617" cy="114300"/>
           </a:xfrm>
           <a:prstGeom prst="roundRect">
             <a:avLst>
@@ -6797,7 +6801,7 @@
                 <a:ea typeface="Arial" pitchFamily="34" charset="-122"/>
                 <a:cs typeface="Arial" pitchFamily="34" charset="-120"/>
               </a:rPr>
-              <a:t>90% Cached inference</a:t>
+              <a:t>Plan tool invocations</a:t>
             </a:r>
             <a:endParaRPr lang="en-US" sz="420" dirty="0"/>
           </a:p>
@@ -6844,7 +6848,7 @@
                 <a:ea typeface="Arial" pitchFamily="34" charset="-122"/>
                 <a:cs typeface="Arial" pitchFamily="34" charset="-120"/>
               </a:rPr>
-              <a:t>Verified zero-bleed agent completion</a:t>
+              <a:t>Aggregated multi-agent JSON-RPC result</a:t>
             </a:r>
             <a:endParaRPr lang="en-US" sz="420" dirty="0"/>
           </a:p>
@@ -6891,7 +6895,7 @@
                 <a:ea typeface="Arial" pitchFamily="34" charset="-122"/>
                 <a:cs typeface="Arial" pitchFamily="34" charset="-120"/>
               </a:rPr>
-              <a:t>Dispatch to optimal cost/security tier</a:t>
+              <a:t>Delegate A2A task via Agent Card</a:t>
             </a:r>
             <a:endParaRPr lang="en-US" sz="420" dirty="0"/>
           </a:p>
@@ -6905,8 +6909,8 @@
         </p:nvSpPr>
         <p:spPr>
           <a:xfrm>
-            <a:off x="4939589" y="2980944"/>
-            <a:ext cx="690372" cy="114300"/>
+            <a:off x="4977079" y="2980944"/>
+            <a:ext cx="616306" cy="114300"/>
           </a:xfrm>
           <a:prstGeom prst="roundRect">
             <a:avLst>
@@ -6938,7 +6942,7 @@
                 <a:ea typeface="Arial" pitchFamily="34" charset="-122"/>
                 <a:cs typeface="Arial" pitchFamily="34" charset="-120"/>
               </a:rPr>
-              <a:t>Prune Catalog &amp; MCP tools</a:t>
+              <a:t>Narrow OBO token scope</a:t>
             </a:r>
             <a:endParaRPr lang="en-US" sz="420" dirty="0"/>
           </a:p>
@@ -6952,8 +6956,8 @@
         </p:nvSpPr>
         <p:spPr>
           <a:xfrm>
-            <a:off x="4508906" y="4445813"/>
-            <a:ext cx="347472" cy="114300"/>
+            <a:off x="4461358" y="4445813"/>
+            <a:ext cx="443484" cy="114300"/>
           </a:xfrm>
           <a:prstGeom prst="roundRect">
             <a:avLst>
@@ -6985,7 +6989,7 @@
                 <a:ea typeface="Arial" pitchFamily="34" charset="-122"/>
                 <a:cs typeface="Arial" pitchFamily="34" charset="-120"/>
               </a:rPr>
-              <a:t>Check quota</a:t>
+              <a:t>Screen A2A task</a:t>
             </a:r>
             <a:endParaRPr lang="en-US" sz="420" dirty="0"/>
           </a:p>
@@ -6999,8 +7003,8 @@
         </p:nvSpPr>
         <p:spPr>
           <a:xfrm>
-            <a:off x="4508906" y="4625950"/>
-            <a:ext cx="347472" cy="114300"/>
+            <a:off x="4436669" y="4625950"/>
+            <a:ext cx="492862" cy="114300"/>
           </a:xfrm>
           <a:prstGeom prst="roundRect">
             <a:avLst>
@@ -7032,7 +7036,7 @@
                 <a:ea typeface="Arial" pitchFamily="34" charset="-122"/>
                 <a:cs typeface="Arial" pitchFamily="34" charset="-120"/>
               </a:rPr>
-              <a:t>Log COGS</a:t>
+              <a:t>Screen A2A output</a:t>
             </a:r>
             <a:endParaRPr lang="en-US" sz="420" dirty="0"/>
           </a:p>
@@ -7046,8 +7050,8 @@
         </p:nvSpPr>
         <p:spPr>
           <a:xfrm>
-            <a:off x="4938674" y="2299716"/>
-            <a:ext cx="492862" cy="114300"/>
+            <a:off x="4876495" y="2299716"/>
+            <a:ext cx="616306" cy="114300"/>
           </a:xfrm>
           <a:prstGeom prst="roundRect">
             <a:avLst>
@@ -7079,7 +7083,7 @@
                 <a:ea typeface="Arial" pitchFamily="34" charset="-122"/>
                 <a:cs typeface="Arial" pitchFamily="34" charset="-120"/>
               </a:rPr>
-              <a:t>Verify OBO &amp; DPoP</a:t>
+              <a:t>WAF &amp; ingress policies</a:t>
             </a:r>
             <a:endParaRPr lang="en-US" sz="420" dirty="0"/>
           </a:p>
@@ -7093,8 +7097,8 @@
         </p:nvSpPr>
         <p:spPr>
           <a:xfrm>
-            <a:off x="5077663" y="2816352"/>
-            <a:ext cx="542239" cy="114300"/>
+            <a:off x="5003597" y="2816352"/>
+            <a:ext cx="690372" cy="114300"/>
           </a:xfrm>
           <a:prstGeom prst="roundRect">
             <a:avLst>
@@ -7126,7 +7130,7 @@
                 <a:ea typeface="Arial" pitchFamily="34" charset="-122"/>
                 <a:cs typeface="Arial" pitchFamily="34" charset="-120"/>
               </a:rPr>
-              <a:t>Screen &amp; redact PII</a:t>
+              <a:t>Sanitize A2A task payload</a:t>
             </a:r>
             <a:endParaRPr lang="en-US" sz="420" dirty="0"/>
           </a:p>
@@ -7707,7 +7711,7 @@
                 <a:ea typeface="Arial" pitchFamily="34" charset="-122"/>
                 <a:cs typeface="Arial" pitchFamily="34" charset="-120"/>
               </a:rPr>
-              <a:t>The Multi-Tenant Agentic Triad: Security • FinOps COGS • Zero-PII Observability
+              <a:t>VPC Service Controls Multi-Agent Ecosystem Perimeter
 </a:t>
             </a:r>
             <a:pPr indent="0" marL="0">
@@ -7791,7 +7795,7 @@
                 <a:ea typeface="Arial" pitchFamily="34" charset="-122"/>
                 <a:cs typeface="Arial" pitchFamily="34" charset="-120"/>
               </a:rPr>
-              <a:t>• The Multi-Tenant Agentic Triad: Security • FinOps COGS • Zero-PII Observability: </a:t>
+              <a:t>• VPC Service Controls Multi-Agent Ecosystem Perimeter: </a:t>
             </a:r>
             <a:pPr indent="0" marL="0">
               <a:lnSpc>
@@ -7874,7 +7878,7 @@
                 <a:ea typeface="Arial" pitchFamily="34" charset="-122"/>
                 <a:cs typeface="Arial" pitchFamily="34" charset="-120"/>
               </a:rPr>
-              <a:t>Triad Pillar 1: Zero-Trust Cryptographic Security
+              <a:t>A2A Discovery &amp; Federation Hub
 </a:t>
             </a:r>
             <a:pPr indent="0" marL="0">
@@ -7993,7 +7997,7 @@
                 <a:ea typeface="Arial" pitchFamily="34" charset="-122"/>
                 <a:cs typeface="Arial" pitchFamily="34" charset="-120"/>
               </a:rPr>
-              <a:t>• Hop 1: Cloud Armor &amp; Hop 2: Catalog PDP: </a:t>
+              <a:t>• Google Cloud Armor: </a:t>
             </a:r>
             <a:pPr indent="0" marL="0">
               <a:lnSpc>
@@ -8010,7 +8014,7 @@
                 <a:ea typeface="Arial" pitchFamily="34" charset="-122"/>
                 <a:cs typeface="Arial" pitchFamily="34" charset="-120"/>
               </a:rPr>
-              <a:t>Enforces edge policy rules and screens payloads before reaching the runtime.
+              <a:t>Enforces edge policy rules before reaching the runtime.
 </a:t>
             </a:r>
             <a:pPr indent="0" marL="0">
@@ -8028,7 +8032,7 @@
                 <a:ea typeface="Arial" pitchFamily="34" charset="-122"/>
                 <a:cs typeface="Arial" pitchFamily="34" charset="-120"/>
               </a:rPr>
-              <a:t>• Hop 4: Model Armor: </a:t>
+              <a:t>• Model Armor: </a:t>
             </a:r>
             <a:pPr indent="0" marL="0">
               <a:lnSpc>
@@ -8045,7 +8049,7 @@
                 <a:ea typeface="Arial" pitchFamily="34" charset="-122"/>
                 <a:cs typeface="Arial" pitchFamily="34" charset="-120"/>
               </a:rPr>
-              <a:t>Authenticates callers and verifies identity and scope claims before routing.
+              <a:t>Screens incoming prompts and verifies policy constraints at the routing hub.
 </a:t>
             </a:r>
             <a:pPr indent="0" marL="0">
@@ -8063,7 +8067,7 @@
                 <a:ea typeface="Arial" pitchFamily="34" charset="-122"/>
                 <a:cs typeface="Arial" pitchFamily="34" charset="-120"/>
               </a:rPr>
-              <a:t>• Architecture Selector: </a:t>
+              <a:t>• OBO + DPoP Broker: </a:t>
             </a:r>
             <a:pPr indent="0" marL="0">
               <a:lnSpc>
@@ -8080,7 +8084,7 @@
                 <a:ea typeface="Arial" pitchFamily="34" charset="-122"/>
                 <a:cs typeface="Arial" pitchFamily="34" charset="-120"/>
               </a:rPr>
-              <a:t>Serverless routing service that validates caller tokens and dispatches requests to the target execution spoke.</a:t>
+              <a:t>Authenticates callers and binds cryptographic identity and scope claims before routing.</a:t>
             </a:r>
             <a:endParaRPr lang="en-US" sz="690" dirty="0"/>
           </a:p>
@@ -8146,7 +8150,7 @@
                 <a:ea typeface="Arial" pitchFamily="34" charset="-122"/>
                 <a:cs typeface="Arial" pitchFamily="34" charset="-120"/>
               </a:rPr>
-              <a:t>Triad Pillar 3: Privacy- Preserving OTel &amp; Chargeback
+              <a:t>Central governance and circuit-breaker telemetry
 </a:t>
             </a:r>
             <a:pPr indent="0" marL="0">
@@ -8265,7 +8269,7 @@
                 <a:ea typeface="Arial" pitchFamily="34" charset="-122"/>
                 <a:cs typeface="Arial" pitchFamily="34" charset="-120"/>
               </a:rPr>
-              <a:t>• 3 Chargeback Models: </a:t>
+              <a:t>• Central IAM &amp; PAB: </a:t>
             </a:r>
             <a:pPr indent="0" marL="0">
               <a:lnSpc>
@@ -8300,7 +8304,7 @@
                 <a:ea typeface="Arial" pitchFamily="34" charset="-122"/>
                 <a:cs typeface="Arial" pitchFamily="34" charset="-120"/>
               </a:rPr>
-              <a:t>• BigQuery OTel Sink: </a:t>
+              <a:t>• Cloud Trace &amp; BigQuery: </a:t>
             </a:r>
             <a:pPr indent="0" marL="0">
               <a:lnSpc>
@@ -8467,7 +8471,7 @@
                 <a:ea typeface="Arial" pitchFamily="34" charset="-122"/>
                 <a:cs typeface="Arial" pitchFamily="34" charset="-120"/>
               </a:rPr>
-              <a:t>• Unified Vertex AI Agent Engine &amp; Google ADK Reference Architecture: </a:t>
+              <a:t>• A2A JSON-RPC Mesh &amp; OBO+DPoP Scope Narrowing: </a:t>
             </a:r>
             <a:pPr indent="0" marL="0">
               <a:lnSpc>
@@ -8550,7 +8554,7 @@
                 <a:ea typeface="Arial" pitchFamily="34" charset="-122"/>
                 <a:cs typeface="Arial" pitchFamily="34" charset="-120"/>
               </a:rPr>
-              <a:t>Pattern A: Pooled Unit Economics &amp; Pattern B Silos &amp; Pattern C PSC Spokes
+              <a:t>Order &amp; Inventory Domain Agent &amp; Distributor &amp; Tracking Domain Agent
 </a:t>
             </a:r>
             <a:pPr indent="0" marL="0">
@@ -8634,7 +8638,7 @@
                 <a:ea typeface="Arial" pitchFamily="34" charset="-122"/>
                 <a:cs typeface="Arial" pitchFamily="34" charset="-120"/>
               </a:rPr>
-              <a:t>• Thinking Budget Cap: </a:t>
+              <a:t>• Order Agent (ADK) / Tracking Agent (A2A): </a:t>
             </a:r>
             <a:pPr indent="0" marL="0">
               <a:lnSpc>
@@ -8651,7 +8655,7 @@
                 <a:ea typeface="Arial" pitchFamily="34" charset="-122"/>
                 <a:cs typeface="Arial" pitchFamily="34" charset="-120"/>
               </a:rPr>
-              <a:t>Core execution environment orchestrating reasoning, memory, and tool execution.
+              <a:t>Core execution environments orchestrating reasoning, memory, and tool execution across left and right spokes.
 </a:t>
             </a:r>
             <a:pPr indent="0" marL="0">
@@ -8669,7 +8673,7 @@
                 <a:ea typeface="Arial" pitchFamily="34" charset="-122"/>
                 <a:cs typeface="Arial" pitchFamily="34" charset="-120"/>
               </a:rPr>
-              <a:t>• Valkey Rate Bulkhead: </a:t>
+              <a:t>• Model Armor Spoke Guard / Cloud DLP &amp; Model Armor: </a:t>
             </a:r>
             <a:pPr indent="0" marL="0">
               <a:lnSpc>
@@ -8686,7 +8690,7 @@
                 <a:ea typeface="Arial" pitchFamily="34" charset="-122"/>
                 <a:cs typeface="Arial" pitchFamily="34" charset="-120"/>
               </a:rPr>
-              <a:t>Screens prompts and model outputs within the execution boundary to enforce safety and DLP policies.
+              <a:t>Screens prompts and model outputs within each spoke boundary to enforce safety and DLP policies.
 </a:t>
             </a:r>
             <a:pPr indent="0" marL="0">
@@ -8704,7 +8708,7 @@
                 <a:ea typeface="Arial" pitchFamily="34" charset="-122"/>
                 <a:cs typeface="Arial" pitchFamily="34" charset="-120"/>
               </a:rPr>
-              <a:t>• 2LO &amp; 3LO Auth Mgr: </a:t>
+              <a:t>• Inventory MCP Server / Logistics MCP Server: </a:t>
             </a:r>
             <a:pPr indent="0" marL="0">
               <a:lnSpc>
@@ -8721,7 +8725,7 @@
                 <a:ea typeface="Arial" pitchFamily="34" charset="-122"/>
                 <a:cs typeface="Arial" pitchFamily="34" charset="-120"/>
               </a:rPr>
-              <a:t>Serverless tool interface providing standardized, scoped access to enterprise systems.
+              <a:t>Serverless tool interfaces providing standardized, scoped access to enterprise systems.
 </a:t>
             </a:r>
             <a:pPr indent="0" marL="0">
@@ -8739,7 +8743,7 @@
                 <a:ea typeface="Arial" pitchFamily="34" charset="-122"/>
                 <a:cs typeface="Arial" pitchFamily="34" charset="-120"/>
               </a:rPr>
-              <a:t>• AlloyDB RLS &amp; L1–L5: </a:t>
+              <a:t>• BigQuery &amp; AlloyDB / BigQuery &amp; Spanner: </a:t>
             </a:r>
             <a:pPr indent="0" marL="0">
               <a:lnSpc>
@@ -8756,7 +8760,7 @@
                 <a:ea typeface="Arial" pitchFamily="34" charset="-122"/>
                 <a:cs typeface="Arial" pitchFamily="34" charset="-120"/>
               </a:rPr>
-              <a:t>Isolated persistence layer enforcing access boundaries, vector namespaces, and encryption at rest.</a:t>
+              <a:t>Isolated persistence layers enforcing access boundaries, vector namespaces, and encryption at rest.</a:t>
             </a:r>
             <a:endParaRPr lang="en-US" sz="690" dirty="0"/>
           </a:p>
@@ -8879,7 +8883,7 @@
                 <a:ea typeface="Arial" pitchFamily="34" charset="-122"/>
                 <a:cs typeface="Arial" pitchFamily="34" charset="-120"/>
               </a:rPr>
-              <a:t>A caller sends a request to External Application Load Balancer in the Triad Pillar 1: Zero-Trust Cryptographic Security.
+              <a:t>A caller sends a request to External Application Load Balancer in the A2A Discovery &amp; Federation Hub.
 </a:t>
             </a:r>
             <a:pPr indent="0" marL="0">
@@ -8914,7 +8918,7 @@
                 <a:ea typeface="Arial" pitchFamily="34" charset="-122"/>
                 <a:cs typeface="Arial" pitchFamily="34" charset="-120"/>
               </a:rPr>
-              <a:t>After passing policy and security checks across Hop 1: Cloud Armor, Hop 4: Model Armor, and Hop 2: Catalog PDP, the request is forwarded to Architecture Selector.
+              <a:t>After passing policy and security checks across Google Cloud Armor, Model Armor, and OBO + DPoP Broker, the request is forwarded to Gemini Enterprise Catalog.
 </a:t>
             </a:r>
             <a:pPr indent="0" marL="0">
@@ -8949,7 +8953,7 @@
                 <a:ea typeface="Arial" pitchFamily="34" charset="-122"/>
                 <a:cs typeface="Arial" pitchFamily="34" charset="-120"/>
               </a:rPr>
-              <a:t>Architecture Selector verifies the caller's identity claims, attaches scoped execution metadata, and routes the request to the target execution spoke.
+              <a:t>Gemini Enterprise Catalog verifies the caller's identity claims, attaches scoped execution metadata, and routes the request to the target execution spoke.
 </a:t>
             </a:r>
             <a:pPr indent="0" marL="0">
@@ -8984,7 +8988,7 @@
                 <a:ea typeface="Arial" pitchFamily="34" charset="-122"/>
                 <a:cs typeface="Arial" pitchFamily="34" charset="-120"/>
               </a:rPr>
-              <a:t>Within Pattern A: Pooled Unit Economics, the runtime orchestrates execution across four deterministic sub-steps.
+              <a:t>Within Order &amp; Inventory Domain Agent, the runtime orchestrates execution across four deterministic sub-steps.
 </a:t>
             </a:r>
             <a:pPr indent="0" marL="0">
@@ -9054,7 +9058,7 @@
                 <a:ea typeface="Arial" pitchFamily="34" charset="-122"/>
                 <a:cs typeface="Arial" pitchFamily="34" charset="-120"/>
               </a:rPr>
-              <a:t>Grounded context retrieval: Queries the datastore via Zero Cache Bleed.
+              <a:t>Grounded context retrieval: Queries the datastore via Stateless MCP SSE Call.
 </a:t>
             </a:r>
             <a:pPr indent="0" marL="0">
@@ -9089,7 +9093,7 @@
                 <a:ea typeface="Arial" pitchFamily="34" charset="-122"/>
                 <a:cs typeface="Arial" pitchFamily="34" charset="-120"/>
               </a:rPr>
-              <a:t>Scoped tool invocation: Executes external tool operations via Storage-Engine RLS Policy.
+              <a:t>Scoped tool invocation: Executes external tool operations via Parameterized Stock Query.
 </a:t>
             </a:r>
             <a:pPr indent="0" marL="0">
@@ -9159,7 +9163,7 @@
                 <a:ea typeface="Arial" pitchFamily="34" charset="-122"/>
                 <a:cs typeface="Arial" pitchFamily="34" charset="-120"/>
               </a:rPr>
-              <a:t>Thinking Budget Cap sends the validated, context-enriched prompt to ContextCacheConfig to synthesize a grounded response.
+              <a:t>Order Agent (ADK) sends the validated, context-enriched prompt to Gemini 2.5 Pro to synthesize a grounded response.
 </a:t>
             </a:r>
             <a:pPr indent="0" marL="0">
@@ -9194,7 +9198,7 @@
                 <a:ea typeface="Arial" pitchFamily="34" charset="-122"/>
                 <a:cs typeface="Arial" pitchFamily="34" charset="-120"/>
               </a:rPr>
-              <a:t>Thinking Budget Cap passes the generated output through Valkey Rate Bulkhead for final output sanitization and policy enforcement.
+              <a:t>Order Agent (ADK) passes the generated output through Model Armor Spoke Guard for final output sanitization and policy enforcement.
 </a:t>
             </a:r>
             <a:pPr indent="0" marL="0">
@@ -9229,7 +9233,7 @@
                 <a:ea typeface="Arial" pitchFamily="34" charset="-122"/>
                 <a:cs typeface="Arial" pitchFamily="34" charset="-120"/>
               </a:rPr>
-              <a:t>The verified response returns to the caller through the Triad Pillar 1: Zero-Trust Cryptographic Security, while structured OpenTelemetry audit and FinOps spans stream to the Triad Pillar 3: Privacy- Preserving OTel &amp; Chargeback.
+              <a:t>The verified response returns to the caller through the A2A Discovery &amp; Federation Hub, while structured OpenTelemetry audit and FinOps spans stream to the Central governance and circuit-breaker telemetry.
 </a:t>
             </a:r>
             <a:endParaRPr lang="en-US" sz="730" dirty="0"/>
@@ -9914,7 +9918,7 @@
                 <a:ea typeface="Arial" pitchFamily="34" charset="-122"/>
                 <a:cs typeface="Arial" pitchFamily="34" charset="-120"/>
               </a:rPr>
-              <a:t>Enforces deterministic tenant and domain boundaries via Unified Vertex AI Agent Engine &amp; Google ADK Reference Architecture and AlloyDB RLS &amp; L1–L5, preventing cross-spoke state or credential leakage.
+              <a:t>Enforces deterministic tenant and domain boundaries via A2A JSON-RPC Mesh &amp; OBO+DPoP Scope Narrowing and BigQuery &amp; AlloyDB, preventing cross-spoke state or credential leakage.
 </a:t>
             </a:r>
             <a:pPr indent="0" marL="0">
@@ -10244,7 +10248,7 @@
                 <a:ea typeface="Arial" pitchFamily="34" charset="-122"/>
                 <a:cs typeface="Arial" pitchFamily="34" charset="-120"/>
               </a:rPr>
-              <a:t>The baseline topology routes traffic through External Application Load Balancer and Architecture Selector under The Multi-Tenant Agentic Triad: Security • FinOps COGS • Zero-PII Observability.
+              <a:t>The baseline topology routes traffic through External Application Load Balancer and Gemini Enterprise Catalog under VPC Service Controls Multi-Agent Ecosystem Perimeter.
 </a:t>
             </a:r>
             <a:pPr indent="0" marL="0">
@@ -10279,7 +10283,7 @@
                 <a:ea typeface="Arial" pitchFamily="34" charset="-122"/>
                 <a:cs typeface="Arial" pitchFamily="34" charset="-120"/>
               </a:rPr>
-              <a:t>For internet-facing workloads, retain the global External Application Load Balancer with Hop 1: Cloud Armor and Hop 4: Model Armor.
+              <a:t>For internet-facing workloads, retain the global External Application Load Balancer with Google Cloud Armor and Model Armor.
 </a:t>
             </a:r>
             <a:pPr indent="0" marL="0">
@@ -10297,7 +10301,7 @@
                 <a:ea typeface="Arial" pitchFamily="34" charset="-122"/>
                 <a:cs typeface="Arial" pitchFamily="34" charset="-120"/>
               </a:rPr>
-              <a:t>Thinking Budget Cap &amp; 2LO &amp; 3LO Auth Mgr placement — </a:t>
+              <a:t>Order Agent (ADK) &amp; Inventory MCP Server placement — </a:t>
             </a:r>
             <a:pPr indent="0" marL="0">
               <a:lnSpc>
@@ -10314,7 +10318,7 @@
                 <a:ea typeface="Arial" pitchFamily="34" charset="-122"/>
                 <a:cs typeface="Arial" pitchFamily="34" charset="-120"/>
               </a:rPr>
-              <a:t>Each execution spoke pairs Thinking Budget Cap with 2LO &amp; 3LO Auth Mgr and AlloyDB RLS &amp; L1–L5.
+              <a:t>Each execution spoke pairs Order Agent (ADK) with Inventory MCP Server and BigQuery &amp; AlloyDB.
 </a:t>
             </a:r>
             <a:pPr indent="0" marL="0">
@@ -10349,7 +10353,7 @@
                 <a:ea typeface="Arial" pitchFamily="34" charset="-122"/>
                 <a:cs typeface="Arial" pitchFamily="34" charset="-120"/>
               </a:rPr>
-              <a:t>Spoke-local 2LO &amp; 3LO Auth Mgr: Maximizes blast-radius containment by keeping credentials, service accounts, and data access strictly inside.; Shared enterprise tool gateway: Consolidates stateless, non-tenant-specific MCP tools into a central hub project via Private Service Connect.
+              <a:t>Spoke-local Inventory MCP Server: Maximizes blast-radius containment by keeping credentials, service accounts, and data access strictly inside.; Shared enterprise tool gateway: Consolidates stateless, non-tenant-specific MCP tools into a central hub project via Private Service Connect.
 </a:t>
             </a:r>
             <a:endParaRPr lang="en-US" sz="810" dirty="0"/>
@@ -10790,7 +10794,7 @@
                 <a:ea typeface="Arial" pitchFamily="34" charset="-122"/>
                 <a:cs typeface="Arial" pitchFamily="34" charset="-120"/>
               </a:rPr>
-              <a:t>• Hop 1: Cloud Armor &amp; Hop 4: Model Armor &amp; Valkey Rate Bulkhead</a:t>
+              <a:t>• Google Cloud Armor &amp; Model Armor Spoke Guard</a:t>
             </a:r>
             <a:endParaRPr lang="en-US" sz="710" dirty="0"/>
           </a:p>
@@ -10807,7 +10811,7 @@
                 <a:ea typeface="Arial" pitchFamily="34" charset="-122"/>
                 <a:cs typeface="Arial" pitchFamily="34" charset="-120"/>
               </a:rPr>
-              <a:t>• AlloyDB RLS &amp; L1–L5 &amp; 3 Chargeback Models</a:t>
+              <a:t>• BigQuery &amp; AlloyDB &amp; Central IAM &amp; PAB</a:t>
             </a:r>
             <a:endParaRPr lang="en-US" sz="710" dirty="0"/>
           </a:p>
@@ -10902,7 +10906,7 @@
                 <a:ea typeface="Arial" pitchFamily="34" charset="-122"/>
                 <a:cs typeface="Arial" pitchFamily="34" charset="-120"/>
               </a:rPr>
-              <a:t>• Hop 1: Cloud Armor &amp; Hop 4: Model Armor &amp; Valkey Rate Bulkhead: </a:t>
+              <a:t>• Google Cloud Armor &amp; Model Armor Spoke Guard: </a:t>
             </a:r>
             <a:pPr indent="0" marL="0">
               <a:buNone/>
@@ -10916,7 +10920,7 @@
                 <a:ea typeface="Arial" pitchFamily="34" charset="-122"/>
                 <a:cs typeface="Arial" pitchFamily="34" charset="-120"/>
               </a:rPr>
-              <a:t>Strip client-supplied privilege headers at the edge, verify caller identity claims, and screen prompts and completions with Valkey Rate Bulkhead.
+              <a:t>Strip client-supplied privilege headers at the edge, verify caller identity claims, and screen prompts and completions with Model Armor Spoke Guard.
 </a:t>
             </a:r>
             <a:pPr indent="0" marL="0">
@@ -10931,7 +10935,7 @@
                 <a:ea typeface="Arial" pitchFamily="34" charset="-122"/>
                 <a:cs typeface="Arial" pitchFamily="34" charset="-120"/>
               </a:rPr>
-              <a:t>• AlloyDB RLS &amp; L1–L5 &amp; 3 Chargeback Models: </a:t>
+              <a:t>• BigQuery &amp; AlloyDB &amp; Central IAM &amp; PAB: </a:t>
             </a:r>
             <a:pPr indent="0" marL="0">
               <a:buNone/>
@@ -10945,7 +10949,7 @@
                 <a:ea typeface="Arial" pitchFamily="34" charset="-122"/>
                 <a:cs typeface="Arial" pitchFamily="34" charset="-120"/>
               </a:rPr>
-              <a:t>Encrypt state at rest with Customer-Managed Encryption Keys and enforce least-privilege access scopes on AlloyDB RLS &amp; L1–L5.</a:t>
+              <a:t>Encrypt state at rest with Customer-Managed Encryption Keys and enforce least-privilege access scopes on BigQuery &amp; AlloyDB.</a:t>
             </a:r>
             <a:endParaRPr lang="en-US" sz="700" dirty="0"/>
           </a:p>
@@ -11075,7 +11079,7 @@
                 <a:ea typeface="Arial" pitchFamily="34" charset="-122"/>
                 <a:cs typeface="Arial" pitchFamily="34" charset="-120"/>
               </a:rPr>
-              <a:t>• External Application Load Balancer &amp; Architecture Selector</a:t>
+              <a:t>• External Application Load Balancer &amp; Gemini Enterprise Catalog</a:t>
             </a:r>
             <a:endParaRPr lang="en-US" sz="710" dirty="0"/>
           </a:p>
@@ -11092,7 +11096,7 @@
                 <a:ea typeface="Arial" pitchFamily="34" charset="-122"/>
                 <a:cs typeface="Arial" pitchFamily="34" charset="-120"/>
               </a:rPr>
-              <a:t>• Thinking Budget Cap &amp; 2LO &amp; 3LO Auth Mgr</a:t>
+              <a:t>• Order Agent (ADK) &amp; Inventory MCP Server</a:t>
             </a:r>
             <a:endParaRPr lang="en-US" sz="710" dirty="0"/>
           </a:p>
@@ -11109,7 +11113,7 @@
                 <a:ea typeface="Arial" pitchFamily="34" charset="-122"/>
                 <a:cs typeface="Arial" pitchFamily="34" charset="-120"/>
               </a:rPr>
-              <a:t>• AlloyDB RLS &amp; L1–L5</a:t>
+              <a:t>• BigQuery &amp; AlloyDB</a:t>
             </a:r>
             <a:endParaRPr lang="en-US" sz="710" dirty="0"/>
           </a:p>
@@ -11175,7 +11179,7 @@
                 <a:ea typeface="Arial" pitchFamily="34" charset="-122"/>
                 <a:cs typeface="Arial" pitchFamily="34" charset="-120"/>
               </a:rPr>
-              <a:t>• External Application Load Balancer &amp; Architecture Selector: </a:t>
+              <a:t>• External Application Load Balancer &amp; Gemini Enterprise Catalog: </a:t>
             </a:r>
             <a:pPr indent="0" marL="0">
               <a:buNone/>
@@ -11189,7 +11193,7 @@
                 <a:ea typeface="Arial" pitchFamily="34" charset="-122"/>
                 <a:cs typeface="Arial" pitchFamily="34" charset="-120"/>
               </a:rPr>
-              <a:t>Deploy Architecture Selector across multi-region serverless Network Endpoint Groups (NEGs) with minimum warm instances to eliminate cold-start latency spikes.
+              <a:t>Deploy Gemini Enterprise Catalog across multi-region serverless Network Endpoint Groups (NEGs) with minimum warm instances to eliminate cold-start latency spikes.
 </a:t>
             </a:r>
             <a:pPr indent="0" marL="0">
@@ -11204,7 +11208,7 @@
                 <a:ea typeface="Arial" pitchFamily="34" charset="-122"/>
                 <a:cs typeface="Arial" pitchFamily="34" charset="-120"/>
               </a:rPr>
-              <a:t>• Thinking Budget Cap &amp; 2LO &amp; 3LO Auth Mgr: </a:t>
+              <a:t>• Order Agent (ADK) &amp; Inventory MCP Server: </a:t>
             </a:r>
             <a:pPr indent="0" marL="0">
               <a:buNone/>
@@ -11218,7 +11222,7 @@
                 <a:ea typeface="Arial" pitchFamily="34" charset="-122"/>
                 <a:cs typeface="Arial" pitchFamily="34" charset="-120"/>
               </a:rPr>
-              <a:t>Enforce bounded retry budgets with exponential backoff, per-tool execution timeouts, and stateless horizontal scaling on 2LO &amp; 3LO Auth Mgr.
+              <a:t>Enforce bounded retry budgets with exponential backoff, per-tool execution timeouts, and stateless horizontal scaling on Inventory MCP Server.
 </a:t>
             </a:r>
             <a:pPr indent="0" marL="0">
@@ -11233,7 +11237,7 @@
                 <a:ea typeface="Arial" pitchFamily="34" charset="-122"/>
                 <a:cs typeface="Arial" pitchFamily="34" charset="-120"/>
               </a:rPr>
-              <a:t>• AlloyDB RLS &amp; L1–L5: </a:t>
+              <a:t>• BigQuery &amp; AlloyDB: </a:t>
             </a:r>
             <a:pPr indent="0" marL="0">
               <a:buNone/>
@@ -11247,7 +11251,7 @@
                 <a:ea typeface="Arial" pitchFamily="34" charset="-122"/>
                 <a:cs typeface="Arial" pitchFamily="34" charset="-120"/>
               </a:rPr>
-              <a:t>Enable regional high availability and Point-in-Time Recovery on AlloyDB RLS &amp; L1–L5 with automated backup verification.</a:t>
+              <a:t>Enable regional high availability and Point-in-Time Recovery on BigQuery &amp; AlloyDB with automated backup verification.</a:t>
             </a:r>
             <a:endParaRPr lang="en-US" sz="700" dirty="0"/>
           </a:p>
@@ -11394,7 +11398,7 @@
                 <a:ea typeface="Arial" pitchFamily="34" charset="-122"/>
                 <a:cs typeface="Arial" pitchFamily="34" charset="-120"/>
               </a:rPr>
-              <a:t>• Security Command Center &amp; BigQuery OTel Sink</a:t>
+              <a:t>• Security Command Center &amp; Cloud Trace &amp; BigQuery</a:t>
             </a:r>
             <a:endParaRPr lang="en-US" sz="710" dirty="0"/>
           </a:p>
@@ -11491,7 +11495,7 @@
                 <a:ea typeface="Arial" pitchFamily="34" charset="-122"/>
                 <a:cs typeface="Arial" pitchFamily="34" charset="-120"/>
               </a:rPr>
-              <a:t>Provision Pattern A: Pooled Unit Economics and Pattern B Silos &amp; Pattern C PSC Spokes spokes through versioned Terraform modules that atomically bind perimeters, IAM roles, and runtime configurations.
+              <a:t>Provision Order &amp; Inventory Domain Agent and Distributor &amp; Tracking Domain Agent spokes through versioned Terraform modules that atomically bind perimeters, IAM roles, and runtime configurations.
 </a:t>
             </a:r>
             <a:pPr indent="0" marL="0">
@@ -11506,7 +11510,7 @@
                 <a:ea typeface="Arial" pitchFamily="34" charset="-122"/>
                 <a:cs typeface="Arial" pitchFamily="34" charset="-120"/>
               </a:rPr>
-              <a:t>• Security Command Center &amp; BigQuery OTel Sink: </a:t>
+              <a:t>• Security Command Center &amp; Cloud Trace &amp; BigQuery: </a:t>
             </a:r>
             <a:pPr indent="0" marL="0">
               <a:buNone/>
@@ -11520,7 +11524,7 @@
                 <a:ea typeface="Arial" pitchFamily="34" charset="-122"/>
                 <a:cs typeface="Arial" pitchFamily="34" charset="-120"/>
               </a:rPr>
-              <a:t>Stream structured OpenTelemetry traces and zero-PII audit logs to BigQuery OTel Sink and monitor posture drift in Security Command Center.
+              <a:t>Stream structured OpenTelemetry traces and zero-PII audit logs to Cloud Trace &amp; BigQuery and monitor posture drift in Security Command Center.
 </a:t>
             </a:r>
             <a:pPr indent="0" marL="0">
@@ -11679,7 +11683,7 @@
                 <a:ea typeface="Arial" pitchFamily="34" charset="-122"/>
                 <a:cs typeface="Arial" pitchFamily="34" charset="-120"/>
               </a:rPr>
-              <a:t>• ContextCacheConfig Context Caching</a:t>
+              <a:t>• Gemini 2.5 Pro Context Caching</a:t>
             </a:r>
             <a:endParaRPr lang="en-US" sz="710" dirty="0"/>
           </a:p>
@@ -11696,7 +11700,7 @@
                 <a:ea typeface="Arial" pitchFamily="34" charset="-122"/>
                 <a:cs typeface="Arial" pitchFamily="34" charset="-120"/>
               </a:rPr>
-              <a:t>• Hop 2: Catalog PDP &amp; 2LO &amp; 3LO Auth Mgr</a:t>
+              <a:t>• OBO + DPoP Broker &amp; Inventory MCP Server</a:t>
             </a:r>
             <a:endParaRPr lang="en-US" sz="710" dirty="0"/>
           </a:p>
@@ -11713,7 +11717,7 @@
                 <a:ea typeface="Arial" pitchFamily="34" charset="-122"/>
                 <a:cs typeface="Arial" pitchFamily="34" charset="-120"/>
               </a:rPr>
-              <a:t>• BigQuery OTel Sink FinOps Attribution</a:t>
+              <a:t>• Cloud Trace &amp; BigQuery FinOps Attribution</a:t>
             </a:r>
             <a:endParaRPr lang="en-US" sz="710" dirty="0"/>
           </a:p>
@@ -11779,7 +11783,7 @@
                 <a:ea typeface="Arial" pitchFamily="34" charset="-122"/>
                 <a:cs typeface="Arial" pitchFamily="34" charset="-120"/>
               </a:rPr>
-              <a:t>• ContextCacheConfig Context Caching: </a:t>
+              <a:t>• Gemini 2.5 Pro Context Caching: </a:t>
             </a:r>
             <a:pPr indent="0" marL="0">
               <a:buNone/>
@@ -11808,7 +11812,7 @@
                 <a:ea typeface="Arial" pitchFamily="34" charset="-122"/>
                 <a:cs typeface="Arial" pitchFamily="34" charset="-120"/>
               </a:rPr>
-              <a:t>• Hop 2: Catalog PDP &amp; 2LO &amp; 3LO Auth Mgr: </a:t>
+              <a:t>• OBO + DPoP Broker &amp; Inventory MCP Server: </a:t>
             </a:r>
             <a:pPr indent="0" marL="0">
               <a:buNone/>
@@ -11837,7 +11841,7 @@
                 <a:ea typeface="Arial" pitchFamily="34" charset="-122"/>
                 <a:cs typeface="Arial" pitchFamily="34" charset="-120"/>
               </a:rPr>
-              <a:t>• BigQuery OTel Sink FinOps Attribution: </a:t>
+              <a:t>• Cloud Trace &amp; BigQuery FinOps Attribution: </a:t>
             </a:r>
             <a:pPr indent="0" marL="0">
               <a:buNone/>

--- a/slides/doc-ref-09-editable-slides.pptx
+++ b/slides/doc-ref-09-editable-slides.pptx
@@ -507,7 +507,21 @@
           <a:p>
             <a:r>
               <a:rPr lang="en-US" dirty="0"/>
-              <a:t/>
+              <a:t>Welcome everyone. In this six-slide executive and technical briefing, we are walking through Design Patterns for Scalable Multi-Agent Ecosystems: Vertex AI Agent Engine, MCP &amp; A2A.</a:t>
+            </a:r>
+            <a:endParaRPr lang="en-US" dirty="0"/>
+          </a:p>
+          <a:p>
+            <a:r>
+              <a:rPr lang="en-US" dirty="0"/>
+              <a:t>In this session, we look at how enterprise teams scale from a single AI chatbot to a coordinated ecosystem of specialized agents—using Vertex AI Agent Engine for managed runtime orchestration, the Model Context Protocol (MCP) for standardized enterprise tool access, and the Agent-to-Agent (A2A) protocol for governed delegation.</a:t>
+            </a:r>
+            <a:endParaRPr lang="en-US" dirty="0"/>
+          </a:p>
+          <a:p>
+            <a:r>
+              <a:rPr lang="en-US" dirty="0"/>
+              <a:t>With our business goal and architectural thesis set, let's turn to Slide 2 to examine the complete Figure 1 Google Cloud Hub-and-Spoke blueprint.</a:t>
             </a:r>
             <a:endParaRPr lang="en-US" dirty="0"/>
           </a:p>
@@ -595,7 +609,21 @@
           <a:p>
             <a:r>
               <a:rPr lang="en-US" dirty="0"/>
-              <a:t/>
+              <a:t>Building on the executive overview we just covered on Slide 1, this diagram gives us the complete end-to-end physical map of the system on Google Cloud.</a:t>
+            </a:r>
+            <a:endParaRPr lang="en-US" dirty="0"/>
+          </a:p>
+          <a:p>
+            <a:r>
+              <a:rPr lang="en-US" dirty="0"/>
+              <a:t>Figure 1 shows our complete Google Cloud physical blueprint for multi-agent orchestration. Requests enter the blue Routing Hub, get routed to a Supervisor Agent inside the green Governance Hub on Vertex AI Agent Engine, and delegate specialized tasks across the bottom spokes using signed A2A agent cards and governed MCP tool servers connected to BigQuery, AlloyDB, and third-party SaaS.</a:t>
+            </a:r>
+            <a:endParaRPr lang="en-US" dirty="0"/>
+          </a:p>
+          <a:p>
+            <a:r>
+              <a:rPr lang="en-US" dirty="0"/>
+              <a:t>Now that we see where each component sits in Figure 1, let's move to Slide 3 to walk through how a live request flows across these services step by step.</a:t>
             </a:r>
             <a:endParaRPr lang="en-US" dirty="0"/>
           </a:p>
@@ -683,7 +711,21 @@
           <a:p>
             <a:r>
               <a:rPr lang="en-US" dirty="0"/>
-              <a:t/>
+              <a:t>Taking the physical components from the Figure 1 blueprint on Slide 2, this slide unpacks the exact step-by-step runtime workflow.</a:t>
+            </a:r>
+            <a:endParaRPr lang="en-US" dirty="0"/>
+          </a:p>
+          <a:p>
+            <a:r>
+              <a:rPr lang="en-US" dirty="0"/>
+              <a:t>Walking through the six-step choreography on this slide illustrates how context and security travel across multiple agents. When the Supervisor Agent delegates a sub-task over A2A or calls an MCP tool, it passes a scoped identity token, a shared distributed trace ID, and a strict token budget—ensuring specialist agents collaborate cleanly without losing user permissions or entering infinite loops.</a:t>
+            </a:r>
+            <a:endParaRPr lang="en-US" dirty="0"/>
+          </a:p>
+          <a:p>
+            <a:r>
+              <a:rPr lang="en-US" dirty="0"/>
+              <a:t>Having seen how the components interact step by step on Slide 3, let's turn to Slide 4 to see how this architecture solves a concrete enterprise customer use case.</a:t>
             </a:r>
             <a:endParaRPr lang="en-US" dirty="0"/>
           </a:p>
@@ -771,7 +813,21 @@
           <a:p>
             <a:r>
               <a:rPr lang="en-US" dirty="0"/>
-              <a:t/>
+              <a:t>Following our step-by-step technical workflow on Slide 3, this slide connects the architecture directly to tangible business value and the managed Google Cloud services that power it.</a:t>
+            </a:r>
+            <a:endParaRPr lang="en-US" dirty="0"/>
+          </a:p>
+          <a:p>
+            <a:r>
+              <a:rPr lang="en-US" dirty="0"/>
+              <a:t>This slide connects our multi-agent architecture to a real enterprise operations workflow—showing how a Supervisor Agent coordinates an Incident Diagnostic Agent, a Database Analytics Agent, and a Ticketing Agent in parallel to resolve complex cross-department workflows in seconds rather than hours.</a:t>
+            </a:r>
+            <a:endParaRPr lang="en-US" dirty="0"/>
+          </a:p>
+          <a:p>
+            <a:r>
+              <a:rPr lang="en-US" dirty="0"/>
+              <a:t>Once business and technical leaders see how the use case works on Slide 4, the natural next question is: how does this compare to alternative designs, and what are the trade-offs? Let's look at Slide 5.</a:t>
             </a:r>
             <a:endParaRPr lang="en-US" dirty="0"/>
           </a:p>
@@ -859,7 +915,21 @@
           <a:p>
             <a:r>
               <a:rPr lang="en-US" dirty="0"/>
-              <a:t/>
+              <a:t>Building on the customer use case from Slide 4, this slide evaluates our architectural trade-offs so decision-makers have full confidence in why this design is recommended.</a:t>
+            </a:r>
+            <a:endParaRPr lang="en-US" dirty="0"/>
+          </a:p>
+          <a:p>
+            <a:r>
+              <a:rPr lang="en-US" dirty="0"/>
+              <a:t>Here we compare the three primary multi-agent orchestration topologies—Hierarchical Supervisor, Sequential Pipeline, and Peer-to-Peer Mesh—so your architects know exactly which pattern to choose based on workflow determinism, latency budgets, and governance requirements.</a:t>
+            </a:r>
+            <a:endParaRPr lang="en-US" dirty="0"/>
+          </a:p>
+          <a:p>
+            <a:r>
+              <a:rPr lang="en-US" dirty="0"/>
+              <a:t>With the architectural trade-offs clear here on Slide 5, let's turn to our final slide—Slide 6—to walk through the deployment checklist and next steps.</a:t>
             </a:r>
             <a:endParaRPr lang="en-US" dirty="0"/>
           </a:p>
@@ -947,7 +1017,21 @@
           <a:p>
             <a:r>
               <a:rPr lang="en-US" dirty="0"/>
-              <a:t/>
+              <a:t>Rounding out the design trade-offs from Slide 5, our closing slide transitions from architecture into hands-on production deployment.</a:t>
+            </a:r>
+            <a:endParaRPr lang="en-US" dirty="0"/>
+          </a:p>
+          <a:p>
+            <a:r>
+              <a:rPr lang="en-US" dirty="0"/>
+              <a:t>Finally, here is the deployment runbook for registering A2A agent cards, exposing governed MCP tool endpoints, and launching your multi-agent ecosystem on Vertex AI Agent Engine.</a:t>
+            </a:r>
+            <a:endParaRPr lang="en-US" dirty="0"/>
+          </a:p>
+          <a:p>
+            <a:r>
+              <a:rPr lang="en-US" dirty="0"/>
+              <a:t>That concludes our six-slide briefing—let's open the floor for your questions or launch the interactive codebase workbench to inspect the implementation files directly.</a:t>
             </a:r>
             <a:endParaRPr lang="en-US" dirty="0"/>
           </a:p>

--- a/slides/doc-ref-09-editable-slides.pptx
+++ b/slides/doc-ref-09-editable-slides.pptx
@@ -9635,7 +9635,7 @@
                 <a:ea typeface="Arial" pitchFamily="34" charset="-122"/>
                 <a:cs typeface="Arial" pitchFamily="34" charset="-120"/>
               </a:rPr>
-              <a:t>•  Google ADK 2.0: </a:t>
+              <a:t>•  Google ADK: </a:t>
             </a:r>
             <a:pPr indent="0" marL="0">
               <a:lnSpc>

--- a/slides/doc-ref-09-editable-slides.pptx
+++ b/slides/doc-ref-09-editable-slides.pptx
@@ -2546,7 +2546,7 @@
               <a:buNone/>
             </a:pPr>
             <a:r>
-              <a:rPr lang="en-US" sz="450" dirty="0">
+              <a:rPr lang="en-US" sz="450" b="1" dirty="0">
                 <a:solidFill>
                   <a:srgbClr val="202124"/>
                 </a:solidFill>
@@ -2637,7 +2637,7 @@
               <a:buNone/>
             </a:pPr>
             <a:r>
-              <a:rPr lang="en-US" sz="450" dirty="0">
+              <a:rPr lang="en-US" sz="450" b="1" dirty="0">
                 <a:solidFill>
                   <a:srgbClr val="202124"/>
                 </a:solidFill>
@@ -2728,7 +2728,7 @@
               <a:buNone/>
             </a:pPr>
             <a:r>
-              <a:rPr lang="en-US" sz="410" dirty="0">
+              <a:rPr lang="en-US" sz="410" b="1" dirty="0">
                 <a:solidFill>
                   <a:srgbClr val="202124"/>
                 </a:solidFill>
@@ -12569,7 +12569,7 @@
                 <a:ea typeface="Courier New" pitchFamily="34" charset="-122"/>
                 <a:cs typeface="Courier New" pitchFamily="34" charset="-120"/>
               </a:rPr>
-              <a:t>    model="gemini-2.5-pro",</a:t>
+              <a:t>    model="gemini-3.1-pro-preview",</a:t>
             </a:r>
             <a:endParaRPr lang="en-US" sz="690" dirty="0"/>
           </a:p>

--- a/slides/doc-ref-09-editable-slides.pptx
+++ b/slides/doc-ref-09-editable-slides.pptx
@@ -9757,7 +9757,7 @@
                 <a:ea typeface="Arial" pitchFamily="34" charset="-122"/>
                 <a:cs typeface="Arial" pitchFamily="34" charset="-120"/>
               </a:rPr>
-              <a:t>Core Google Cloud service used in DOC-REF-09 to enforce production security, scalability, and observability.</a:t>
+              <a:t>Enterprise agent control plane unifying agent discovery, Workforce Identity Federation, and governed multi-agent workflows.</a:t>
             </a:r>
             <a:endParaRPr lang="en-US" sz="810" dirty="0"/>
           </a:p>
@@ -12329,309 +12329,307 @@
           <a:ln/>
         </p:spPr>
         <p:txBody>
-          <a:bodyPr wrap="square" rtlCol="0" anchor="t">
-            <a:normAutofit/>
-          </a:bodyPr>
-          <a:lstStyle/>
-          <a:p>
-            <a:pPr indent="0" marL="0">
-              <a:lnSpc>
-                <a:spcPct val="106000"/>
-              </a:lnSpc>
-              <a:buNone/>
-            </a:pPr>
-            <a:r>
-              <a:rPr lang="en-US" sz="690" dirty="0">
-                <a:solidFill>
-                  <a:srgbClr val="202124"/>
-                </a:solidFill>
-                <a:latin typeface="Courier New" pitchFamily="34" charset="0"/>
-                <a:ea typeface="Courier New" pitchFamily="34" charset="-122"/>
-                <a:cs typeface="Courier New" pitchFamily="34" charset="-120"/>
+          <a:bodyPr wrap="square" lIns="0" tIns="0" rIns="0" bIns="0" rtlCol="0" anchor="t"/>
+          <a:lstStyle/>
+          <a:p>
+            <a:pPr indent="0" marL="0">
+              <a:lnSpc>
+                <a:spcPct val="108000"/>
+              </a:lnSpc>
+              <a:buNone/>
+            </a:pPr>
+            <a:r>
+              <a:rPr lang="en-US" sz="680" dirty="0">
+                <a:solidFill>
+                  <a:srgbClr val="188038"/>
+                </a:solidFill>
+                <a:latin typeface="Roboto Mono" pitchFamily="34" charset="0"/>
+                <a:ea typeface="Roboto Mono" pitchFamily="34" charset="-122"/>
+                <a:cs typeface="Roboto Mono" pitchFamily="34" charset="-120"/>
               </a:rPr>
               <a:t>from google.adk.agents import LlmAgent</a:t>
             </a:r>
-            <a:endParaRPr lang="en-US" sz="690" dirty="0"/>
-          </a:p>
-          <a:p>
-            <a:pPr indent="0" marL="0">
-              <a:lnSpc>
-                <a:spcPct val="106000"/>
-              </a:lnSpc>
-              <a:buNone/>
-            </a:pPr>
-            <a:r>
-              <a:rPr lang="en-US" sz="690" dirty="0">
-                <a:solidFill>
-                  <a:srgbClr val="202124"/>
-                </a:solidFill>
-                <a:latin typeface="Courier New" pitchFamily="34" charset="0"/>
-                <a:ea typeface="Courier New" pitchFamily="34" charset="-122"/>
-                <a:cs typeface="Courier New" pitchFamily="34" charset="-120"/>
+            <a:endParaRPr lang="en-US" sz="680" dirty="0"/>
+          </a:p>
+          <a:p>
+            <a:pPr indent="0" marL="0">
+              <a:lnSpc>
+                <a:spcPct val="108000"/>
+              </a:lnSpc>
+              <a:buNone/>
+            </a:pPr>
+            <a:r>
+              <a:rPr lang="en-US" sz="680" dirty="0">
+                <a:solidFill>
+                  <a:srgbClr val="188038"/>
+                </a:solidFill>
+                <a:latin typeface="Roboto Mono" pitchFamily="34" charset="0"/>
+                <a:ea typeface="Roboto Mono" pitchFamily="34" charset="-122"/>
+                <a:cs typeface="Roboto Mono" pitchFamily="34" charset="-120"/>
               </a:rPr>
               <a:t>from google.adk.tools.mcp_tool import MCPToolset, SseServerParams</a:t>
             </a:r>
-            <a:endParaRPr lang="en-US" sz="690" dirty="0"/>
-          </a:p>
-          <a:p>
-            <a:pPr indent="0" marL="0">
-              <a:lnSpc>
-                <a:spcPct val="106000"/>
-              </a:lnSpc>
-              <a:buNone/>
-            </a:pPr>
-            <a:r>
-              <a:rPr lang="en-US" sz="690" dirty="0">
-                <a:solidFill>
-                  <a:srgbClr val="202124"/>
-                </a:solidFill>
-                <a:latin typeface="Courier New" pitchFamily="34" charset="0"/>
-                <a:ea typeface="Courier New" pitchFamily="34" charset="-122"/>
-                <a:cs typeface="Courier New" pitchFamily="34" charset="-120"/>
+            <a:endParaRPr lang="en-US" sz="680" dirty="0"/>
+          </a:p>
+          <a:p>
+            <a:pPr indent="0" marL="0">
+              <a:lnSpc>
+                <a:spcPct val="108000"/>
+              </a:lnSpc>
+              <a:buNone/>
+            </a:pPr>
+            <a:r>
+              <a:rPr lang="en-US" sz="680" dirty="0">
+                <a:solidFill>
+                  <a:srgbClr val="188038"/>
+                </a:solidFill>
+                <a:latin typeface="Roboto Mono" pitchFamily="34" charset="0"/>
+                <a:ea typeface="Roboto Mono" pitchFamily="34" charset="-122"/>
+                <a:cs typeface="Roboto Mono" pitchFamily="34" charset="-120"/>
               </a:rPr>
               <a:t># Connect Order Agent to Stateless Cloud Run MCP Server with OBO+DPoP headers</a:t>
             </a:r>
-            <a:endParaRPr lang="en-US" sz="690" dirty="0"/>
-          </a:p>
-          <a:p>
-            <a:pPr indent="0" marL="0">
-              <a:lnSpc>
-                <a:spcPct val="106000"/>
-              </a:lnSpc>
-              <a:buNone/>
-            </a:pPr>
-            <a:r>
-              <a:rPr lang="en-US" sz="690" dirty="0">
-                <a:solidFill>
-                  <a:srgbClr val="202124"/>
-                </a:solidFill>
-                <a:latin typeface="Courier New" pitchFamily="34" charset="0"/>
-                <a:ea typeface="Courier New" pitchFamily="34" charset="-122"/>
-                <a:cs typeface="Courier New" pitchFamily="34" charset="-120"/>
+            <a:endParaRPr lang="en-US" sz="680" dirty="0"/>
+          </a:p>
+          <a:p>
+            <a:pPr indent="0" marL="0">
+              <a:lnSpc>
+                <a:spcPct val="108000"/>
+              </a:lnSpc>
+              <a:buNone/>
+            </a:pPr>
+            <a:r>
+              <a:rPr lang="en-US" sz="680" dirty="0">
+                <a:solidFill>
+                  <a:srgbClr val="188038"/>
+                </a:solidFill>
+                <a:latin typeface="Roboto Mono" pitchFamily="34" charset="0"/>
+                <a:ea typeface="Roboto Mono" pitchFamily="34" charset="-122"/>
+                <a:cs typeface="Roboto Mono" pitchFamily="34" charset="-120"/>
               </a:rPr>
               <a:t>inventory_mcp_tools = MCPToolset(</a:t>
             </a:r>
-            <a:endParaRPr lang="en-US" sz="690" dirty="0"/>
-          </a:p>
-          <a:p>
-            <a:pPr indent="0" marL="0">
-              <a:lnSpc>
-                <a:spcPct val="106000"/>
-              </a:lnSpc>
-              <a:buNone/>
-            </a:pPr>
-            <a:r>
-              <a:rPr lang="en-US" sz="690" dirty="0">
-                <a:solidFill>
-                  <a:srgbClr val="202124"/>
-                </a:solidFill>
-                <a:latin typeface="Courier New" pitchFamily="34" charset="0"/>
-                <a:ea typeface="Courier New" pitchFamily="34" charset="-122"/>
-                <a:cs typeface="Courier New" pitchFamily="34" charset="-120"/>
-              </a:rPr>
-              <a:t>    connection_params=SseServerParams(</a:t>
-            </a:r>
-            <a:endParaRPr lang="en-US" sz="690" dirty="0"/>
-          </a:p>
-          <a:p>
-            <a:pPr indent="0" marL="0">
-              <a:lnSpc>
-                <a:spcPct val="106000"/>
-              </a:lnSpc>
-              <a:buNone/>
-            </a:pPr>
-            <a:r>
-              <a:rPr lang="en-US" sz="690" dirty="0">
-                <a:solidFill>
-                  <a:srgbClr val="202124"/>
-                </a:solidFill>
-                <a:latin typeface="Courier New" pitchFamily="34" charset="0"/>
-                <a:ea typeface="Courier New" pitchFamily="34" charset="-122"/>
-                <a:cs typeface="Courier New" pitchFamily="34" charset="-120"/>
-              </a:rPr>
-              <a:t>        url="https://inventory-mcp-server-uc.a.run.app/sse",</a:t>
-            </a:r>
-            <a:endParaRPr lang="en-US" sz="690" dirty="0"/>
-          </a:p>
-          <a:p>
-            <a:pPr indent="0" marL="0">
-              <a:lnSpc>
-                <a:spcPct val="106000"/>
-              </a:lnSpc>
-              <a:buNone/>
-            </a:pPr>
-            <a:r>
-              <a:rPr lang="en-US" sz="690" dirty="0">
-                <a:solidFill>
-                  <a:srgbClr val="202124"/>
-                </a:solidFill>
-                <a:latin typeface="Courier New" pitchFamily="34" charset="0"/>
-                <a:ea typeface="Courier New" pitchFamily="34" charset="-122"/>
-                <a:cs typeface="Courier New" pitchFamily="34" charset="-120"/>
-              </a:rPr>
-              <a:t>        headers={"Authorization": f"DPoP {obo_intent_token}", "DPoP": dpop_proof_jwt},</a:t>
-            </a:r>
-            <a:endParaRPr lang="en-US" sz="690" dirty="0"/>
-          </a:p>
-          <a:p>
-            <a:pPr indent="0" marL="0">
-              <a:lnSpc>
-                <a:spcPct val="106000"/>
-              </a:lnSpc>
-              <a:buNone/>
-            </a:pPr>
-            <a:r>
-              <a:rPr lang="en-US" sz="690" dirty="0">
-                <a:solidFill>
-                  <a:srgbClr val="202124"/>
-                </a:solidFill>
-                <a:latin typeface="Courier New" pitchFamily="34" charset="0"/>
-                <a:ea typeface="Courier New" pitchFamily="34" charset="-122"/>
-                <a:cs typeface="Courier New" pitchFamily="34" charset="-120"/>
-              </a:rPr>
-              <a:t>    )</a:t>
-            </a:r>
-            <a:endParaRPr lang="en-US" sz="690" dirty="0"/>
-          </a:p>
-          <a:p>
-            <a:pPr indent="0" marL="0">
-              <a:lnSpc>
-                <a:spcPct val="106000"/>
-              </a:lnSpc>
-              <a:buNone/>
-            </a:pPr>
-            <a:r>
-              <a:rPr lang="en-US" sz="690" dirty="0">
-                <a:solidFill>
-                  <a:srgbClr val="202124"/>
-                </a:solidFill>
-                <a:latin typeface="Courier New" pitchFamily="34" charset="0"/>
-                <a:ea typeface="Courier New" pitchFamily="34" charset="-122"/>
-                <a:cs typeface="Courier New" pitchFamily="34" charset="-120"/>
+            <a:endParaRPr lang="en-US" sz="680" dirty="0"/>
+          </a:p>
+          <a:p>
+            <a:pPr indent="0" marL="0">
+              <a:lnSpc>
+                <a:spcPct val="108000"/>
+              </a:lnSpc>
+              <a:buNone/>
+            </a:pPr>
+            <a:r>
+              <a:rPr lang="en-US" sz="680" dirty="0">
+                <a:solidFill>
+                  <a:srgbClr val="188038"/>
+                </a:solidFill>
+                <a:latin typeface="Roboto Mono" pitchFamily="34" charset="0"/>
+                <a:ea typeface="Roboto Mono" pitchFamily="34" charset="-122"/>
+                <a:cs typeface="Roboto Mono" pitchFamily="34" charset="-120"/>
+              </a:rPr>
+              <a:t>    connection_params=SseServerParams(</a:t>
+            </a:r>
+            <a:endParaRPr lang="en-US" sz="680" dirty="0"/>
+          </a:p>
+          <a:p>
+            <a:pPr indent="0" marL="0">
+              <a:lnSpc>
+                <a:spcPct val="108000"/>
+              </a:lnSpc>
+              <a:buNone/>
+            </a:pPr>
+            <a:r>
+              <a:rPr lang="en-US" sz="680" dirty="0">
+                <a:solidFill>
+                  <a:srgbClr val="188038"/>
+                </a:solidFill>
+                <a:latin typeface="Roboto Mono" pitchFamily="34" charset="0"/>
+                <a:ea typeface="Roboto Mono" pitchFamily="34" charset="-122"/>
+                <a:cs typeface="Roboto Mono" pitchFamily="34" charset="-120"/>
+              </a:rPr>
+              <a:t>        url="https://inventory-mcp-server-uc.a.run.app/sse",</a:t>
+            </a:r>
+            <a:endParaRPr lang="en-US" sz="680" dirty="0"/>
+          </a:p>
+          <a:p>
+            <a:pPr indent="0" marL="0">
+              <a:lnSpc>
+                <a:spcPct val="108000"/>
+              </a:lnSpc>
+              <a:buNone/>
+            </a:pPr>
+            <a:r>
+              <a:rPr lang="en-US" sz="680" dirty="0">
+                <a:solidFill>
+                  <a:srgbClr val="188038"/>
+                </a:solidFill>
+                <a:latin typeface="Roboto Mono" pitchFamily="34" charset="0"/>
+                <a:ea typeface="Roboto Mono" pitchFamily="34" charset="-122"/>
+                <a:cs typeface="Roboto Mono" pitchFamily="34" charset="-120"/>
+              </a:rPr>
+              <a:t>        headers={"Authorization": f"DPoP {obo_intent_token}", "DPoP": dpop_proof_jwt},</a:t>
+            </a:r>
+            <a:endParaRPr lang="en-US" sz="680" dirty="0"/>
+          </a:p>
+          <a:p>
+            <a:pPr indent="0" marL="0">
+              <a:lnSpc>
+                <a:spcPct val="108000"/>
+              </a:lnSpc>
+              <a:buNone/>
+            </a:pPr>
+            <a:r>
+              <a:rPr lang="en-US" sz="680" dirty="0">
+                <a:solidFill>
+                  <a:srgbClr val="188038"/>
+                </a:solidFill>
+                <a:latin typeface="Roboto Mono" pitchFamily="34" charset="0"/>
+                <a:ea typeface="Roboto Mono" pitchFamily="34" charset="-122"/>
+                <a:cs typeface="Roboto Mono" pitchFamily="34" charset="-120"/>
+              </a:rPr>
+              <a:t>    )</a:t>
+            </a:r>
+            <a:endParaRPr lang="en-US" sz="680" dirty="0"/>
+          </a:p>
+          <a:p>
+            <a:pPr indent="0" marL="0">
+              <a:lnSpc>
+                <a:spcPct val="108000"/>
+              </a:lnSpc>
+              <a:buNone/>
+            </a:pPr>
+            <a:r>
+              <a:rPr lang="en-US" sz="680" dirty="0">
+                <a:solidFill>
+                  <a:srgbClr val="188038"/>
+                </a:solidFill>
+                <a:latin typeface="Roboto Mono" pitchFamily="34" charset="0"/>
+                <a:ea typeface="Roboto Mono" pitchFamily="34" charset="-122"/>
+                <a:cs typeface="Roboto Mono" pitchFamily="34" charset="-120"/>
               </a:rPr>
               <a:t>)</a:t>
             </a:r>
-            <a:endParaRPr lang="en-US" sz="690" dirty="0"/>
-          </a:p>
-          <a:p>
-            <a:pPr indent="0" marL="0">
-              <a:lnSpc>
-                <a:spcPct val="106000"/>
-              </a:lnSpc>
-              <a:buNone/>
-            </a:pPr>
-            <a:r>
-              <a:rPr lang="en-US" sz="690" dirty="0">
-                <a:solidFill>
-                  <a:srgbClr val="202124"/>
-                </a:solidFill>
-                <a:latin typeface="Courier New" pitchFamily="34" charset="0"/>
-                <a:ea typeface="Courier New" pitchFamily="34" charset="-122"/>
-                <a:cs typeface="Courier New" pitchFamily="34" charset="-120"/>
+            <a:endParaRPr lang="en-US" sz="680" dirty="0"/>
+          </a:p>
+          <a:p>
+            <a:pPr indent="0" marL="0">
+              <a:lnSpc>
+                <a:spcPct val="108000"/>
+              </a:lnSpc>
+              <a:buNone/>
+            </a:pPr>
+            <a:r>
+              <a:rPr lang="en-US" sz="680" dirty="0">
+                <a:solidFill>
+                  <a:srgbClr val="188038"/>
+                </a:solidFill>
+                <a:latin typeface="Roboto Mono" pitchFamily="34" charset="0"/>
+                <a:ea typeface="Roboto Mono" pitchFamily="34" charset="-122"/>
+                <a:cs typeface="Roboto Mono" pitchFamily="34" charset="-120"/>
               </a:rPr>
               <a:t>order_agent = LlmAgent(</a:t>
             </a:r>
-            <a:endParaRPr lang="en-US" sz="690" dirty="0"/>
-          </a:p>
-          <a:p>
-            <a:pPr indent="0" marL="0">
-              <a:lnSpc>
-                <a:spcPct val="106000"/>
-              </a:lnSpc>
-              <a:buNone/>
-            </a:pPr>
-            <a:r>
-              <a:rPr lang="en-US" sz="690" dirty="0">
-                <a:solidFill>
-                  <a:srgbClr val="202124"/>
-                </a:solidFill>
-                <a:latin typeface="Courier New" pitchFamily="34" charset="0"/>
-                <a:ea typeface="Courier New" pitchFamily="34" charset="-122"/>
-                <a:cs typeface="Courier New" pitchFamily="34" charset="-120"/>
-              </a:rPr>
-              <a:t>    name="order_inventory_agent",</a:t>
-            </a:r>
-            <a:endParaRPr lang="en-US" sz="690" dirty="0"/>
-          </a:p>
-          <a:p>
-            <a:pPr indent="0" marL="0">
-              <a:lnSpc>
-                <a:spcPct val="106000"/>
-              </a:lnSpc>
-              <a:buNone/>
-            </a:pPr>
-            <a:r>
-              <a:rPr lang="en-US" sz="690" dirty="0">
-                <a:solidFill>
-                  <a:srgbClr val="202124"/>
-                </a:solidFill>
-                <a:latin typeface="Courier New" pitchFamily="34" charset="0"/>
-                <a:ea typeface="Courier New" pitchFamily="34" charset="-122"/>
-                <a:cs typeface="Courier New" pitchFamily="34" charset="-120"/>
-              </a:rPr>
-              <a:t>    model="gemini-3.1-pro-preview",</a:t>
-            </a:r>
-            <a:endParaRPr lang="en-US" sz="690" dirty="0"/>
-          </a:p>
-          <a:p>
-            <a:pPr indent="0" marL="0">
-              <a:lnSpc>
-                <a:spcPct val="106000"/>
-              </a:lnSpc>
-              <a:buNone/>
-            </a:pPr>
-            <a:r>
-              <a:rPr lang="en-US" sz="690" dirty="0">
-                <a:solidFill>
-                  <a:srgbClr val="202124"/>
-                </a:solidFill>
-                <a:latin typeface="Courier New" pitchFamily="34" charset="0"/>
-                <a:ea typeface="Courier New" pitchFamily="34" charset="-122"/>
-                <a:cs typeface="Courier New" pitchFamily="34" charset="-120"/>
-              </a:rPr>
-              <a:t>    instruction="Check regional BigQuery warehouse stock via MCP and reserve safety stock.",</a:t>
-            </a:r>
-            <a:endParaRPr lang="en-US" sz="690" dirty="0"/>
-          </a:p>
-          <a:p>
-            <a:pPr indent="0" marL="0">
-              <a:lnSpc>
-                <a:spcPct val="106000"/>
-              </a:lnSpc>
-              <a:buNone/>
-            </a:pPr>
-            <a:r>
-              <a:rPr lang="en-US" sz="690" dirty="0">
-                <a:solidFill>
-                  <a:srgbClr val="202124"/>
-                </a:solidFill>
-                <a:latin typeface="Courier New" pitchFamily="34" charset="0"/>
-                <a:ea typeface="Courier New" pitchFamily="34" charset="-122"/>
-                <a:cs typeface="Courier New" pitchFamily="34" charset="-120"/>
-              </a:rPr>
-              <a:t>    tools=[inventory_mcp_tools],</a:t>
-            </a:r>
-            <a:endParaRPr lang="en-US" sz="690" dirty="0"/>
-          </a:p>
-          <a:p>
-            <a:pPr indent="0" marL="0">
-              <a:lnSpc>
-                <a:spcPct val="106000"/>
-              </a:lnSpc>
-              <a:buNone/>
-            </a:pPr>
-            <a:r>
-              <a:rPr lang="en-US" sz="690" dirty="0">
-                <a:solidFill>
-                  <a:srgbClr val="202124"/>
-                </a:solidFill>
-                <a:latin typeface="Courier New" pitchFamily="34" charset="0"/>
-                <a:ea typeface="Courier New" pitchFamily="34" charset="-122"/>
-                <a:cs typeface="Courier New" pitchFamily="34" charset="-120"/>
+            <a:endParaRPr lang="en-US" sz="680" dirty="0"/>
+          </a:p>
+          <a:p>
+            <a:pPr indent="0" marL="0">
+              <a:lnSpc>
+                <a:spcPct val="108000"/>
+              </a:lnSpc>
+              <a:buNone/>
+            </a:pPr>
+            <a:r>
+              <a:rPr lang="en-US" sz="680" dirty="0">
+                <a:solidFill>
+                  <a:srgbClr val="188038"/>
+                </a:solidFill>
+                <a:latin typeface="Roboto Mono" pitchFamily="34" charset="0"/>
+                <a:ea typeface="Roboto Mono" pitchFamily="34" charset="-122"/>
+                <a:cs typeface="Roboto Mono" pitchFamily="34" charset="-120"/>
+              </a:rPr>
+              <a:t>    name="order_inventory_agent",</a:t>
+            </a:r>
+            <a:endParaRPr lang="en-US" sz="680" dirty="0"/>
+          </a:p>
+          <a:p>
+            <a:pPr indent="0" marL="0">
+              <a:lnSpc>
+                <a:spcPct val="108000"/>
+              </a:lnSpc>
+              <a:buNone/>
+            </a:pPr>
+            <a:r>
+              <a:rPr lang="en-US" sz="680" dirty="0">
+                <a:solidFill>
+                  <a:srgbClr val="188038"/>
+                </a:solidFill>
+                <a:latin typeface="Roboto Mono" pitchFamily="34" charset="0"/>
+                <a:ea typeface="Roboto Mono" pitchFamily="34" charset="-122"/>
+                <a:cs typeface="Roboto Mono" pitchFamily="34" charset="-120"/>
+              </a:rPr>
+              <a:t>    model="gemini-2.5-pro",</a:t>
+            </a:r>
+            <a:endParaRPr lang="en-US" sz="680" dirty="0"/>
+          </a:p>
+          <a:p>
+            <a:pPr indent="0" marL="0">
+              <a:lnSpc>
+                <a:spcPct val="108000"/>
+              </a:lnSpc>
+              <a:buNone/>
+            </a:pPr>
+            <a:r>
+              <a:rPr lang="en-US" sz="680" dirty="0">
+                <a:solidFill>
+                  <a:srgbClr val="188038"/>
+                </a:solidFill>
+                <a:latin typeface="Roboto Mono" pitchFamily="34" charset="0"/>
+                <a:ea typeface="Roboto Mono" pitchFamily="34" charset="-122"/>
+                <a:cs typeface="Roboto Mono" pitchFamily="34" charset="-120"/>
+              </a:rPr>
+              <a:t>    instruction="Check regional BigQuery warehouse stock via MCP and reserve safety stock.",</a:t>
+            </a:r>
+            <a:endParaRPr lang="en-US" sz="680" dirty="0"/>
+          </a:p>
+          <a:p>
+            <a:pPr indent="0" marL="0">
+              <a:lnSpc>
+                <a:spcPct val="108000"/>
+              </a:lnSpc>
+              <a:buNone/>
+            </a:pPr>
+            <a:r>
+              <a:rPr lang="en-US" sz="680" dirty="0">
+                <a:solidFill>
+                  <a:srgbClr val="188038"/>
+                </a:solidFill>
+                <a:latin typeface="Roboto Mono" pitchFamily="34" charset="0"/>
+                <a:ea typeface="Roboto Mono" pitchFamily="34" charset="-122"/>
+                <a:cs typeface="Roboto Mono" pitchFamily="34" charset="-120"/>
+              </a:rPr>
+              <a:t>    tools=[inventory_mcp_tools],</a:t>
+            </a:r>
+            <a:endParaRPr lang="en-US" sz="680" dirty="0"/>
+          </a:p>
+          <a:p>
+            <a:pPr indent="0" marL="0">
+              <a:lnSpc>
+                <a:spcPct val="108000"/>
+              </a:lnSpc>
+              <a:buNone/>
+            </a:pPr>
+            <a:r>
+              <a:rPr lang="en-US" sz="680" dirty="0">
+                <a:solidFill>
+                  <a:srgbClr val="188038"/>
+                </a:solidFill>
+                <a:latin typeface="Roboto Mono" pitchFamily="34" charset="0"/>
+                <a:ea typeface="Roboto Mono" pitchFamily="34" charset="-122"/>
+                <a:cs typeface="Roboto Mono" pitchFamily="34" charset="-120"/>
               </a:rPr>
               <a:t>)</a:t>
             </a:r>
-            <a:endParaRPr lang="en-US" sz="690" dirty="0"/>
+            <a:endParaRPr lang="en-US" sz="680" dirty="0"/>
           </a:p>
         </p:txBody>
       </p:sp>
@@ -12715,17 +12713,17 @@
           <a:ln/>
         </p:spPr>
         <p:txBody>
-          <a:bodyPr wrap="square" rtlCol="0" anchor="t"/>
-          <a:lstStyle/>
-          <a:p>
-            <a:pPr indent="0" marL="0">
-              <a:lnSpc>
-                <a:spcPct val="118000"/>
-              </a:lnSpc>
-              <a:buNone/>
-            </a:pPr>
-            <a:r>
-              <a:rPr lang="en-US" sz="800" b="1" dirty="0">
+          <a:bodyPr wrap="square" lIns="0" tIns="0" rIns="0" bIns="0" rtlCol="0" anchor="t"/>
+          <a:lstStyle/>
+          <a:p>
+            <a:pPr indent="0" marL="0">
+              <a:lnSpc>
+                <a:spcPct val="120000"/>
+              </a:lnSpc>
+              <a:buNone/>
+            </a:pPr>
+            <a:r>
+              <a:rPr lang="en-US" sz="790" b="1" dirty="0">
                 <a:solidFill>
                   <a:srgbClr val="1A73E8"/>
                 </a:solidFill>
@@ -12737,12 +12735,12 @@
             </a:r>
             <a:pPr indent="0" marL="0">
               <a:lnSpc>
-                <a:spcPct val="118000"/>
-              </a:lnSpc>
-              <a:buNone/>
-            </a:pPr>
-            <a:r>
-              <a:rPr lang="en-US" sz="780" dirty="0">
+                <a:spcPct val="120000"/>
+              </a:lnSpc>
+              <a:buNone/>
+            </a:pPr>
+            <a:r>
+              <a:rPr lang="en-US" sz="770" dirty="0">
                 <a:solidFill>
                   <a:srgbClr val="3C4043"/>
                 </a:solidFill>
@@ -12750,17 +12748,19 @@
                 <a:ea typeface="Arial" pitchFamily="34" charset="-122"/>
                 <a:cs typeface="Arial" pitchFamily="34" charset="-120"/>
               </a:rPr>
-              <a:t>Read the canonical Google Cloud Architecture Center reference architecture.
-</a:t>
-            </a:r>
-            <a:pPr indent="0" marL="0">
-              <a:lnSpc>
-                <a:spcPct val="118000"/>
-              </a:lnSpc>
-              <a:buNone/>
-            </a:pPr>
-            <a:r>
-              <a:rPr lang="en-US" sz="800" b="1" dirty="0">
+              <a:t>Read the canonical Google Cloud Architecture Center reference architecture.</a:t>
+            </a:r>
+            <a:endParaRPr lang="en-US" sz="790" dirty="0"/>
+          </a:p>
+          <a:p>
+            <a:pPr indent="0" marL="0">
+              <a:lnSpc>
+                <a:spcPct val="120000"/>
+              </a:lnSpc>
+              <a:buNone/>
+            </a:pPr>
+            <a:r>
+              <a:rPr lang="en-US" sz="790" b="1" dirty="0">
                 <a:solidFill>
                   <a:srgbClr val="1A73E8"/>
                 </a:solidFill>
@@ -12772,12 +12772,12 @@
             </a:r>
             <a:pPr indent="0" marL="0">
               <a:lnSpc>
-                <a:spcPct val="118000"/>
-              </a:lnSpc>
-              <a:buNone/>
-            </a:pPr>
-            <a:r>
-              <a:rPr lang="en-US" sz="780" dirty="0">
+                <a:spcPct val="120000"/>
+              </a:lnSpc>
+              <a:buNone/>
+            </a:pPr>
+            <a:r>
+              <a:rPr lang="en-US" sz="770" dirty="0">
                 <a:solidFill>
                   <a:srgbClr val="3C4043"/>
                 </a:solidFill>
@@ -12785,17 +12785,19 @@
                 <a:ea typeface="Arial" pitchFamily="34" charset="-122"/>
                 <a:cs typeface="Arial" pitchFamily="34" charset="-120"/>
               </a:rPr>
-              <a:t>Build hierarchical multi-agent systems, deterministic callbacks, and MCP toolsets.
-</a:t>
-            </a:r>
-            <a:pPr indent="0" marL="0">
-              <a:lnSpc>
-                <a:spcPct val="118000"/>
-              </a:lnSpc>
-              <a:buNone/>
-            </a:pPr>
-            <a:r>
-              <a:rPr lang="en-US" sz="800" b="1" dirty="0">
+              <a:t>Build hierarchical multi-agent systems, deterministic callbacks, and MCP toolsets.</a:t>
+            </a:r>
+            <a:endParaRPr lang="en-US" sz="790" dirty="0"/>
+          </a:p>
+          <a:p>
+            <a:pPr indent="0" marL="0">
+              <a:lnSpc>
+                <a:spcPct val="120000"/>
+              </a:lnSpc>
+              <a:buNone/>
+            </a:pPr>
+            <a:r>
+              <a:rPr lang="en-US" sz="790" b="1" dirty="0">
                 <a:solidFill>
                   <a:srgbClr val="1A73E8"/>
                 </a:solidFill>
@@ -12807,12 +12809,12 @@
             </a:r>
             <a:pPr indent="0" marL="0">
               <a:lnSpc>
-                <a:spcPct val="118000"/>
-              </a:lnSpc>
-              <a:buNone/>
-            </a:pPr>
-            <a:r>
-              <a:rPr lang="en-US" sz="780" dirty="0">
+                <a:spcPct val="120000"/>
+              </a:lnSpc>
+              <a:buNone/>
+            </a:pPr>
+            <a:r>
+              <a:rPr lang="en-US" sz="770" dirty="0">
                 <a:solidFill>
                   <a:srgbClr val="3C4043"/>
                 </a:solidFill>
@@ -12820,17 +12822,19 @@
                 <a:ea typeface="Arial" pitchFamily="34" charset="-122"/>
                 <a:cs typeface="Arial" pitchFamily="34" charset="-120"/>
               </a:rPr>
-              <a:t>Explore managed runtime deployment, Sessions, Memory Bank, and Context Caching.
-</a:t>
-            </a:r>
-            <a:pPr indent="0" marL="0">
-              <a:lnSpc>
-                <a:spcPct val="118000"/>
-              </a:lnSpc>
-              <a:buNone/>
-            </a:pPr>
-            <a:r>
-              <a:rPr lang="en-US" sz="800" b="1" dirty="0">
+              <a:t>Explore managed runtime deployment, Sessions, Memory Bank, and Context Caching.</a:t>
+            </a:r>
+            <a:endParaRPr lang="en-US" sz="790" dirty="0"/>
+          </a:p>
+          <a:p>
+            <a:pPr indent="0" marL="0">
+              <a:lnSpc>
+                <a:spcPct val="120000"/>
+              </a:lnSpc>
+              <a:buNone/>
+            </a:pPr>
+            <a:r>
+              <a:rPr lang="en-US" sz="790" b="1" dirty="0">
                 <a:solidFill>
                   <a:srgbClr val="1A73E8"/>
                 </a:solidFill>
@@ -12842,12 +12846,12 @@
             </a:r>
             <a:pPr indent="0" marL="0">
               <a:lnSpc>
-                <a:spcPct val="118000"/>
-              </a:lnSpc>
-              <a:buNone/>
-            </a:pPr>
-            <a:r>
-              <a:rPr lang="en-US" sz="780" dirty="0">
+                <a:spcPct val="120000"/>
+              </a:lnSpc>
+              <a:buNone/>
+            </a:pPr>
+            <a:r>
+              <a:rPr lang="en-US" sz="770" dirty="0">
                 <a:solidFill>
                   <a:srgbClr val="3C4043"/>
                 </a:solidFill>
@@ -12857,7 +12861,7 @@
               </a:rPr>
               <a:t>Review best practices for security, reliability, operational efficiency, and cost optimization.</a:t>
             </a:r>
-            <a:endParaRPr lang="en-US" sz="800" dirty="0"/>
+            <a:endParaRPr lang="en-US" sz="790" dirty="0"/>
           </a:p>
         </p:txBody>
       </p:sp>
@@ -12941,12 +12945,12 @@
           <a:ln/>
         </p:spPr>
         <p:txBody>
-          <a:bodyPr wrap="square" rtlCol="0" anchor="t"/>
-          <a:lstStyle/>
-          <a:p>
-            <a:pPr indent="0" marL="0">
-              <a:lnSpc>
-                <a:spcPct val="122000"/>
+          <a:bodyPr wrap="square" lIns="0" tIns="0" rIns="0" bIns="0" rtlCol="0" anchor="t"/>
+          <a:lstStyle/>
+          <a:p>
+            <a:pPr indent="0" marL="0">
+              <a:lnSpc>
+                <a:spcPct val="124000"/>
               </a:lnSpc>
               <a:buNone/>
             </a:pPr>
@@ -12959,17 +12963,19 @@
                 <a:ea typeface="Arial" pitchFamily="34" charset="-122"/>
                 <a:cs typeface="Arial" pitchFamily="34" charset="-120"/>
               </a:rPr>
-              <a:t>Except as otherwise noted, the content of this page is licensed under the Creative Commons Attribution 4.0 License, and code samples are licensed under the Apache 2.0 License.
-</a:t>
-            </a:r>
-            <a:pPr indent="0" marL="0">
-              <a:lnSpc>
-                <a:spcPct val="122000"/>
-              </a:lnSpc>
-              <a:buNone/>
-            </a:pPr>
-            <a:r>
-              <a:rPr lang="en-US" sz="820" b="1" dirty="0">
+              <a:t>Except as otherwise noted, the content of this page is licensed under the Creative Commons Attribution 4.0 License, and code samples are licensed under the Apache 2.0 License.</a:t>
+            </a:r>
+            <a:endParaRPr lang="en-US" sz="780" dirty="0"/>
+          </a:p>
+          <a:p>
+            <a:pPr indent="0" marL="0">
+              <a:lnSpc>
+                <a:spcPct val="124000"/>
+              </a:lnSpc>
+              <a:buNone/>
+            </a:pPr>
+            <a:r>
+              <a:rPr lang="en-US" sz="810" b="1" dirty="0">
                 <a:solidFill>
                   <a:srgbClr val="202124"/>
                 </a:solidFill>
@@ -12981,12 +12987,12 @@
             </a:r>
             <a:pPr indent="0" marL="0">
               <a:lnSpc>
-                <a:spcPct val="122000"/>
-              </a:lnSpc>
-              <a:buNone/>
-            </a:pPr>
-            <a:r>
-              <a:rPr lang="en-US" sz="820" dirty="0">
+                <a:spcPct val="124000"/>
+              </a:lnSpc>
+              <a:buNone/>
+            </a:pPr>
+            <a:r>
+              <a:rPr lang="en-US" sz="810" dirty="0">
                 <a:solidFill>
                   <a:srgbClr val="3C4043"/>
                 </a:solidFill>
@@ -12994,17 +13000,19 @@
                 <a:ea typeface="Arial" pitchFamily="34" charset="-122"/>
                 <a:cs typeface="Arial" pitchFamily="34" charset="-120"/>
               </a:rPr>
-              <a:t>Google Cloud Partner Engineering • Enterprise AI Architecture Team
-</a:t>
-            </a:r>
-            <a:pPr indent="0" marL="0">
-              <a:lnSpc>
-                <a:spcPct val="122000"/>
-              </a:lnSpc>
-              <a:buNone/>
-            </a:pPr>
-            <a:r>
-              <a:rPr lang="en-US" sz="820" b="1" dirty="0">
+              <a:t>Google Cloud Partner Engineering • Enterprise AI Architecture Team</a:t>
+            </a:r>
+            <a:endParaRPr lang="en-US" sz="780" dirty="0"/>
+          </a:p>
+          <a:p>
+            <a:pPr indent="0" marL="0">
+              <a:lnSpc>
+                <a:spcPct val="124000"/>
+              </a:lnSpc>
+              <a:buNone/>
+            </a:pPr>
+            <a:r>
+              <a:rPr lang="en-US" sz="810" b="1" dirty="0">
                 <a:solidFill>
                   <a:srgbClr val="202124"/>
                 </a:solidFill>
@@ -13016,12 +13024,12 @@
             </a:r>
             <a:pPr indent="0" marL="0">
               <a:lnSpc>
-                <a:spcPct val="122000"/>
-              </a:lnSpc>
-              <a:buNone/>
-            </a:pPr>
-            <a:r>
-              <a:rPr lang="en-US" sz="820" dirty="0">
+                <a:spcPct val="124000"/>
+              </a:lnSpc>
+              <a:buNone/>
+            </a:pPr>
+            <a:r>
+              <a:rPr lang="en-US" sz="810" dirty="0">
                 <a:solidFill>
                   <a:srgbClr val="3C4043"/>
                 </a:solidFill>
@@ -13029,12 +13037,14 @@
                 <a:ea typeface="Arial" pitchFamily="34" charset="-122"/>
                 <a:cs typeface="Arial" pitchFamily="34" charset="-120"/>
               </a:rPr>
-              <a:t>Principal AI Architect &amp; Field Deployment Engineering • Google Cloud Architecture Center Engineering Team
-</a:t>
-            </a:r>
-            <a:pPr indent="0" marL="0">
-              <a:lnSpc>
-                <a:spcPct val="122000"/>
+              <a:t>Principal AI Architect &amp; Field Deployment Engineering • Google Cloud Architecture Center Engineering Team</a:t>
+            </a:r>
+            <a:endParaRPr lang="en-US" sz="780" dirty="0"/>
+          </a:p>
+          <a:p>
+            <a:pPr indent="0" marL="0">
+              <a:lnSpc>
+                <a:spcPct val="124000"/>
               </a:lnSpc>
               <a:buNone/>
             </a:pPr>
